--- a/adval-mbo/スペースマーケット社合併提案_検討_20260923.pptx
+++ b/adval-mbo/スペースマーケット社合併提案_検討_20260923.pptx
@@ -16,9 +16,10 @@
     <p:sldId id="264" r:id="rId10"/>
     <p:sldId id="265" r:id="rId11"/>
     <p:sldId id="266" r:id="rId12"/>
+    <p:sldId id="267" r:id="rId13"/>
   </p:sldIdLst>
   <p:notesMasterIdLst>
-    <p:notesMasterId r:id="rId13"/>
+    <p:notesMasterId r:id="rId14"/>
   </p:notesMasterIdLst>
   <p:sldSz cx="12192000" cy="6858000"/>
   <p:notesSz cx="6858000" cy="12192000"/>
@@ -888,7 +889,7 @@
           <a:p>
             <a:r>
               <a:rPr lang="en-US" dirty="0"/>
-              <a:t>27.79%のほうが数字は大きい。だが質が違う、と正直に説明する。</a:t>
+              <a:t>重松氏の意向を覚書にする、が今回の追加論点。口頭前提では銀行に持ち込めない。</a:t>
             </a:r>
             <a:endParaRPr lang="en-US" dirty="0"/>
           </a:p>
@@ -976,7 +977,7 @@
           <a:p>
             <a:r>
               <a:rPr lang="en-US" dirty="0"/>
-              <a:t>もし合併を選ぶなら増資で入れる、という代替案を必ず置いておく。</a:t>
+              <a:t>27.79%のほうが数字は大きい。だが質が違う、と正直に説明する。</a:t>
             </a:r>
             <a:endParaRPr lang="en-US" dirty="0"/>
           </a:p>
@@ -1000,6 +1001,94 @@
             <a:fld id="{F7021451-1387-4CA6-816F-3879F97B5CBC}" type="slidenum">
               <a:rPr lang="en-US"/>
               <a:t>11</a:t>
+            </a:fld>
+            <a:endParaRPr lang="en-US"/>
+          </a:p>
+        </p:txBody>
+      </p:sp>
+    </p:spTree>
+    <p:extLst>
+      <p:ext uri="{BB962C8B-B14F-4D97-AF65-F5344CB8AC3E}">
+        <p14:creationId xmlns:p14="http://schemas.microsoft.com/office/powerpoint/2010/main" val="1024086991"/>
+      </p:ext>
+    </p:extLst>
+  </p:cSld>
+  <p:clrMapOvr>
+    <a:masterClrMapping/>
+  </p:clrMapOvr>
+</p:notes>
+</file>
+
+<file path=ppt/notesSlides/notesSlide12.xml><?xml version="1.0" encoding="utf-8"?>
+<p:notes xmlns:a="http://schemas.openxmlformats.org/drawingml/2006/main" xmlns:r="http://schemas.openxmlformats.org/officeDocument/2006/relationships" xmlns:p="http://schemas.openxmlformats.org/presentationml/2006/main">
+  <p:cSld>
+    <p:spTree>
+      <p:nvGrpSpPr>
+        <p:cNvPr id="1" name=""/>
+        <p:cNvGrpSpPr/>
+        <p:nvPr/>
+      </p:nvGrpSpPr>
+      <p:grpSpPr>
+        <a:xfrm>
+          <a:off x="0" y="0"/>
+          <a:ext cx="0" cy="0"/>
+          <a:chOff x="0" y="0"/>
+          <a:chExt cx="0" cy="0"/>
+        </a:xfrm>
+      </p:grpSpPr>
+      <p:sp>
+        <p:nvSpPr>
+          <p:cNvPr id="2" name="Slide Image Placeholder 1"/>
+          <p:cNvSpPr>
+            <a:spLocks noGrp="1" noRot="1" noChangeAspect="1"/>
+          </p:cNvSpPr>
+          <p:nvPr>
+            <p:ph type="sldImg"/>
+          </p:nvPr>
+        </p:nvSpPr>
+        <p:spPr/>
+      </p:sp>
+      <p:sp>
+        <p:nvSpPr>
+          <p:cNvPr id="3" name="Notes Placeholder 2"/>
+          <p:cNvSpPr>
+            <a:spLocks noGrp="1"/>
+          </p:cNvSpPr>
+          <p:nvPr>
+            <p:ph type="body" idx="1"/>
+          </p:nvPr>
+        </p:nvSpPr>
+        <p:spPr/>
+        <p:txBody>
+          <a:bodyPr/>
+          <a:lstStyle/>
+          <a:p>
+            <a:r>
+              <a:rPr lang="en-US" dirty="0"/>
+              <a:t>もし合併を選ぶなら増資で入れる、という代替案を必ず置いておく。</a:t>
+            </a:r>
+            <a:endParaRPr lang="en-US" dirty="0"/>
+          </a:p>
+        </p:txBody>
+      </p:sp>
+      <p:sp>
+        <p:nvSpPr>
+          <p:cNvPr id="4" name="Slide Number Placeholder 3"/>
+          <p:cNvSpPr>
+            <a:spLocks noGrp="1"/>
+          </p:cNvSpPr>
+          <p:nvPr>
+            <p:ph type="sldNum" sz="quarter" idx="10"/>
+          </p:nvPr>
+        </p:nvSpPr>
+        <p:spPr/>
+        <p:txBody>
+          <a:bodyPr/>
+          <a:lstStyle/>
+          <a:p>
+            <a:fld id="{F7021451-1387-4CA6-816F-3879F97B5CBC}" type="slidenum">
+              <a:rPr lang="en-US"/>
+              <a:t>12</a:t>
             </a:fld>
             <a:endParaRPr lang="en-US"/>
           </a:p>
@@ -1416,7 +1505,7 @@
           <a:p>
             <a:r>
               <a:rPr lang="en-US" dirty="0"/>
-              <a:t>27.79%までは静かに買える。過半数を狙うとTOBになる、という段差を理解してもらう。</a:t>
+              <a:t>のれん控除後11.8%が銀行の見方。MBO後なら26.3%。この14.5ptの差が答え。</a:t>
             </a:r>
             <a:endParaRPr lang="en-US" dirty="0"/>
           </a:p>
@@ -1504,7 +1593,7 @@
           <a:p>
             <a:r>
               <a:rPr lang="en-US" dirty="0"/>
-              <a:t>229円基準に統一した版。前回230円で作った数値から小数点以下が動いている。</a:t>
+              <a:t>27.79%までは静かに買える。過半数を狙うとTOBになる、という段差を理解してもらう。</a:t>
             </a:r>
             <a:endParaRPr lang="en-US" dirty="0"/>
           </a:p>
@@ -1592,7 +1681,7 @@
           <a:p>
             <a:r>
               <a:rPr lang="en-US" dirty="0"/>
-              <a:t>④の相反関係は重要。買い増すほど上場が危うくなるというジレンマ。</a:t>
+              <a:t>229円基準に統一した版。前回230円で作った数値から小数点以下が動いている。</a:t>
             </a:r>
             <a:endParaRPr lang="en-US" dirty="0"/>
           </a:p>
@@ -1680,7 +1769,7 @@
           <a:p>
             <a:r>
               <a:rPr lang="en-US" dirty="0"/>
-              <a:t>重松氏の意向を覚書にする、が今回の追加論点。口頭前提では銀行に持ち込めない。</a:t>
+              <a:t>④の相反関係は重要。買い増すほど上場が危うくなるというジレンマ。</a:t>
             </a:r>
             <a:endParaRPr lang="en-US" dirty="0"/>
           </a:p>
@@ -2570,7 +2659,7 @@
                 <a:ea typeface="Meiryo" pitchFamily="34" charset="-122"/>
                 <a:cs typeface="Meiryo" pitchFamily="34" charset="-120"/>
               </a:rPr>
-              <a:t>提案</a:t>
+              <a:t>論点</a:t>
             </a:r>
             <a:endParaRPr lang="en-US" sz="1100" dirty="0"/>
           </a:p>
@@ -2609,6 +2698,1229 @@
                 <a:ea typeface="Meiryo" pitchFamily="34" charset="-122"/>
                 <a:cs typeface="Meiryo" pitchFamily="34" charset="-120"/>
               </a:rPr>
+              <a:t>評価額と、支払通貨としての株価</a:t>
+            </a:r>
+            <a:endParaRPr lang="en-US" sz="2800" dirty="0"/>
+          </a:p>
+        </p:txBody>
+      </p:sp>
+      <p:sp>
+        <p:nvSpPr>
+          <p:cNvPr id="4" name="Shape 2"/>
+          <p:cNvSpPr/>
+          <p:nvPr/>
+        </p:nvSpPr>
+        <p:spPr>
+          <a:xfrm>
+            <a:off x="640080" y="1554480"/>
+            <a:ext cx="5349240" cy="2487168"/>
+          </a:xfrm>
+          <a:prstGeom prst="roundRect">
+            <a:avLst>
+              <a:gd name="adj" fmla="val 2206"/>
+            </a:avLst>
+          </a:prstGeom>
+          <a:solidFill>
+            <a:srgbClr val="FFFFFF"/>
+          </a:solidFill>
+          <a:ln w="12700">
+            <a:solidFill>
+              <a:srgbClr val="D9E0E7"/>
+            </a:solidFill>
+            <a:prstDash val="solid"/>
+          </a:ln>
+          <a:effectLst>
+            <a:outerShdw sx="100000" sy="100000" kx="0" ky="0" algn="bl" rotWithShape="0" blurRad="101600" dist="12700" dir="5400000">
+              <a:srgbClr val="AAB4BE">
+                <a:alpha val="18000"/>
+              </a:srgbClr>
+            </a:outerShdw>
+          </a:effectLst>
+        </p:spPr>
+      </p:sp>
+      <p:sp>
+        <p:nvSpPr>
+          <p:cNvPr id="5" name="Text 3"/>
+          <p:cNvSpPr txBox="1"/>
+          <p:nvPr/>
+        </p:nvSpPr>
+        <p:spPr>
+          <a:xfrm>
+            <a:off x="914400" y="1755648"/>
+            <a:ext cx="4754880" cy="274320"/>
+          </a:xfrm>
+          <a:prstGeom prst="rect">
+            <a:avLst/>
+          </a:prstGeom>
+          <a:noFill/>
+          <a:ln/>
+        </p:spPr>
+        <p:txBody>
+          <a:bodyPr wrap="square" lIns="0" tIns="0" rIns="0" bIns="0" rtlCol="0" anchor="ctr"/>
+          <a:lstStyle/>
+          <a:p>
+            <a:pPr indent="0" marL="0">
+              <a:buNone/>
+            </a:pPr>
+            <a:r>
+              <a:rPr lang="en-US" sz="1350" b="1" dirty="0">
+                <a:solidFill>
+                  <a:srgbClr val="1E2A38"/>
+                </a:solidFill>
+                <a:latin typeface="Meiryo" pitchFamily="34" charset="0"/>
+                <a:ea typeface="Meiryo" pitchFamily="34" charset="-122"/>
+                <a:cs typeface="Meiryo" pitchFamily="34" charset="-120"/>
+              </a:rPr>
+              <a:t>あどばるの評価額</a:t>
+            </a:r>
+            <a:endParaRPr lang="en-US" sz="1350" dirty="0"/>
+          </a:p>
+        </p:txBody>
+      </p:sp>
+      <p:sp>
+        <p:nvSpPr>
+          <p:cNvPr id="6" name="Text 4"/>
+          <p:cNvSpPr txBox="1"/>
+          <p:nvPr/>
+        </p:nvSpPr>
+        <p:spPr>
+          <a:xfrm>
+            <a:off x="914400" y="2212848"/>
+            <a:ext cx="3291840" cy="274320"/>
+          </a:xfrm>
+          <a:prstGeom prst="rect">
+            <a:avLst/>
+          </a:prstGeom>
+          <a:noFill/>
+          <a:ln/>
+        </p:spPr>
+        <p:txBody>
+          <a:bodyPr wrap="square" lIns="0" tIns="0" rIns="0" bIns="0" rtlCol="0" anchor="ctr"/>
+          <a:lstStyle/>
+          <a:p>
+            <a:pPr indent="0" marL="0">
+              <a:buNone/>
+            </a:pPr>
+            <a:r>
+              <a:rPr lang="en-US" sz="1150" dirty="0">
+                <a:solidFill>
+                  <a:srgbClr val="3D4E60"/>
+                </a:solidFill>
+                <a:latin typeface="Meiryo" pitchFamily="34" charset="0"/>
+                <a:ea typeface="Meiryo" pitchFamily="34" charset="-122"/>
+                <a:cs typeface="Meiryo" pitchFamily="34" charset="-120"/>
+              </a:rPr>
+              <a:t>スペースマーケット社LOI</a:t>
+            </a:r>
+            <a:endParaRPr lang="en-US" sz="1150" dirty="0"/>
+          </a:p>
+        </p:txBody>
+      </p:sp>
+      <p:sp>
+        <p:nvSpPr>
+          <p:cNvPr id="7" name="Text 5"/>
+          <p:cNvSpPr txBox="1"/>
+          <p:nvPr/>
+        </p:nvSpPr>
+        <p:spPr>
+          <a:xfrm>
+            <a:off x="4206240" y="2176272"/>
+            <a:ext cx="1463040" cy="329184"/>
+          </a:xfrm>
+          <a:prstGeom prst="rect">
+            <a:avLst/>
+          </a:prstGeom>
+          <a:noFill/>
+          <a:ln/>
+        </p:spPr>
+        <p:txBody>
+          <a:bodyPr wrap="square" lIns="0" tIns="0" rIns="0" bIns="0" rtlCol="0" anchor="ctr"/>
+          <a:lstStyle/>
+          <a:p>
+            <a:pPr algn="r" indent="0" marL="0">
+              <a:buNone/>
+            </a:pPr>
+            <a:r>
+              <a:rPr lang="en-US" sz="1600" b="1" dirty="0">
+                <a:solidFill>
+                  <a:srgbClr val="8A2E26"/>
+                </a:solidFill>
+                <a:latin typeface="Meiryo" pitchFamily="34" charset="0"/>
+                <a:ea typeface="Meiryo" pitchFamily="34" charset="-122"/>
+                <a:cs typeface="Meiryo" pitchFamily="34" charset="-120"/>
+              </a:rPr>
+              <a:t>18.0億円</a:t>
+            </a:r>
+            <a:endParaRPr lang="en-US" sz="1600" dirty="0"/>
+          </a:p>
+        </p:txBody>
+      </p:sp>
+      <p:sp>
+        <p:nvSpPr>
+          <p:cNvPr id="8" name="Text 6"/>
+          <p:cNvSpPr txBox="1"/>
+          <p:nvPr/>
+        </p:nvSpPr>
+        <p:spPr>
+          <a:xfrm>
+            <a:off x="914400" y="2715768"/>
+            <a:ext cx="3291840" cy="274320"/>
+          </a:xfrm>
+          <a:prstGeom prst="rect">
+            <a:avLst/>
+          </a:prstGeom>
+          <a:noFill/>
+          <a:ln/>
+        </p:spPr>
+        <p:txBody>
+          <a:bodyPr wrap="square" lIns="0" tIns="0" rIns="0" bIns="0" rtlCol="0" anchor="ctr"/>
+          <a:lstStyle/>
+          <a:p>
+            <a:pPr indent="0" marL="0">
+              <a:buNone/>
+            </a:pPr>
+            <a:r>
+              <a:rPr lang="en-US" sz="1150" dirty="0">
+                <a:solidFill>
+                  <a:srgbClr val="3D4E60"/>
+                </a:solidFill>
+                <a:latin typeface="Meiryo" pitchFamily="34" charset="0"/>
+                <a:ea typeface="Meiryo" pitchFamily="34" charset="-122"/>
+                <a:cs typeface="Meiryo" pitchFamily="34" charset="-120"/>
+              </a:rPr>
+              <a:t>MBOの前提評価（Pre）</a:t>
+            </a:r>
+            <a:endParaRPr lang="en-US" sz="1150" dirty="0"/>
+          </a:p>
+        </p:txBody>
+      </p:sp>
+      <p:sp>
+        <p:nvSpPr>
+          <p:cNvPr id="9" name="Text 7"/>
+          <p:cNvSpPr txBox="1"/>
+          <p:nvPr/>
+        </p:nvSpPr>
+        <p:spPr>
+          <a:xfrm>
+            <a:off x="4206240" y="2679192"/>
+            <a:ext cx="1463040" cy="329184"/>
+          </a:xfrm>
+          <a:prstGeom prst="rect">
+            <a:avLst/>
+          </a:prstGeom>
+          <a:noFill/>
+          <a:ln/>
+        </p:spPr>
+        <p:txBody>
+          <a:bodyPr wrap="square" lIns="0" tIns="0" rIns="0" bIns="0" rtlCol="0" anchor="ctr"/>
+          <a:lstStyle/>
+          <a:p>
+            <a:pPr algn="r" indent="0" marL="0">
+              <a:buNone/>
+            </a:pPr>
+            <a:r>
+              <a:rPr lang="en-US" sz="1600" b="1" dirty="0">
+                <a:solidFill>
+                  <a:srgbClr val="1E2A38"/>
+                </a:solidFill>
+                <a:latin typeface="Meiryo" pitchFamily="34" charset="0"/>
+                <a:ea typeface="Meiryo" pitchFamily="34" charset="-122"/>
+                <a:cs typeface="Meiryo" pitchFamily="34" charset="-120"/>
+              </a:rPr>
+              <a:t>20.0億円</a:t>
+            </a:r>
+            <a:endParaRPr lang="en-US" sz="1600" dirty="0"/>
+          </a:p>
+        </p:txBody>
+      </p:sp>
+      <p:sp>
+        <p:nvSpPr>
+          <p:cNvPr id="10" name="Text 8"/>
+          <p:cNvSpPr txBox="1"/>
+          <p:nvPr/>
+        </p:nvSpPr>
+        <p:spPr>
+          <a:xfrm>
+            <a:off x="914400" y="3218688"/>
+            <a:ext cx="3291840" cy="274320"/>
+          </a:xfrm>
+          <a:prstGeom prst="rect">
+            <a:avLst/>
+          </a:prstGeom>
+          <a:noFill/>
+          <a:ln/>
+        </p:spPr>
+        <p:txBody>
+          <a:bodyPr wrap="square" lIns="0" tIns="0" rIns="0" bIns="0" rtlCol="0" anchor="ctr"/>
+          <a:lstStyle/>
+          <a:p>
+            <a:pPr indent="0" marL="0">
+              <a:buNone/>
+            </a:pPr>
+            <a:r>
+              <a:rPr lang="en-US" sz="1150" dirty="0">
+                <a:solidFill>
+                  <a:srgbClr val="3D4E60"/>
+                </a:solidFill>
+                <a:latin typeface="Meiryo" pitchFamily="34" charset="0"/>
+                <a:ea typeface="Meiryo" pitchFamily="34" charset="-122"/>
+                <a:cs typeface="Meiryo" pitchFamily="34" charset="-120"/>
+              </a:rPr>
+              <a:t>MBO取引後の株主価値</a:t>
+            </a:r>
+            <a:endParaRPr lang="en-US" sz="1150" dirty="0"/>
+          </a:p>
+        </p:txBody>
+      </p:sp>
+      <p:sp>
+        <p:nvSpPr>
+          <p:cNvPr id="11" name="Text 9"/>
+          <p:cNvSpPr txBox="1"/>
+          <p:nvPr/>
+        </p:nvSpPr>
+        <p:spPr>
+          <a:xfrm>
+            <a:off x="4206240" y="3182112"/>
+            <a:ext cx="1463040" cy="329184"/>
+          </a:xfrm>
+          <a:prstGeom prst="rect">
+            <a:avLst/>
+          </a:prstGeom>
+          <a:noFill/>
+          <a:ln/>
+        </p:spPr>
+        <p:txBody>
+          <a:bodyPr wrap="square" lIns="0" tIns="0" rIns="0" bIns="0" rtlCol="0" anchor="ctr"/>
+          <a:lstStyle/>
+          <a:p>
+            <a:pPr algn="r" indent="0" marL="0">
+              <a:buNone/>
+            </a:pPr>
+            <a:r>
+              <a:rPr lang="en-US" sz="1600" b="1" dirty="0">
+                <a:solidFill>
+                  <a:srgbClr val="2C6A4E"/>
+                </a:solidFill>
+                <a:latin typeface="Meiryo" pitchFamily="34" charset="0"/>
+                <a:ea typeface="Meiryo" pitchFamily="34" charset="-122"/>
+                <a:cs typeface="Meiryo" pitchFamily="34" charset="-120"/>
+              </a:rPr>
+              <a:t>26.85億円</a:t>
+            </a:r>
+            <a:endParaRPr lang="en-US" sz="1600" dirty="0"/>
+          </a:p>
+        </p:txBody>
+      </p:sp>
+      <p:sp>
+        <p:nvSpPr>
+          <p:cNvPr id="12" name="Text 10"/>
+          <p:cNvSpPr txBox="1"/>
+          <p:nvPr/>
+        </p:nvSpPr>
+        <p:spPr>
+          <a:xfrm>
+            <a:off x="914400" y="3621024"/>
+            <a:ext cx="4800600" cy="411480"/>
+          </a:xfrm>
+          <a:prstGeom prst="rect">
+            <a:avLst/>
+          </a:prstGeom>
+          <a:noFill/>
+          <a:ln/>
+        </p:spPr>
+        <p:txBody>
+          <a:bodyPr wrap="square" lIns="0" tIns="0" rIns="0" bIns="0" rtlCol="0" anchor="ctr"/>
+          <a:lstStyle/>
+          <a:p>
+            <a:pPr indent="0" marL="0">
+              <a:buNone/>
+            </a:pPr>
+            <a:r>
+              <a:rPr lang="en-US" sz="1050" dirty="0">
+                <a:solidFill>
+                  <a:srgbClr val="3D4E60"/>
+                </a:solidFill>
+                <a:latin typeface="Meiryo" pitchFamily="34" charset="0"/>
+                <a:ea typeface="Meiryo" pitchFamily="34" charset="-122"/>
+                <a:cs typeface="Meiryo" pitchFamily="34" charset="-120"/>
+              </a:rPr>
+              <a:t>LOIの18億円は、MBOの前提である20億円を下回ります。まず評価額そのものが交渉の対象です。</a:t>
+            </a:r>
+            <a:endParaRPr lang="en-US" sz="1050" dirty="0"/>
+          </a:p>
+        </p:txBody>
+      </p:sp>
+      <p:sp>
+        <p:nvSpPr>
+          <p:cNvPr id="13" name="Shape 11"/>
+          <p:cNvSpPr/>
+          <p:nvPr/>
+        </p:nvSpPr>
+        <p:spPr>
+          <a:xfrm>
+            <a:off x="6172200" y="1554480"/>
+            <a:ext cx="5349240" cy="2487168"/>
+          </a:xfrm>
+          <a:prstGeom prst="roundRect">
+            <a:avLst>
+              <a:gd name="adj" fmla="val 2206"/>
+            </a:avLst>
+          </a:prstGeom>
+          <a:solidFill>
+            <a:srgbClr val="FFFFFF"/>
+          </a:solidFill>
+          <a:ln w="12700">
+            <a:solidFill>
+              <a:srgbClr val="D9E0E7"/>
+            </a:solidFill>
+            <a:prstDash val="solid"/>
+          </a:ln>
+          <a:effectLst>
+            <a:outerShdw sx="100000" sy="100000" kx="0" ky="0" algn="bl" rotWithShape="0" blurRad="101600" dist="12700" dir="5400000">
+              <a:srgbClr val="AAB4BE">
+                <a:alpha val="18000"/>
+              </a:srgbClr>
+            </a:outerShdw>
+          </a:effectLst>
+        </p:spPr>
+      </p:sp>
+      <p:sp>
+        <p:nvSpPr>
+          <p:cNvPr id="14" name="Text 12"/>
+          <p:cNvSpPr txBox="1"/>
+          <p:nvPr/>
+        </p:nvSpPr>
+        <p:spPr>
+          <a:xfrm>
+            <a:off x="6446520" y="1755648"/>
+            <a:ext cx="4754880" cy="274320"/>
+          </a:xfrm>
+          <a:prstGeom prst="rect">
+            <a:avLst/>
+          </a:prstGeom>
+          <a:noFill/>
+          <a:ln/>
+        </p:spPr>
+        <p:txBody>
+          <a:bodyPr wrap="square" lIns="0" tIns="0" rIns="0" bIns="0" rtlCol="0" anchor="ctr"/>
+          <a:lstStyle/>
+          <a:p>
+            <a:pPr indent="0" marL="0">
+              <a:buNone/>
+            </a:pPr>
+            <a:r>
+              <a:rPr lang="en-US" sz="1350" b="1" dirty="0">
+                <a:solidFill>
+                  <a:srgbClr val="1E2A38"/>
+                </a:solidFill>
+                <a:latin typeface="Meiryo" pitchFamily="34" charset="0"/>
+                <a:ea typeface="Meiryo" pitchFamily="34" charset="-122"/>
+                <a:cs typeface="Meiryo" pitchFamily="34" charset="-120"/>
+              </a:rPr>
+              <a:t>受け取る通貨（SM株価）の状況</a:t>
+            </a:r>
+            <a:endParaRPr lang="en-US" sz="1350" dirty="0"/>
+          </a:p>
+        </p:txBody>
+      </p:sp>
+      <p:sp>
+        <p:nvSpPr>
+          <p:cNvPr id="15" name="Text 13"/>
+          <p:cNvSpPr txBox="1"/>
+          <p:nvPr/>
+        </p:nvSpPr>
+        <p:spPr>
+          <a:xfrm>
+            <a:off x="6446520" y="2212848"/>
+            <a:ext cx="3291840" cy="274320"/>
+          </a:xfrm>
+          <a:prstGeom prst="rect">
+            <a:avLst/>
+          </a:prstGeom>
+          <a:noFill/>
+          <a:ln/>
+        </p:spPr>
+        <p:txBody>
+          <a:bodyPr wrap="square" lIns="0" tIns="0" rIns="0" bIns="0" rtlCol="0" anchor="ctr"/>
+          <a:lstStyle/>
+          <a:p>
+            <a:pPr indent="0" marL="0">
+              <a:buNone/>
+            </a:pPr>
+            <a:r>
+              <a:rPr lang="en-US" sz="1150" dirty="0">
+                <a:solidFill>
+                  <a:srgbClr val="3D4E60"/>
+                </a:solidFill>
+                <a:latin typeface="Meiryo" pitchFamily="34" charset="0"/>
+                <a:ea typeface="Meiryo" pitchFamily="34" charset="-122"/>
+                <a:cs typeface="Meiryo" pitchFamily="34" charset="-120"/>
+              </a:rPr>
+              <a:t>年初来高値（1月20日）</a:t>
+            </a:r>
+            <a:endParaRPr lang="en-US" sz="1150" dirty="0"/>
+          </a:p>
+        </p:txBody>
+      </p:sp>
+      <p:sp>
+        <p:nvSpPr>
+          <p:cNvPr id="16" name="Text 14"/>
+          <p:cNvSpPr txBox="1"/>
+          <p:nvPr/>
+        </p:nvSpPr>
+        <p:spPr>
+          <a:xfrm>
+            <a:off x="9738360" y="2176272"/>
+            <a:ext cx="1463040" cy="329184"/>
+          </a:xfrm>
+          <a:prstGeom prst="rect">
+            <a:avLst/>
+          </a:prstGeom>
+          <a:noFill/>
+          <a:ln/>
+        </p:spPr>
+        <p:txBody>
+          <a:bodyPr wrap="square" lIns="0" tIns="0" rIns="0" bIns="0" rtlCol="0" anchor="ctr"/>
+          <a:lstStyle/>
+          <a:p>
+            <a:pPr algn="r" indent="0" marL="0">
+              <a:buNone/>
+            </a:pPr>
+            <a:r>
+              <a:rPr lang="en-US" sz="1600" b="1" dirty="0">
+                <a:solidFill>
+                  <a:srgbClr val="7C8A99"/>
+                </a:solidFill>
+                <a:latin typeface="Meiryo" pitchFamily="34" charset="0"/>
+                <a:ea typeface="Meiryo" pitchFamily="34" charset="-122"/>
+                <a:cs typeface="Meiryo" pitchFamily="34" charset="-120"/>
+              </a:rPr>
+              <a:t>328円</a:t>
+            </a:r>
+            <a:endParaRPr lang="en-US" sz="1600" dirty="0"/>
+          </a:p>
+        </p:txBody>
+      </p:sp>
+      <p:sp>
+        <p:nvSpPr>
+          <p:cNvPr id="17" name="Text 15"/>
+          <p:cNvSpPr txBox="1"/>
+          <p:nvPr/>
+        </p:nvSpPr>
+        <p:spPr>
+          <a:xfrm>
+            <a:off x="6446520" y="2715768"/>
+            <a:ext cx="3291840" cy="274320"/>
+          </a:xfrm>
+          <a:prstGeom prst="rect">
+            <a:avLst/>
+          </a:prstGeom>
+          <a:noFill/>
+          <a:ln/>
+        </p:spPr>
+        <p:txBody>
+          <a:bodyPr wrap="square" lIns="0" tIns="0" rIns="0" bIns="0" rtlCol="0" anchor="ctr"/>
+          <a:lstStyle/>
+          <a:p>
+            <a:pPr indent="0" marL="0">
+              <a:buNone/>
+            </a:pPr>
+            <a:r>
+              <a:rPr lang="en-US" sz="1150" dirty="0">
+                <a:solidFill>
+                  <a:srgbClr val="3D4E60"/>
+                </a:solidFill>
+                <a:latin typeface="Meiryo" pitchFamily="34" charset="0"/>
+                <a:ea typeface="Meiryo" pitchFamily="34" charset="-122"/>
+                <a:cs typeface="Meiryo" pitchFamily="34" charset="-120"/>
+              </a:rPr>
+              <a:t>6ヶ月平均（推定）</a:t>
+            </a:r>
+            <a:endParaRPr lang="en-US" sz="1150" dirty="0"/>
+          </a:p>
+        </p:txBody>
+      </p:sp>
+      <p:sp>
+        <p:nvSpPr>
+          <p:cNvPr id="18" name="Text 16"/>
+          <p:cNvSpPr txBox="1"/>
+          <p:nvPr/>
+        </p:nvSpPr>
+        <p:spPr>
+          <a:xfrm>
+            <a:off x="9738360" y="2679192"/>
+            <a:ext cx="1463040" cy="329184"/>
+          </a:xfrm>
+          <a:prstGeom prst="rect">
+            <a:avLst/>
+          </a:prstGeom>
+          <a:noFill/>
+          <a:ln/>
+        </p:spPr>
+        <p:txBody>
+          <a:bodyPr wrap="square" lIns="0" tIns="0" rIns="0" bIns="0" rtlCol="0" anchor="ctr"/>
+          <a:lstStyle/>
+          <a:p>
+            <a:pPr algn="r" indent="0" marL="0">
+              <a:buNone/>
+            </a:pPr>
+            <a:r>
+              <a:rPr lang="en-US" sz="1600" b="1" dirty="0">
+                <a:solidFill>
+                  <a:srgbClr val="3D4E60"/>
+                </a:solidFill>
+                <a:latin typeface="Meiryo" pitchFamily="34" charset="0"/>
+                <a:ea typeface="Meiryo" pitchFamily="34" charset="-122"/>
+                <a:cs typeface="Meiryo" pitchFamily="34" charset="-120"/>
+              </a:rPr>
+              <a:t>約240円</a:t>
+            </a:r>
+            <a:endParaRPr lang="en-US" sz="1600" dirty="0"/>
+          </a:p>
+        </p:txBody>
+      </p:sp>
+      <p:sp>
+        <p:nvSpPr>
+          <p:cNvPr id="19" name="Text 17"/>
+          <p:cNvSpPr txBox="1"/>
+          <p:nvPr/>
+        </p:nvSpPr>
+        <p:spPr>
+          <a:xfrm>
+            <a:off x="6446520" y="3218688"/>
+            <a:ext cx="3291840" cy="274320"/>
+          </a:xfrm>
+          <a:prstGeom prst="rect">
+            <a:avLst/>
+          </a:prstGeom>
+          <a:noFill/>
+          <a:ln/>
+        </p:spPr>
+        <p:txBody>
+          <a:bodyPr wrap="square" lIns="0" tIns="0" rIns="0" bIns="0" rtlCol="0" anchor="ctr"/>
+          <a:lstStyle/>
+          <a:p>
+            <a:pPr indent="0" marL="0">
+              <a:buNone/>
+            </a:pPr>
+            <a:r>
+              <a:rPr lang="en-US" sz="1150" dirty="0">
+                <a:solidFill>
+                  <a:srgbClr val="3D4E60"/>
+                </a:solidFill>
+                <a:latin typeface="Meiryo" pitchFamily="34" charset="0"/>
+                <a:ea typeface="Meiryo" pitchFamily="34" charset="-122"/>
+                <a:cs typeface="Meiryo" pitchFamily="34" charset="-120"/>
+              </a:rPr>
+              <a:t>3ヶ月平均（推定）</a:t>
+            </a:r>
+            <a:endParaRPr lang="en-US" sz="1150" dirty="0"/>
+          </a:p>
+        </p:txBody>
+      </p:sp>
+      <p:sp>
+        <p:nvSpPr>
+          <p:cNvPr id="20" name="Text 18"/>
+          <p:cNvSpPr txBox="1"/>
+          <p:nvPr/>
+        </p:nvSpPr>
+        <p:spPr>
+          <a:xfrm>
+            <a:off x="9738360" y="3182112"/>
+            <a:ext cx="1463040" cy="329184"/>
+          </a:xfrm>
+          <a:prstGeom prst="rect">
+            <a:avLst/>
+          </a:prstGeom>
+          <a:noFill/>
+          <a:ln/>
+        </p:spPr>
+        <p:txBody>
+          <a:bodyPr wrap="square" lIns="0" tIns="0" rIns="0" bIns="0" rtlCol="0" anchor="ctr"/>
+          <a:lstStyle/>
+          <a:p>
+            <a:pPr algn="r" indent="0" marL="0">
+              <a:buNone/>
+            </a:pPr>
+            <a:r>
+              <a:rPr lang="en-US" sz="1600" b="1" dirty="0">
+                <a:solidFill>
+                  <a:srgbClr val="6E2639"/>
+                </a:solidFill>
+                <a:latin typeface="Meiryo" pitchFamily="34" charset="0"/>
+                <a:ea typeface="Meiryo" pitchFamily="34" charset="-122"/>
+                <a:cs typeface="Meiryo" pitchFamily="34" charset="-120"/>
+              </a:rPr>
+              <a:t>約229円</a:t>
+            </a:r>
+            <a:endParaRPr lang="en-US" sz="1600" dirty="0"/>
+          </a:p>
+        </p:txBody>
+      </p:sp>
+      <p:sp>
+        <p:nvSpPr>
+          <p:cNvPr id="21" name="Text 19"/>
+          <p:cNvSpPr txBox="1"/>
+          <p:nvPr/>
+        </p:nvSpPr>
+        <p:spPr>
+          <a:xfrm>
+            <a:off x="6446520" y="3621024"/>
+            <a:ext cx="4800600" cy="411480"/>
+          </a:xfrm>
+          <a:prstGeom prst="rect">
+            <a:avLst/>
+          </a:prstGeom>
+          <a:noFill/>
+          <a:ln/>
+        </p:spPr>
+        <p:txBody>
+          <a:bodyPr wrap="square" lIns="0" tIns="0" rIns="0" bIns="0" rtlCol="0" anchor="ctr"/>
+          <a:lstStyle/>
+          <a:p>
+            <a:pPr indent="0" marL="0">
+              <a:buNone/>
+            </a:pPr>
+            <a:r>
+              <a:rPr lang="en-US" sz="1050" dirty="0">
+                <a:solidFill>
+                  <a:srgbClr val="3D4E60"/>
+                </a:solidFill>
+                <a:latin typeface="Meiryo" pitchFamily="34" charset="0"/>
+                <a:ea typeface="Meiryo" pitchFamily="34" charset="-122"/>
+                <a:cs typeface="Meiryo" pitchFamily="34" charset="-120"/>
+              </a:rPr>
+              <a:t>対価は現金ではなく、この株式です。年初来で3割下落しており、買い増しの原資を借りる際の担保価値にも直結します。</a:t>
+            </a:r>
+            <a:endParaRPr lang="en-US" sz="1050" dirty="0"/>
+          </a:p>
+        </p:txBody>
+      </p:sp>
+      <p:sp>
+        <p:nvSpPr>
+          <p:cNvPr id="22" name="Shape 20"/>
+          <p:cNvSpPr/>
+          <p:nvPr/>
+        </p:nvSpPr>
+        <p:spPr>
+          <a:xfrm>
+            <a:off x="640080" y="4187952"/>
+            <a:ext cx="10881360" cy="1783080"/>
+          </a:xfrm>
+          <a:prstGeom prst="roundRect">
+            <a:avLst>
+              <a:gd name="adj" fmla="val 3077"/>
+            </a:avLst>
+          </a:prstGeom>
+          <a:solidFill>
+            <a:srgbClr val="F7F3EC"/>
+          </a:solidFill>
+          <a:ln w="12700">
+            <a:solidFill>
+              <a:srgbClr val="E0D3BE"/>
+            </a:solidFill>
+            <a:prstDash val="solid"/>
+          </a:ln>
+          <a:effectLst>
+            <a:outerShdw sx="100000" sy="100000" kx="0" ky="0" algn="bl" rotWithShape="0" blurRad="101600" dist="12700" dir="5400000">
+              <a:srgbClr val="AAB4BE">
+                <a:alpha val="18000"/>
+              </a:srgbClr>
+            </a:outerShdw>
+          </a:effectLst>
+        </p:spPr>
+      </p:sp>
+      <p:sp>
+        <p:nvSpPr>
+          <p:cNvPr id="23" name="Text 21"/>
+          <p:cNvSpPr txBox="1"/>
+          <p:nvPr/>
+        </p:nvSpPr>
+        <p:spPr>
+          <a:xfrm>
+            <a:off x="914400" y="4352544"/>
+            <a:ext cx="5486400" cy="292608"/>
+          </a:xfrm>
+          <a:prstGeom prst="rect">
+            <a:avLst/>
+          </a:prstGeom>
+          <a:noFill/>
+          <a:ln/>
+        </p:spPr>
+        <p:txBody>
+          <a:bodyPr wrap="square" lIns="0" tIns="0" rIns="0" bIns="0" rtlCol="0" anchor="ctr"/>
+          <a:lstStyle/>
+          <a:p>
+            <a:pPr indent="0" marL="0">
+              <a:buNone/>
+            </a:pPr>
+            <a:r>
+              <a:rPr lang="en-US" sz="1350" b="1" dirty="0">
+                <a:solidFill>
+                  <a:srgbClr val="8F5510"/>
+                </a:solidFill>
+                <a:latin typeface="Meiryo" pitchFamily="34" charset="0"/>
+                <a:ea typeface="Meiryo" pitchFamily="34" charset="-122"/>
+                <a:cs typeface="Meiryo" pitchFamily="34" charset="-120"/>
+              </a:rPr>
+              <a:t>交渉上、押さえておきたい点</a:t>
+            </a:r>
+            <a:endParaRPr lang="en-US" sz="1350" dirty="0"/>
+          </a:p>
+        </p:txBody>
+      </p:sp>
+      <p:sp>
+        <p:nvSpPr>
+          <p:cNvPr id="24" name="Shape 22"/>
+          <p:cNvSpPr/>
+          <p:nvPr/>
+        </p:nvSpPr>
+        <p:spPr>
+          <a:xfrm>
+            <a:off x="914400" y="4773168"/>
+            <a:ext cx="146304" cy="146304"/>
+          </a:xfrm>
+          <a:prstGeom prst="roundRect">
+            <a:avLst>
+              <a:gd name="adj" fmla="val 50000"/>
+            </a:avLst>
+          </a:prstGeom>
+          <a:solidFill>
+            <a:srgbClr val="8F5510"/>
+          </a:solidFill>
+          <a:ln/>
+        </p:spPr>
+      </p:sp>
+      <p:sp>
+        <p:nvSpPr>
+          <p:cNvPr id="25" name="Text 23"/>
+          <p:cNvSpPr txBox="1"/>
+          <p:nvPr/>
+        </p:nvSpPr>
+        <p:spPr>
+          <a:xfrm>
+            <a:off x="1188720" y="4690872"/>
+            <a:ext cx="3108960" cy="274320"/>
+          </a:xfrm>
+          <a:prstGeom prst="rect">
+            <a:avLst/>
+          </a:prstGeom>
+          <a:noFill/>
+          <a:ln/>
+        </p:spPr>
+        <p:txBody>
+          <a:bodyPr wrap="square" lIns="0" tIns="0" rIns="0" bIns="0" rtlCol="0" anchor="ctr"/>
+          <a:lstStyle/>
+          <a:p>
+            <a:pPr indent="0" marL="0">
+              <a:buNone/>
+            </a:pPr>
+            <a:r>
+              <a:rPr lang="en-US" sz="1150" b="1" dirty="0">
+                <a:solidFill>
+                  <a:srgbClr val="1E2A38"/>
+                </a:solidFill>
+                <a:latin typeface="Meiryo" pitchFamily="34" charset="0"/>
+                <a:ea typeface="Meiryo" pitchFamily="34" charset="-122"/>
+                <a:cs typeface="Meiryo" pitchFamily="34" charset="-120"/>
+              </a:rPr>
+              <a:t>基準株価は3ヶ月平均を</a:t>
+            </a:r>
+            <a:endParaRPr lang="en-US" sz="1150" dirty="0"/>
+          </a:p>
+        </p:txBody>
+      </p:sp>
+      <p:sp>
+        <p:nvSpPr>
+          <p:cNvPr id="26" name="Text 24"/>
+          <p:cNvSpPr txBox="1"/>
+          <p:nvPr/>
+        </p:nvSpPr>
+        <p:spPr>
+          <a:xfrm>
+            <a:off x="1188720" y="5001768"/>
+            <a:ext cx="3108960" cy="914400"/>
+          </a:xfrm>
+          <a:prstGeom prst="rect">
+            <a:avLst/>
+          </a:prstGeom>
+          <a:noFill/>
+          <a:ln/>
+        </p:spPr>
+        <p:txBody>
+          <a:bodyPr wrap="square" lIns="0" tIns="0" rIns="0" bIns="0" rtlCol="0" anchor="ctr"/>
+          <a:lstStyle/>
+          <a:p>
+            <a:pPr indent="0" marL="0">
+              <a:lnSpc>
+                <a:spcPct val="115000"/>
+              </a:lnSpc>
+              <a:buNone/>
+            </a:pPr>
+            <a:r>
+              <a:rPr lang="en-US" sz="950" dirty="0">
+                <a:solidFill>
+                  <a:srgbClr val="3D4E60"/>
+                </a:solidFill>
+                <a:latin typeface="Meiryo" pitchFamily="34" charset="0"/>
+                <a:ea typeface="Meiryo" pitchFamily="34" charset="-122"/>
+                <a:cs typeface="Meiryo" pitchFamily="34" charset="-120"/>
+              </a:rPr>
+              <a:t>3ヶ月平均229円は6ヶ月平均240円より低く、同じ評価額でも交付される株数が増えます。当社に有利な側です。</a:t>
+            </a:r>
+            <a:endParaRPr lang="en-US" sz="950" dirty="0"/>
+          </a:p>
+        </p:txBody>
+      </p:sp>
+      <p:sp>
+        <p:nvSpPr>
+          <p:cNvPr id="27" name="Shape 25"/>
+          <p:cNvSpPr/>
+          <p:nvPr/>
+        </p:nvSpPr>
+        <p:spPr>
+          <a:xfrm>
+            <a:off x="4498848" y="4773168"/>
+            <a:ext cx="146304" cy="146304"/>
+          </a:xfrm>
+          <a:prstGeom prst="roundRect">
+            <a:avLst>
+              <a:gd name="adj" fmla="val 50000"/>
+            </a:avLst>
+          </a:prstGeom>
+          <a:solidFill>
+            <a:srgbClr val="8F5510"/>
+          </a:solidFill>
+          <a:ln/>
+        </p:spPr>
+      </p:sp>
+      <p:sp>
+        <p:nvSpPr>
+          <p:cNvPr id="28" name="Text 26"/>
+          <p:cNvSpPr txBox="1"/>
+          <p:nvPr/>
+        </p:nvSpPr>
+        <p:spPr>
+          <a:xfrm>
+            <a:off x="4773168" y="4690872"/>
+            <a:ext cx="3108960" cy="274320"/>
+          </a:xfrm>
+          <a:prstGeom prst="rect">
+            <a:avLst/>
+          </a:prstGeom>
+          <a:noFill/>
+          <a:ln/>
+        </p:spPr>
+        <p:txBody>
+          <a:bodyPr wrap="square" lIns="0" tIns="0" rIns="0" bIns="0" rtlCol="0" anchor="ctr"/>
+          <a:lstStyle/>
+          <a:p>
+            <a:pPr indent="0" marL="0">
+              <a:buNone/>
+            </a:pPr>
+            <a:r>
+              <a:rPr lang="en-US" sz="1150" b="1" dirty="0">
+                <a:solidFill>
+                  <a:srgbClr val="1E2A38"/>
+                </a:solidFill>
+                <a:latin typeface="Meiryo" pitchFamily="34" charset="0"/>
+                <a:ea typeface="Meiryo" pitchFamily="34" charset="-122"/>
+                <a:cs typeface="Meiryo" pitchFamily="34" charset="-120"/>
+              </a:rPr>
+              <a:t>評価額は20億円を下限に</a:t>
+            </a:r>
+            <a:endParaRPr lang="en-US" sz="1150" dirty="0"/>
+          </a:p>
+        </p:txBody>
+      </p:sp>
+      <p:sp>
+        <p:nvSpPr>
+          <p:cNvPr id="29" name="Text 27"/>
+          <p:cNvSpPr txBox="1"/>
+          <p:nvPr/>
+        </p:nvSpPr>
+        <p:spPr>
+          <a:xfrm>
+            <a:off x="4773168" y="5001768"/>
+            <a:ext cx="3108960" cy="914400"/>
+          </a:xfrm>
+          <a:prstGeom prst="rect">
+            <a:avLst/>
+          </a:prstGeom>
+          <a:noFill/>
+          <a:ln/>
+        </p:spPr>
+        <p:txBody>
+          <a:bodyPr wrap="square" lIns="0" tIns="0" rIns="0" bIns="0" rtlCol="0" anchor="ctr"/>
+          <a:lstStyle/>
+          <a:p>
+            <a:pPr indent="0" marL="0">
+              <a:lnSpc>
+                <a:spcPct val="115000"/>
+              </a:lnSpc>
+              <a:buNone/>
+            </a:pPr>
+            <a:r>
+              <a:rPr lang="en-US" sz="950" dirty="0">
+                <a:solidFill>
+                  <a:srgbClr val="3D4E60"/>
+                </a:solidFill>
+                <a:latin typeface="Meiryo" pitchFamily="34" charset="0"/>
+                <a:ea typeface="Meiryo" pitchFamily="34" charset="-122"/>
+                <a:cs typeface="Meiryo" pitchFamily="34" charset="-120"/>
+              </a:rPr>
+              <a:t>MBOで既存株主に20億円評価で退出いただく前提と整合しません。18億円では社内説明が立ちません。</a:t>
+            </a:r>
+            <a:endParaRPr lang="en-US" sz="950" dirty="0"/>
+          </a:p>
+        </p:txBody>
+      </p:sp>
+      <p:sp>
+        <p:nvSpPr>
+          <p:cNvPr id="30" name="Shape 28"/>
+          <p:cNvSpPr/>
+          <p:nvPr/>
+        </p:nvSpPr>
+        <p:spPr>
+          <a:xfrm>
+            <a:off x="8083296" y="4773168"/>
+            <a:ext cx="146304" cy="146304"/>
+          </a:xfrm>
+          <a:prstGeom prst="roundRect">
+            <a:avLst>
+              <a:gd name="adj" fmla="val 50000"/>
+            </a:avLst>
+          </a:prstGeom>
+          <a:solidFill>
+            <a:srgbClr val="8F5510"/>
+          </a:solidFill>
+          <a:ln/>
+        </p:spPr>
+      </p:sp>
+      <p:sp>
+        <p:nvSpPr>
+          <p:cNvPr id="31" name="Text 29"/>
+          <p:cNvSpPr txBox="1"/>
+          <p:nvPr/>
+        </p:nvSpPr>
+        <p:spPr>
+          <a:xfrm>
+            <a:off x="8357616" y="4690872"/>
+            <a:ext cx="3108960" cy="274320"/>
+          </a:xfrm>
+          <a:prstGeom prst="rect">
+            <a:avLst/>
+          </a:prstGeom>
+          <a:noFill/>
+          <a:ln/>
+        </p:spPr>
+        <p:txBody>
+          <a:bodyPr wrap="square" lIns="0" tIns="0" rIns="0" bIns="0" rtlCol="0" anchor="ctr"/>
+          <a:lstStyle/>
+          <a:p>
+            <a:pPr indent="0" marL="0">
+              <a:buNone/>
+            </a:pPr>
+            <a:r>
+              <a:rPr lang="en-US" sz="1150" b="1" dirty="0">
+                <a:solidFill>
+                  <a:srgbClr val="1E2A38"/>
+                </a:solidFill>
+                <a:latin typeface="Meiryo" pitchFamily="34" charset="0"/>
+                <a:ea typeface="Meiryo" pitchFamily="34" charset="-122"/>
+                <a:cs typeface="Meiryo" pitchFamily="34" charset="-120"/>
+              </a:rPr>
+              <a:t>重松氏の譲渡は書面で</a:t>
+            </a:r>
+            <a:endParaRPr lang="en-US" sz="1150" dirty="0"/>
+          </a:p>
+        </p:txBody>
+      </p:sp>
+      <p:sp>
+        <p:nvSpPr>
+          <p:cNvPr id="32" name="Text 30"/>
+          <p:cNvSpPr txBox="1"/>
+          <p:nvPr/>
+        </p:nvSpPr>
+        <p:spPr>
+          <a:xfrm>
+            <a:off x="8357616" y="5001768"/>
+            <a:ext cx="3108960" cy="914400"/>
+          </a:xfrm>
+          <a:prstGeom prst="rect">
+            <a:avLst/>
+          </a:prstGeom>
+          <a:noFill/>
+          <a:ln/>
+        </p:spPr>
+        <p:txBody>
+          <a:bodyPr wrap="square" lIns="0" tIns="0" rIns="0" bIns="0" rtlCol="0" anchor="ctr"/>
+          <a:lstStyle/>
+          <a:p>
+            <a:pPr indent="0" marL="0">
+              <a:lnSpc>
+                <a:spcPct val="115000"/>
+              </a:lnSpc>
+              <a:buNone/>
+            </a:pPr>
+            <a:r>
+              <a:rPr lang="en-US" sz="950" dirty="0">
+                <a:solidFill>
+                  <a:srgbClr val="3D4E60"/>
+                </a:solidFill>
+                <a:latin typeface="Meiryo" pitchFamily="34" charset="0"/>
+                <a:ea typeface="Meiryo" pitchFamily="34" charset="-122"/>
+                <a:cs typeface="Meiryo" pitchFamily="34" charset="-120"/>
+              </a:rPr>
+              <a:t>会長就任と持分譲渡の意向は、時期・価格・数量を含めて覚書にしておく必要があります。口頭の前提のままでは資金計画が組めません。</a:t>
+            </a:r>
+            <a:endParaRPr lang="en-US" sz="950" dirty="0"/>
+          </a:p>
+        </p:txBody>
+      </p:sp>
+      <p:sp>
+        <p:nvSpPr>
+          <p:cNvPr id="33" name="Text 31"/>
+          <p:cNvSpPr txBox="1"/>
+          <p:nvPr/>
+        </p:nvSpPr>
+        <p:spPr>
+          <a:xfrm>
+            <a:off x="640080" y="6108192"/>
+            <a:ext cx="10881360" cy="274320"/>
+          </a:xfrm>
+          <a:prstGeom prst="rect">
+            <a:avLst/>
+          </a:prstGeom>
+          <a:noFill/>
+          <a:ln/>
+        </p:spPr>
+        <p:txBody>
+          <a:bodyPr wrap="square" lIns="0" tIns="0" rIns="0" bIns="0" rtlCol="0" anchor="ctr"/>
+          <a:lstStyle/>
+          <a:p>
+            <a:pPr indent="0" marL="0">
+              <a:buNone/>
+            </a:pPr>
+            <a:r>
+              <a:rPr lang="en-US" sz="900" dirty="0">
+                <a:solidFill>
+                  <a:srgbClr val="7C8A99"/>
+                </a:solidFill>
+                <a:latin typeface="Meiryo" pitchFamily="34" charset="0"/>
+                <a:ea typeface="Meiryo" pitchFamily="34" charset="-122"/>
+                <a:cs typeface="Meiryo" pitchFamily="34" charset="-120"/>
+              </a:rPr>
+              <a:t>3ヶ月・6ヶ月平均株価は公開情報からの推定値です（3ヶ月レンジ225〜235円、6ヶ月レンジ235〜250円）。確定値は証券会社経由でご確認ください。</a:t>
+            </a:r>
+            <a:endParaRPr lang="en-US" sz="900" dirty="0"/>
+          </a:p>
+        </p:txBody>
+      </p:sp>
+    </p:spTree>
+  </p:cSld>
+  <p:clrMapOvr>
+    <a:masterClrMapping/>
+  </p:clrMapOvr>
+</p:sld>
+</file>
+
+<file path=ppt/slides/slide11.xml><?xml version="1.0" encoding="utf-8"?>
+<p:sld xmlns:a="http://schemas.openxmlformats.org/drawingml/2006/main" xmlns:r="http://schemas.openxmlformats.org/officeDocument/2006/relationships" xmlns:p="http://schemas.openxmlformats.org/presentationml/2006/main">
+  <p:cSld name="Slide 11">
+    <p:bg>
+      <p:bgPr>
+        <a:solidFill>
+          <a:srgbClr val="F5F7F9"/>
+        </a:solidFill>
+      </p:bgPr>
+    </p:bg>
+    <p:spTree>
+      <p:nvGrpSpPr>
+        <p:cNvPr id="1" name=""/>
+        <p:cNvGrpSpPr/>
+        <p:nvPr/>
+      </p:nvGrpSpPr>
+      <p:grpSpPr>
+        <a:xfrm>
+          <a:off x="0" y="0"/>
+          <a:ext cx="0" cy="0"/>
+          <a:chOff x="0" y="0"/>
+          <a:chExt cx="0" cy="0"/>
+        </a:xfrm>
+      </p:grpSpPr>
+      <p:sp>
+        <p:nvSpPr>
+          <p:cNvPr id="2" name="Text 0"/>
+          <p:cNvSpPr txBox="1"/>
+          <p:nvPr/>
+        </p:nvSpPr>
+        <p:spPr>
+          <a:xfrm>
+            <a:off x="640080" y="384048"/>
+            <a:ext cx="10881360" cy="256032"/>
+          </a:xfrm>
+          <a:prstGeom prst="rect">
+            <a:avLst/>
+          </a:prstGeom>
+          <a:noFill/>
+          <a:ln/>
+        </p:spPr>
+        <p:txBody>
+          <a:bodyPr wrap="square" lIns="0" tIns="0" rIns="0" bIns="0" rtlCol="0" anchor="ctr"/>
+          <a:lstStyle/>
+          <a:p>
+            <a:pPr indent="0" marL="0">
+              <a:buNone/>
+            </a:pPr>
+            <a:r>
+              <a:rPr lang="en-US" sz="1100" b="1" spc="200" kern="0" dirty="0">
+                <a:solidFill>
+                  <a:srgbClr val="6E2639"/>
+                </a:solidFill>
+                <a:latin typeface="Meiryo" pitchFamily="34" charset="0"/>
+                <a:ea typeface="Meiryo" pitchFamily="34" charset="-122"/>
+                <a:cs typeface="Meiryo" pitchFamily="34" charset="-120"/>
+              </a:rPr>
+              <a:t>提案</a:t>
+            </a:r>
+            <a:endParaRPr lang="en-US" sz="1100" dirty="0"/>
+          </a:p>
+        </p:txBody>
+      </p:sp>
+      <p:sp>
+        <p:nvSpPr>
+          <p:cNvPr id="3" name="Text 1"/>
+          <p:cNvSpPr txBox="1"/>
+          <p:nvPr/>
+        </p:nvSpPr>
+        <p:spPr>
+          <a:xfrm>
+            <a:off x="640080" y="676656"/>
+            <a:ext cx="10881360" cy="658368"/>
+          </a:xfrm>
+          <a:prstGeom prst="rect">
+            <a:avLst/>
+          </a:prstGeom>
+          <a:noFill/>
+          <a:ln/>
+        </p:spPr>
+        <p:txBody>
+          <a:bodyPr wrap="square" lIns="0" tIns="0" rIns="0" bIns="0" rtlCol="0" anchor="ctr"/>
+          <a:lstStyle/>
+          <a:p>
+            <a:pPr indent="0" marL="0">
+              <a:buNone/>
+            </a:pPr>
+            <a:r>
+              <a:rPr lang="en-US" sz="2800" b="1" dirty="0">
+                <a:solidFill>
+                  <a:srgbClr val="1E2A38"/>
+                </a:solidFill>
+                <a:latin typeface="Meiryo" pitchFamily="34" charset="0"/>
+                <a:ea typeface="Meiryo" pitchFamily="34" charset="-122"/>
+                <a:cs typeface="Meiryo" pitchFamily="34" charset="-120"/>
+              </a:rPr>
               <a:t>MBO完了後に合併すれば、条件は変わります</a:t>
             </a:r>
             <a:endParaRPr lang="en-US" sz="2800" dirty="0"/>
@@ -2617,7 +3929,7 @@
       </p:sp>
       <p:graphicFrame>
         <p:nvGraphicFramePr>
-          <p:cNvPr id="11" name="Table 0"/>
+          <p:cNvPr id="12" name="Table 0"/>
           <p:cNvGraphicFramePr>
             <a:graphicFrameLocks noGrp="1"/>
           </p:cNvGraphicFramePr>
@@ -4718,9 +6030,9 @@
 </p:sld>
 </file>
 
-<file path=ppt/slides/slide11.xml><?xml version="1.0" encoding="utf-8"?>
+<file path=ppt/slides/slide12.xml><?xml version="1.0" encoding="utf-8"?>
 <p:sld xmlns:a="http://schemas.openxmlformats.org/drawingml/2006/main" xmlns:r="http://schemas.openxmlformats.org/officeDocument/2006/relationships" xmlns:p="http://schemas.openxmlformats.org/presentationml/2006/main">
-  <p:cSld name="Slide 11">
+  <p:cSld name="Slide 12">
     <p:bg>
       <p:bgPr>
         <a:solidFill>
@@ -5342,7 +6654,7 @@
                 <a:ea typeface="Meiryo" pitchFamily="34" charset="-122"/>
                 <a:cs typeface="Meiryo" pitchFamily="34" charset="-120"/>
               </a:rPr>
-              <a:t>評価額18億円の根拠、基準株価を3ヶ月平均とすること、のれん償却の負担配分。あわせてスペースマーケット社の直近の純資産・有利子負債の開示を求めます。</a:t>
+              <a:t>評価額18億円の根拠、基準株価を3ヶ月平均とすること、のれん償却の負担配分。あわせて同社の有利子負債の内訳と直近四半期の貸借対照表の開示を求めます。</a:t>
             </a:r>
             <a:endParaRPr lang="en-US" sz="1050" dirty="0"/>
           </a:p>
@@ -6615,7 +7927,7 @@
                 <a:ea typeface="Meiryo" pitchFamily="34" charset="-122"/>
                 <a:cs typeface="Meiryo" pitchFamily="34" charset="-120"/>
               </a:rPr>
-              <a:t>年1.10〜2.21億。合算営業利益の大半が消える構造は前提が変わっても同じです。</a:t>
+              <a:t>年1.10〜2.21億。合算営業利益4.90億に対し23〜45%を占め、前提が変わっても残ります。</a:t>
             </a:r>
             <a:endParaRPr lang="en-US" sz="950" dirty="0"/>
           </a:p>
@@ -11078,7 +12390,7 @@
                 <a:ea typeface="Meiryo" pitchFamily="34" charset="-122"/>
                 <a:cs typeface="Meiryo" pitchFamily="34" charset="-120"/>
               </a:rPr>
-              <a:t>合併後の合算自己資本比率の試算には、スペースマーケット社の直近の純資産・有利子負債が必要です。同社の決算短信を入手のうえ確定させます。</a:t>
+              <a:t>合算後の自己資本比率は表面38.6%、のれん控除後11.8%と試算されます（次ページ）。MBO完了後に合併した場合はそれぞれ48.6%・26.3%です。</a:t>
             </a:r>
             <a:endParaRPr lang="en-US" sz="950" dirty="0"/>
           </a:p>
@@ -11095,6 +12407,2956 @@
 <file path=ppt/slides/slide6.xml><?xml version="1.0" encoding="utf-8"?>
 <p:sld xmlns:a="http://schemas.openxmlformats.org/drawingml/2006/main" xmlns:r="http://schemas.openxmlformats.org/officeDocument/2006/relationships" xmlns:p="http://schemas.openxmlformats.org/presentationml/2006/main">
   <p:cSld name="Slide 6">
+    <p:bg>
+      <p:bgPr>
+        <a:solidFill>
+          <a:srgbClr val="F5F7F9"/>
+        </a:solidFill>
+      </p:bgPr>
+    </p:bg>
+    <p:spTree>
+      <p:nvGrpSpPr>
+        <p:cNvPr id="1" name=""/>
+        <p:cNvGrpSpPr/>
+        <p:nvPr/>
+      </p:nvGrpSpPr>
+      <p:grpSpPr>
+        <a:xfrm>
+          <a:off x="0" y="0"/>
+          <a:ext cx="0" cy="0"/>
+          <a:chOff x="0" y="0"/>
+          <a:chExt cx="0" cy="0"/>
+        </a:xfrm>
+      </p:grpSpPr>
+      <p:sp>
+        <p:nvSpPr>
+          <p:cNvPr id="2" name="Text 0"/>
+          <p:cNvSpPr txBox="1"/>
+          <p:nvPr/>
+        </p:nvSpPr>
+        <p:spPr>
+          <a:xfrm>
+            <a:off x="640080" y="384048"/>
+            <a:ext cx="10881360" cy="256032"/>
+          </a:xfrm>
+          <a:prstGeom prst="rect">
+            <a:avLst/>
+          </a:prstGeom>
+          <a:noFill/>
+          <a:ln/>
+        </p:spPr>
+        <p:txBody>
+          <a:bodyPr wrap="square" lIns="0" tIns="0" rIns="0" bIns="0" rtlCol="0" anchor="ctr"/>
+          <a:lstStyle/>
+          <a:p>
+            <a:pPr indent="0" marL="0">
+              <a:buNone/>
+            </a:pPr>
+            <a:r>
+              <a:rPr lang="en-US" sz="1100" b="1" spc="200" kern="0" dirty="0">
+                <a:solidFill>
+                  <a:srgbClr val="6E2639"/>
+                </a:solidFill>
+                <a:latin typeface="Meiryo" pitchFamily="34" charset="0"/>
+                <a:ea typeface="Meiryo" pitchFamily="34" charset="-122"/>
+                <a:cs typeface="Meiryo" pitchFamily="34" charset="-120"/>
+              </a:rPr>
+              <a:t>比較 ③</a:t>
+            </a:r>
+            <a:endParaRPr lang="en-US" sz="1100" dirty="0"/>
+          </a:p>
+        </p:txBody>
+      </p:sp>
+      <p:sp>
+        <p:nvSpPr>
+          <p:cNvPr id="3" name="Text 1"/>
+          <p:cNvSpPr txBox="1"/>
+          <p:nvPr/>
+        </p:nvSpPr>
+        <p:spPr>
+          <a:xfrm>
+            <a:off x="640080" y="676656"/>
+            <a:ext cx="10881360" cy="658368"/>
+          </a:xfrm>
+          <a:prstGeom prst="rect">
+            <a:avLst/>
+          </a:prstGeom>
+          <a:noFill/>
+          <a:ln/>
+        </p:spPr>
+        <p:txBody>
+          <a:bodyPr wrap="square" lIns="0" tIns="0" rIns="0" bIns="0" rtlCol="0" anchor="ctr"/>
+          <a:lstStyle/>
+          <a:p>
+            <a:pPr indent="0" marL="0">
+              <a:buNone/>
+            </a:pPr>
+            <a:r>
+              <a:rPr lang="en-US" sz="2800" b="1" dirty="0">
+                <a:solidFill>
+                  <a:srgbClr val="1E2A38"/>
+                </a:solidFill>
+                <a:latin typeface="Meiryo" pitchFamily="34" charset="0"/>
+                <a:ea typeface="Meiryo" pitchFamily="34" charset="-122"/>
+                <a:cs typeface="Meiryo" pitchFamily="34" charset="-120"/>
+              </a:rPr>
+              <a:t>合算すると、バランスシートはこうなります</a:t>
+            </a:r>
+            <a:endParaRPr lang="en-US" sz="2800" dirty="0"/>
+          </a:p>
+        </p:txBody>
+      </p:sp>
+      <p:sp>
+        <p:nvSpPr>
+          <p:cNvPr id="4" name="Shape 2"/>
+          <p:cNvSpPr/>
+          <p:nvPr/>
+        </p:nvSpPr>
+        <p:spPr>
+          <a:xfrm>
+            <a:off x="640080" y="1536192"/>
+            <a:ext cx="3703320" cy="4206240"/>
+          </a:xfrm>
+          <a:prstGeom prst="roundRect">
+            <a:avLst>
+              <a:gd name="adj" fmla="val 1481"/>
+            </a:avLst>
+          </a:prstGeom>
+          <a:solidFill>
+            <a:srgbClr val="EEF3F8"/>
+          </a:solidFill>
+          <a:ln w="12700">
+            <a:solidFill>
+              <a:srgbClr val="C6D6E5"/>
+            </a:solidFill>
+            <a:prstDash val="solid"/>
+          </a:ln>
+          <a:effectLst>
+            <a:outerShdw sx="100000" sy="100000" kx="0" ky="0" algn="bl" rotWithShape="0" blurRad="101600" dist="12700" dir="5400000">
+              <a:srgbClr val="AAB4BE">
+                <a:alpha val="18000"/>
+              </a:srgbClr>
+            </a:outerShdw>
+          </a:effectLst>
+        </p:spPr>
+      </p:sp>
+      <p:sp>
+        <p:nvSpPr>
+          <p:cNvPr id="5" name="Text 3"/>
+          <p:cNvSpPr txBox="1"/>
+          <p:nvPr/>
+        </p:nvSpPr>
+        <p:spPr>
+          <a:xfrm>
+            <a:off x="914400" y="1719072"/>
+            <a:ext cx="3200400" cy="274320"/>
+          </a:xfrm>
+          <a:prstGeom prst="rect">
+            <a:avLst/>
+          </a:prstGeom>
+          <a:noFill/>
+          <a:ln/>
+        </p:spPr>
+        <p:txBody>
+          <a:bodyPr wrap="square" lIns="0" tIns="0" rIns="0" bIns="0" rtlCol="0" anchor="ctr"/>
+          <a:lstStyle/>
+          <a:p>
+            <a:pPr indent="0" marL="0">
+              <a:buNone/>
+            </a:pPr>
+            <a:r>
+              <a:rPr lang="en-US" sz="1350" b="1" dirty="0">
+                <a:solidFill>
+                  <a:srgbClr val="2E5C8A"/>
+                </a:solidFill>
+                <a:latin typeface="Meiryo" pitchFamily="34" charset="0"/>
+                <a:ea typeface="Meiryo" pitchFamily="34" charset="-122"/>
+                <a:cs typeface="Meiryo" pitchFamily="34" charset="-120"/>
+              </a:rPr>
+              <a:t>スペースマーケット社の財務</a:t>
+            </a:r>
+            <a:endParaRPr lang="en-US" sz="1350" dirty="0"/>
+          </a:p>
+        </p:txBody>
+      </p:sp>
+      <p:sp>
+        <p:nvSpPr>
+          <p:cNvPr id="6" name="Text 4"/>
+          <p:cNvSpPr txBox="1"/>
+          <p:nvPr/>
+        </p:nvSpPr>
+        <p:spPr>
+          <a:xfrm>
+            <a:off x="914400" y="2011680"/>
+            <a:ext cx="3200400" cy="237744"/>
+          </a:xfrm>
+          <a:prstGeom prst="rect">
+            <a:avLst/>
+          </a:prstGeom>
+          <a:noFill/>
+          <a:ln/>
+        </p:spPr>
+        <p:txBody>
+          <a:bodyPr wrap="square" lIns="0" tIns="0" rIns="0" bIns="0" rtlCol="0" anchor="ctr"/>
+          <a:lstStyle/>
+          <a:p>
+            <a:pPr indent="0" marL="0">
+              <a:buNone/>
+            </a:pPr>
+            <a:r>
+              <a:rPr lang="en-US" sz="950" dirty="0">
+                <a:solidFill>
+                  <a:srgbClr val="7C8A99"/>
+                </a:solidFill>
+                <a:latin typeface="Meiryo" pitchFamily="34" charset="0"/>
+                <a:ea typeface="Meiryo" pitchFamily="34" charset="-122"/>
+                <a:cs typeface="Meiryo" pitchFamily="34" charset="-120"/>
+              </a:rPr>
+              <a:t>2025年12月期（2025年12月31日現在）</a:t>
+            </a:r>
+            <a:endParaRPr lang="en-US" sz="950" dirty="0"/>
+          </a:p>
+        </p:txBody>
+      </p:sp>
+      <p:sp>
+        <p:nvSpPr>
+          <p:cNvPr id="7" name="Text 5"/>
+          <p:cNvSpPr txBox="1"/>
+          <p:nvPr/>
+        </p:nvSpPr>
+        <p:spPr>
+          <a:xfrm>
+            <a:off x="914400" y="2386584"/>
+            <a:ext cx="2011680" cy="274320"/>
+          </a:xfrm>
+          <a:prstGeom prst="rect">
+            <a:avLst/>
+          </a:prstGeom>
+          <a:noFill/>
+          <a:ln/>
+        </p:spPr>
+        <p:txBody>
+          <a:bodyPr wrap="square" lIns="0" tIns="0" rIns="0" bIns="0" rtlCol="0" anchor="ctr"/>
+          <a:lstStyle/>
+          <a:p>
+            <a:pPr indent="0" marL="0">
+              <a:buNone/>
+            </a:pPr>
+            <a:r>
+              <a:rPr lang="en-US" sz="1050" dirty="0">
+                <a:solidFill>
+                  <a:srgbClr val="3D4E60"/>
+                </a:solidFill>
+                <a:latin typeface="Meiryo" pitchFamily="34" charset="0"/>
+                <a:ea typeface="Meiryo" pitchFamily="34" charset="-122"/>
+                <a:cs typeface="Meiryo" pitchFamily="34" charset="-120"/>
+              </a:rPr>
+              <a:t>総資産</a:t>
+            </a:r>
+            <a:endParaRPr lang="en-US" sz="1050" dirty="0"/>
+          </a:p>
+        </p:txBody>
+      </p:sp>
+      <p:sp>
+        <p:nvSpPr>
+          <p:cNvPr id="8" name="Text 6"/>
+          <p:cNvSpPr txBox="1"/>
+          <p:nvPr/>
+        </p:nvSpPr>
+        <p:spPr>
+          <a:xfrm>
+            <a:off x="2743200" y="2359152"/>
+            <a:ext cx="1325880" cy="310896"/>
+          </a:xfrm>
+          <a:prstGeom prst="rect">
+            <a:avLst/>
+          </a:prstGeom>
+          <a:noFill/>
+          <a:ln/>
+        </p:spPr>
+        <p:txBody>
+          <a:bodyPr wrap="square" lIns="0" tIns="0" rIns="0" bIns="0" rtlCol="0" anchor="ctr"/>
+          <a:lstStyle/>
+          <a:p>
+            <a:pPr algn="r" indent="0" marL="0">
+              <a:buNone/>
+            </a:pPr>
+            <a:r>
+              <a:rPr lang="en-US" sz="1400" b="1" dirty="0">
+                <a:solidFill>
+                  <a:srgbClr val="1E2A38"/>
+                </a:solidFill>
+                <a:latin typeface="Meiryo" pitchFamily="34" charset="0"/>
+                <a:ea typeface="Meiryo" pitchFamily="34" charset="-122"/>
+                <a:cs typeface="Meiryo" pitchFamily="34" charset="-120"/>
+              </a:rPr>
+              <a:t>37.39億</a:t>
+            </a:r>
+            <a:endParaRPr lang="en-US" sz="1400" dirty="0"/>
+          </a:p>
+        </p:txBody>
+      </p:sp>
+      <p:sp>
+        <p:nvSpPr>
+          <p:cNvPr id="9" name="Text 7"/>
+          <p:cNvSpPr txBox="1"/>
+          <p:nvPr/>
+        </p:nvSpPr>
+        <p:spPr>
+          <a:xfrm>
+            <a:off x="914400" y="2788920"/>
+            <a:ext cx="2011680" cy="274320"/>
+          </a:xfrm>
+          <a:prstGeom prst="rect">
+            <a:avLst/>
+          </a:prstGeom>
+          <a:noFill/>
+          <a:ln/>
+        </p:spPr>
+        <p:txBody>
+          <a:bodyPr wrap="square" lIns="0" tIns="0" rIns="0" bIns="0" rtlCol="0" anchor="ctr"/>
+          <a:lstStyle/>
+          <a:p>
+            <a:pPr indent="0" marL="0">
+              <a:buNone/>
+            </a:pPr>
+            <a:r>
+              <a:rPr lang="en-US" sz="1050" dirty="0">
+                <a:solidFill>
+                  <a:srgbClr val="3D4E60"/>
+                </a:solidFill>
+                <a:latin typeface="Meiryo" pitchFamily="34" charset="0"/>
+                <a:ea typeface="Meiryo" pitchFamily="34" charset="-122"/>
+                <a:cs typeface="Meiryo" pitchFamily="34" charset="-120"/>
+              </a:rPr>
+              <a:t>純資産</a:t>
+            </a:r>
+            <a:endParaRPr lang="en-US" sz="1050" dirty="0"/>
+          </a:p>
+        </p:txBody>
+      </p:sp>
+      <p:sp>
+        <p:nvSpPr>
+          <p:cNvPr id="10" name="Text 8"/>
+          <p:cNvSpPr txBox="1"/>
+          <p:nvPr/>
+        </p:nvSpPr>
+        <p:spPr>
+          <a:xfrm>
+            <a:off x="2743200" y="2761488"/>
+            <a:ext cx="1325880" cy="310896"/>
+          </a:xfrm>
+          <a:prstGeom prst="rect">
+            <a:avLst/>
+          </a:prstGeom>
+          <a:noFill/>
+          <a:ln/>
+        </p:spPr>
+        <p:txBody>
+          <a:bodyPr wrap="square" lIns="0" tIns="0" rIns="0" bIns="0" rtlCol="0" anchor="ctr"/>
+          <a:lstStyle/>
+          <a:p>
+            <a:pPr algn="r" indent="0" marL="0">
+              <a:buNone/>
+            </a:pPr>
+            <a:r>
+              <a:rPr lang="en-US" sz="1400" b="1" dirty="0">
+                <a:solidFill>
+                  <a:srgbClr val="1E2A38"/>
+                </a:solidFill>
+                <a:latin typeface="Meiryo" pitchFamily="34" charset="0"/>
+                <a:ea typeface="Meiryo" pitchFamily="34" charset="-122"/>
+                <a:cs typeface="Meiryo" pitchFamily="34" charset="-120"/>
+              </a:rPr>
+              <a:t>10.07億</a:t>
+            </a:r>
+            <a:endParaRPr lang="en-US" sz="1400" dirty="0"/>
+          </a:p>
+        </p:txBody>
+      </p:sp>
+      <p:sp>
+        <p:nvSpPr>
+          <p:cNvPr id="11" name="Text 9"/>
+          <p:cNvSpPr txBox="1"/>
+          <p:nvPr/>
+        </p:nvSpPr>
+        <p:spPr>
+          <a:xfrm>
+            <a:off x="914400" y="3191256"/>
+            <a:ext cx="2011680" cy="274320"/>
+          </a:xfrm>
+          <a:prstGeom prst="rect">
+            <a:avLst/>
+          </a:prstGeom>
+          <a:noFill/>
+          <a:ln/>
+        </p:spPr>
+        <p:txBody>
+          <a:bodyPr wrap="square" lIns="0" tIns="0" rIns="0" bIns="0" rtlCol="0" anchor="ctr"/>
+          <a:lstStyle/>
+          <a:p>
+            <a:pPr indent="0" marL="0">
+              <a:buNone/>
+            </a:pPr>
+            <a:r>
+              <a:rPr lang="en-US" sz="1050" dirty="0">
+                <a:solidFill>
+                  <a:srgbClr val="3D4E60"/>
+                </a:solidFill>
+                <a:latin typeface="Meiryo" pitchFamily="34" charset="0"/>
+                <a:ea typeface="Meiryo" pitchFamily="34" charset="-122"/>
+                <a:cs typeface="Meiryo" pitchFamily="34" charset="-120"/>
+              </a:rPr>
+              <a:t>自己資本比率</a:t>
+            </a:r>
+            <a:endParaRPr lang="en-US" sz="1050" dirty="0"/>
+          </a:p>
+        </p:txBody>
+      </p:sp>
+      <p:sp>
+        <p:nvSpPr>
+          <p:cNvPr id="12" name="Text 10"/>
+          <p:cNvSpPr txBox="1"/>
+          <p:nvPr/>
+        </p:nvSpPr>
+        <p:spPr>
+          <a:xfrm>
+            <a:off x="2743200" y="3163824"/>
+            <a:ext cx="1325880" cy="310896"/>
+          </a:xfrm>
+          <a:prstGeom prst="rect">
+            <a:avLst/>
+          </a:prstGeom>
+          <a:noFill/>
+          <a:ln/>
+        </p:spPr>
+        <p:txBody>
+          <a:bodyPr wrap="square" lIns="0" tIns="0" rIns="0" bIns="0" rtlCol="0" anchor="ctr"/>
+          <a:lstStyle/>
+          <a:p>
+            <a:pPr algn="r" indent="0" marL="0">
+              <a:buNone/>
+            </a:pPr>
+            <a:r>
+              <a:rPr lang="en-US" sz="1400" b="1" dirty="0">
+                <a:solidFill>
+                  <a:srgbClr val="1E2A38"/>
+                </a:solidFill>
+                <a:latin typeface="Meiryo" pitchFamily="34" charset="0"/>
+                <a:ea typeface="Meiryo" pitchFamily="34" charset="-122"/>
+                <a:cs typeface="Meiryo" pitchFamily="34" charset="-120"/>
+              </a:rPr>
+              <a:t>24.6%</a:t>
+            </a:r>
+            <a:endParaRPr lang="en-US" sz="1400" dirty="0"/>
+          </a:p>
+        </p:txBody>
+      </p:sp>
+      <p:sp>
+        <p:nvSpPr>
+          <p:cNvPr id="13" name="Text 11"/>
+          <p:cNvSpPr txBox="1"/>
+          <p:nvPr/>
+        </p:nvSpPr>
+        <p:spPr>
+          <a:xfrm>
+            <a:off x="914400" y="3593592"/>
+            <a:ext cx="2011680" cy="274320"/>
+          </a:xfrm>
+          <a:prstGeom prst="rect">
+            <a:avLst/>
+          </a:prstGeom>
+          <a:noFill/>
+          <a:ln/>
+        </p:spPr>
+        <p:txBody>
+          <a:bodyPr wrap="square" lIns="0" tIns="0" rIns="0" bIns="0" rtlCol="0" anchor="ctr"/>
+          <a:lstStyle/>
+          <a:p>
+            <a:pPr indent="0" marL="0">
+              <a:buNone/>
+            </a:pPr>
+            <a:r>
+              <a:rPr lang="en-US" sz="1050" dirty="0">
+                <a:solidFill>
+                  <a:srgbClr val="3D4E60"/>
+                </a:solidFill>
+                <a:latin typeface="Meiryo" pitchFamily="34" charset="0"/>
+                <a:ea typeface="Meiryo" pitchFamily="34" charset="-122"/>
+                <a:cs typeface="Meiryo" pitchFamily="34" charset="-120"/>
+              </a:rPr>
+              <a:t>現金及び現金同等物</a:t>
+            </a:r>
+            <a:endParaRPr lang="en-US" sz="1050" dirty="0"/>
+          </a:p>
+        </p:txBody>
+      </p:sp>
+      <p:sp>
+        <p:nvSpPr>
+          <p:cNvPr id="14" name="Text 12"/>
+          <p:cNvSpPr txBox="1"/>
+          <p:nvPr/>
+        </p:nvSpPr>
+        <p:spPr>
+          <a:xfrm>
+            <a:off x="2743200" y="3566160"/>
+            <a:ext cx="1325880" cy="310896"/>
+          </a:xfrm>
+          <a:prstGeom prst="rect">
+            <a:avLst/>
+          </a:prstGeom>
+          <a:noFill/>
+          <a:ln/>
+        </p:spPr>
+        <p:txBody>
+          <a:bodyPr wrap="square" lIns="0" tIns="0" rIns="0" bIns="0" rtlCol="0" anchor="ctr"/>
+          <a:lstStyle/>
+          <a:p>
+            <a:pPr algn="r" indent="0" marL="0">
+              <a:buNone/>
+            </a:pPr>
+            <a:r>
+              <a:rPr lang="en-US" sz="1400" b="1" dirty="0">
+                <a:solidFill>
+                  <a:srgbClr val="2C6A4E"/>
+                </a:solidFill>
+                <a:latin typeface="Meiryo" pitchFamily="34" charset="0"/>
+                <a:ea typeface="Meiryo" pitchFamily="34" charset="-122"/>
+                <a:cs typeface="Meiryo" pitchFamily="34" charset="-120"/>
+              </a:rPr>
+              <a:t>11.56億</a:t>
+            </a:r>
+            <a:endParaRPr lang="en-US" sz="1400" dirty="0"/>
+          </a:p>
+        </p:txBody>
+      </p:sp>
+      <p:sp>
+        <p:nvSpPr>
+          <p:cNvPr id="15" name="Text 13"/>
+          <p:cNvSpPr txBox="1"/>
+          <p:nvPr/>
+        </p:nvSpPr>
+        <p:spPr>
+          <a:xfrm>
+            <a:off x="914400" y="3995928"/>
+            <a:ext cx="2011680" cy="274320"/>
+          </a:xfrm>
+          <a:prstGeom prst="rect">
+            <a:avLst/>
+          </a:prstGeom>
+          <a:noFill/>
+          <a:ln/>
+        </p:spPr>
+        <p:txBody>
+          <a:bodyPr wrap="square" lIns="0" tIns="0" rIns="0" bIns="0" rtlCol="0" anchor="ctr"/>
+          <a:lstStyle/>
+          <a:p>
+            <a:pPr indent="0" marL="0">
+              <a:buNone/>
+            </a:pPr>
+            <a:r>
+              <a:rPr lang="en-US" sz="1050" dirty="0">
+                <a:solidFill>
+                  <a:srgbClr val="3D4E60"/>
+                </a:solidFill>
+                <a:latin typeface="Meiryo" pitchFamily="34" charset="0"/>
+                <a:ea typeface="Meiryo" pitchFamily="34" charset="-122"/>
+                <a:cs typeface="Meiryo" pitchFamily="34" charset="-120"/>
+              </a:rPr>
+              <a:t>固定負債</a:t>
+            </a:r>
+            <a:endParaRPr lang="en-US" sz="1050" dirty="0"/>
+          </a:p>
+        </p:txBody>
+      </p:sp>
+      <p:sp>
+        <p:nvSpPr>
+          <p:cNvPr id="16" name="Text 14"/>
+          <p:cNvSpPr txBox="1"/>
+          <p:nvPr/>
+        </p:nvSpPr>
+        <p:spPr>
+          <a:xfrm>
+            <a:off x="2743200" y="3968496"/>
+            <a:ext cx="1325880" cy="310896"/>
+          </a:xfrm>
+          <a:prstGeom prst="rect">
+            <a:avLst/>
+          </a:prstGeom>
+          <a:noFill/>
+          <a:ln/>
+        </p:spPr>
+        <p:txBody>
+          <a:bodyPr wrap="square" lIns="0" tIns="0" rIns="0" bIns="0" rtlCol="0" anchor="ctr"/>
+          <a:lstStyle/>
+          <a:p>
+            <a:pPr algn="r" indent="0" marL="0">
+              <a:buNone/>
+            </a:pPr>
+            <a:r>
+              <a:rPr lang="en-US" sz="1400" b="1" dirty="0">
+                <a:solidFill>
+                  <a:srgbClr val="1E2A38"/>
+                </a:solidFill>
+                <a:latin typeface="Meiryo" pitchFamily="34" charset="0"/>
+                <a:ea typeface="Meiryo" pitchFamily="34" charset="-122"/>
+                <a:cs typeface="Meiryo" pitchFamily="34" charset="-120"/>
+              </a:rPr>
+              <a:t>7.91億</a:t>
+            </a:r>
+            <a:endParaRPr lang="en-US" sz="1400" dirty="0"/>
+          </a:p>
+        </p:txBody>
+      </p:sp>
+      <p:sp>
+        <p:nvSpPr>
+          <p:cNvPr id="17" name="Text 15"/>
+          <p:cNvSpPr txBox="1"/>
+          <p:nvPr/>
+        </p:nvSpPr>
+        <p:spPr>
+          <a:xfrm>
+            <a:off x="914400" y="4398264"/>
+            <a:ext cx="2011680" cy="274320"/>
+          </a:xfrm>
+          <a:prstGeom prst="rect">
+            <a:avLst/>
+          </a:prstGeom>
+          <a:noFill/>
+          <a:ln/>
+        </p:spPr>
+        <p:txBody>
+          <a:bodyPr wrap="square" lIns="0" tIns="0" rIns="0" bIns="0" rtlCol="0" anchor="ctr"/>
+          <a:lstStyle/>
+          <a:p>
+            <a:pPr indent="0" marL="0">
+              <a:buNone/>
+            </a:pPr>
+            <a:r>
+              <a:rPr lang="en-US" sz="1050" dirty="0">
+                <a:solidFill>
+                  <a:srgbClr val="3D4E60"/>
+                </a:solidFill>
+                <a:latin typeface="Meiryo" pitchFamily="34" charset="0"/>
+                <a:ea typeface="Meiryo" pitchFamily="34" charset="-122"/>
+                <a:cs typeface="Meiryo" pitchFamily="34" charset="-120"/>
+              </a:rPr>
+              <a:t>売上高</a:t>
+            </a:r>
+            <a:endParaRPr lang="en-US" sz="1050" dirty="0"/>
+          </a:p>
+        </p:txBody>
+      </p:sp>
+      <p:sp>
+        <p:nvSpPr>
+          <p:cNvPr id="18" name="Text 16"/>
+          <p:cNvSpPr txBox="1"/>
+          <p:nvPr/>
+        </p:nvSpPr>
+        <p:spPr>
+          <a:xfrm>
+            <a:off x="2743200" y="4370832"/>
+            <a:ext cx="1325880" cy="310896"/>
+          </a:xfrm>
+          <a:prstGeom prst="rect">
+            <a:avLst/>
+          </a:prstGeom>
+          <a:noFill/>
+          <a:ln/>
+        </p:spPr>
+        <p:txBody>
+          <a:bodyPr wrap="square" lIns="0" tIns="0" rIns="0" bIns="0" rtlCol="0" anchor="ctr"/>
+          <a:lstStyle/>
+          <a:p>
+            <a:pPr algn="r" indent="0" marL="0">
+              <a:buNone/>
+            </a:pPr>
+            <a:r>
+              <a:rPr lang="en-US" sz="1400" b="1" dirty="0">
+                <a:solidFill>
+                  <a:srgbClr val="1E2A38"/>
+                </a:solidFill>
+                <a:latin typeface="Meiryo" pitchFamily="34" charset="0"/>
+                <a:ea typeface="Meiryo" pitchFamily="34" charset="-122"/>
+                <a:cs typeface="Meiryo" pitchFamily="34" charset="-120"/>
+              </a:rPr>
+              <a:t>25.67億</a:t>
+            </a:r>
+            <a:endParaRPr lang="en-US" sz="1400" dirty="0"/>
+          </a:p>
+        </p:txBody>
+      </p:sp>
+      <p:sp>
+        <p:nvSpPr>
+          <p:cNvPr id="19" name="Text 17"/>
+          <p:cNvSpPr txBox="1"/>
+          <p:nvPr/>
+        </p:nvSpPr>
+        <p:spPr>
+          <a:xfrm>
+            <a:off x="914400" y="4800600"/>
+            <a:ext cx="2011680" cy="274320"/>
+          </a:xfrm>
+          <a:prstGeom prst="rect">
+            <a:avLst/>
+          </a:prstGeom>
+          <a:noFill/>
+          <a:ln/>
+        </p:spPr>
+        <p:txBody>
+          <a:bodyPr wrap="square" lIns="0" tIns="0" rIns="0" bIns="0" rtlCol="0" anchor="ctr"/>
+          <a:lstStyle/>
+          <a:p>
+            <a:pPr indent="0" marL="0">
+              <a:buNone/>
+            </a:pPr>
+            <a:r>
+              <a:rPr lang="en-US" sz="1050" dirty="0">
+                <a:solidFill>
+                  <a:srgbClr val="3D4E60"/>
+                </a:solidFill>
+                <a:latin typeface="Meiryo" pitchFamily="34" charset="0"/>
+                <a:ea typeface="Meiryo" pitchFamily="34" charset="-122"/>
+                <a:cs typeface="Meiryo" pitchFamily="34" charset="-120"/>
+              </a:rPr>
+              <a:t>営業利益</a:t>
+            </a:r>
+            <a:endParaRPr lang="en-US" sz="1050" dirty="0"/>
+          </a:p>
+        </p:txBody>
+      </p:sp>
+      <p:sp>
+        <p:nvSpPr>
+          <p:cNvPr id="20" name="Text 18"/>
+          <p:cNvSpPr txBox="1"/>
+          <p:nvPr/>
+        </p:nvSpPr>
+        <p:spPr>
+          <a:xfrm>
+            <a:off x="2743200" y="4773168"/>
+            <a:ext cx="1325880" cy="310896"/>
+          </a:xfrm>
+          <a:prstGeom prst="rect">
+            <a:avLst/>
+          </a:prstGeom>
+          <a:noFill/>
+          <a:ln/>
+        </p:spPr>
+        <p:txBody>
+          <a:bodyPr wrap="square" lIns="0" tIns="0" rIns="0" bIns="0" rtlCol="0" anchor="ctr"/>
+          <a:lstStyle/>
+          <a:p>
+            <a:pPr algn="r" indent="0" marL="0">
+              <a:buNone/>
+            </a:pPr>
+            <a:r>
+              <a:rPr lang="en-US" sz="1400" b="1" dirty="0">
+                <a:solidFill>
+                  <a:srgbClr val="2C6A4E"/>
+                </a:solidFill>
+                <a:latin typeface="Meiryo" pitchFamily="34" charset="0"/>
+                <a:ea typeface="Meiryo" pitchFamily="34" charset="-122"/>
+                <a:cs typeface="Meiryo" pitchFamily="34" charset="-120"/>
+              </a:rPr>
+              <a:t>2.47億</a:t>
+            </a:r>
+            <a:endParaRPr lang="en-US" sz="1400" dirty="0"/>
+          </a:p>
+        </p:txBody>
+      </p:sp>
+      <p:sp>
+        <p:nvSpPr>
+          <p:cNvPr id="21" name="Text 19"/>
+          <p:cNvSpPr txBox="1"/>
+          <p:nvPr/>
+        </p:nvSpPr>
+        <p:spPr>
+          <a:xfrm>
+            <a:off x="914400" y="5230368"/>
+            <a:ext cx="3154680" cy="384048"/>
+          </a:xfrm>
+          <a:prstGeom prst="rect">
+            <a:avLst/>
+          </a:prstGeom>
+          <a:noFill/>
+          <a:ln/>
+        </p:spPr>
+        <p:txBody>
+          <a:bodyPr wrap="square" lIns="0" tIns="0" rIns="0" bIns="0" rtlCol="0" anchor="ctr"/>
+          <a:lstStyle/>
+          <a:p>
+            <a:pPr indent="0" marL="0">
+              <a:lnSpc>
+                <a:spcPct val="115000"/>
+              </a:lnSpc>
+              <a:buNone/>
+            </a:pPr>
+            <a:r>
+              <a:rPr lang="en-US" sz="1000" b="1" dirty="0">
+                <a:solidFill>
+                  <a:srgbClr val="2E5C8A"/>
+                </a:solidFill>
+                <a:latin typeface="Meiryo" pitchFamily="34" charset="0"/>
+                <a:ea typeface="Meiryo" pitchFamily="34" charset="-122"/>
+                <a:cs typeface="Meiryo" pitchFamily="34" charset="-120"/>
+              </a:rPr>
+              <a:t>2026年12月期 会社予想　売上 32.44億／営業利益 2.90億</a:t>
+            </a:r>
+            <a:endParaRPr lang="en-US" sz="1000" dirty="0"/>
+          </a:p>
+        </p:txBody>
+      </p:sp>
+      <p:graphicFrame>
+        <p:nvGraphicFramePr>
+          <p:cNvPr id="7" name="Table 0"/>
+          <p:cNvGraphicFramePr>
+            <a:graphicFrameLocks noGrp="1"/>
+          </p:cNvGraphicFramePr>
+          <p:nvPr>
+            <p:extLst>
+              <p:ext uri="{D42A27DB-BD31-4B8C-83A1-F6EECF244321}">
+                <p14:modId xmlns:p14="http://schemas.microsoft.com/office/powerpoint/2010/main" val="1579011935"/>
+              </p:ext>
+            </p:extLst>
+          </p:nvPr>
+        </p:nvGraphicFramePr>
+        <p:xfrm>
+          <a:off x="4617720" y="1536192"/>
+          <a:ext cx="6903720" cy="914400"/>
+        </p:xfrm>
+        <a:graphic>
+          <a:graphicData uri="http://schemas.openxmlformats.org/drawingml/2006/table">
+            <a:tbl>
+              <a:tblPr/>
+              <a:tblGrid>
+                <a:gridCol w="2788920"/>
+                <a:gridCol w="2057400"/>
+                <a:gridCol w="2057400"/>
+              </a:tblGrid>
+              <a:tr h="365760">
+                <a:tc>
+                  <a:txBody>
+                    <a:bodyPr/>
+                    <a:lstStyle/>
+                    <a:p>
+                      <a:pPr indent="0" marL="0">
+                        <a:buNone/>
+                      </a:pPr>
+                      <a:r>
+                        <a:rPr lang="en-US" sz="1100" b="1" dirty="0">
+                          <a:solidFill>
+                            <a:srgbClr val="FFFFFF"/>
+                          </a:solidFill>
+                          <a:latin typeface="Meiryo" pitchFamily="34" charset="0"/>
+                          <a:ea typeface="Meiryo" pitchFamily="34" charset="-122"/>
+                          <a:cs typeface="Meiryo" pitchFamily="34" charset="-120"/>
+                        </a:rPr>
+                        <a:t>合算後</a:t>
+                      </a:r>
+                      <a:endParaRPr lang="en-US" sz="1100" dirty="0">
+                        <a:latin typeface="Meiryo" charset="0"/>
+                        <a:ea typeface="Meiryo" charset="0"/>
+                        <a:cs typeface="Meiryo" charset="0"/>
+                      </a:endParaRPr>
+                    </a:p>
+                  </a:txBody>
+                  <a:tcPr marL="91440" marR="91440" marT="45720" marB="45720" anchor="ctr">
+                    <a:lnL w="6350" cap="flat" cmpd="sng" algn="ctr">
+                      <a:solidFill>
+                        <a:srgbClr val="D9E0E7"/>
+                      </a:solidFill>
+                      <a:prstDash val="solid"/>
+                      <a:round/>
+                      <a:headEnd type="none" w="med" len="med"/>
+                      <a:tailEnd type="none" w="med" len="med"/>
+                    </a:lnL>
+                    <a:lnR w="6350" cap="flat" cmpd="sng" algn="ctr">
+                      <a:solidFill>
+                        <a:srgbClr val="D9E0E7"/>
+                      </a:solidFill>
+                      <a:prstDash val="solid"/>
+                      <a:round/>
+                      <a:headEnd type="none" w="med" len="med"/>
+                      <a:tailEnd type="none" w="med" len="med"/>
+                    </a:lnR>
+                    <a:lnT w="6350" cap="flat" cmpd="sng" algn="ctr">
+                      <a:solidFill>
+                        <a:srgbClr val="D9E0E7"/>
+                      </a:solidFill>
+                      <a:prstDash val="solid"/>
+                      <a:round/>
+                      <a:headEnd type="none" w="med" len="med"/>
+                      <a:tailEnd type="none" w="med" len="med"/>
+                    </a:lnT>
+                    <a:lnB w="6350" cap="flat" cmpd="sng" algn="ctr">
+                      <a:solidFill>
+                        <a:srgbClr val="D9E0E7"/>
+                      </a:solidFill>
+                      <a:prstDash val="solid"/>
+                      <a:round/>
+                      <a:headEnd type="none" w="med" len="med"/>
+                      <a:tailEnd type="none" w="med" len="med"/>
+                    </a:lnB>
+                    <a:solidFill>
+                      <a:srgbClr val="1E2A38"/>
+                    </a:solidFill>
+                  </a:tcPr>
+                </a:tc>
+                <a:tc>
+                  <a:txBody>
+                    <a:bodyPr/>
+                    <a:lstStyle/>
+                    <a:p>
+                      <a:pPr algn="ctr" indent="0" marL="0">
+                        <a:buNone/>
+                      </a:pPr>
+                      <a:r>
+                        <a:rPr lang="en-US" sz="1100" b="1" dirty="0">
+                          <a:solidFill>
+                            <a:srgbClr val="FFFFFF"/>
+                          </a:solidFill>
+                          <a:latin typeface="Meiryo" pitchFamily="34" charset="0"/>
+                          <a:ea typeface="Meiryo" pitchFamily="34" charset="-122"/>
+                          <a:cs typeface="Meiryo" pitchFamily="34" charset="-120"/>
+                        </a:rPr>
+                        <a:t>いま合併</a:t>
+                      </a:r>
+                      <a:endParaRPr lang="en-US" sz="1100" dirty="0">
+                        <a:latin typeface="Meiryo" charset="0"/>
+                        <a:ea typeface="Meiryo" charset="0"/>
+                        <a:cs typeface="Meiryo" charset="0"/>
+                      </a:endParaRPr>
+                    </a:p>
+                  </a:txBody>
+                  <a:tcPr marL="91440" marR="91440" marT="45720" marB="45720" anchor="ctr">
+                    <a:lnL w="6350" cap="flat" cmpd="sng" algn="ctr">
+                      <a:solidFill>
+                        <a:srgbClr val="D9E0E7"/>
+                      </a:solidFill>
+                      <a:prstDash val="solid"/>
+                      <a:round/>
+                      <a:headEnd type="none" w="med" len="med"/>
+                      <a:tailEnd type="none" w="med" len="med"/>
+                    </a:lnL>
+                    <a:lnR w="6350" cap="flat" cmpd="sng" algn="ctr">
+                      <a:solidFill>
+                        <a:srgbClr val="D9E0E7"/>
+                      </a:solidFill>
+                      <a:prstDash val="solid"/>
+                      <a:round/>
+                      <a:headEnd type="none" w="med" len="med"/>
+                      <a:tailEnd type="none" w="med" len="med"/>
+                    </a:lnR>
+                    <a:lnT w="6350" cap="flat" cmpd="sng" algn="ctr">
+                      <a:solidFill>
+                        <a:srgbClr val="D9E0E7"/>
+                      </a:solidFill>
+                      <a:prstDash val="solid"/>
+                      <a:round/>
+                      <a:headEnd type="none" w="med" len="med"/>
+                      <a:tailEnd type="none" w="med" len="med"/>
+                    </a:lnT>
+                    <a:lnB w="6350" cap="flat" cmpd="sng" algn="ctr">
+                      <a:solidFill>
+                        <a:srgbClr val="D9E0E7"/>
+                      </a:solidFill>
+                      <a:prstDash val="solid"/>
+                      <a:round/>
+                      <a:headEnd type="none" w="med" len="med"/>
+                      <a:tailEnd type="none" w="med" len="med"/>
+                    </a:lnB>
+                    <a:solidFill>
+                      <a:srgbClr val="1E2A38"/>
+                    </a:solidFill>
+                  </a:tcPr>
+                </a:tc>
+                <a:tc>
+                  <a:txBody>
+                    <a:bodyPr/>
+                    <a:lstStyle/>
+                    <a:p>
+                      <a:pPr algn="ctr" indent="0" marL="0">
+                        <a:buNone/>
+                      </a:pPr>
+                      <a:r>
+                        <a:rPr lang="en-US" sz="1100" b="1" dirty="0">
+                          <a:solidFill>
+                            <a:srgbClr val="FFFFFF"/>
+                          </a:solidFill>
+                          <a:latin typeface="Meiryo" pitchFamily="34" charset="0"/>
+                          <a:ea typeface="Meiryo" pitchFamily="34" charset="-122"/>
+                          <a:cs typeface="Meiryo" pitchFamily="34" charset="-120"/>
+                        </a:rPr>
+                        <a:t>MBO完了後</a:t>
+                      </a:r>
+                      <a:endParaRPr lang="en-US" sz="1100" dirty="0">
+                        <a:latin typeface="Meiryo" charset="0"/>
+                        <a:ea typeface="Meiryo" charset="0"/>
+                        <a:cs typeface="Meiryo" charset="0"/>
+                      </a:endParaRPr>
+                    </a:p>
+                  </a:txBody>
+                  <a:tcPr marL="91440" marR="91440" marT="45720" marB="45720" anchor="ctr">
+                    <a:lnL w="6350" cap="flat" cmpd="sng" algn="ctr">
+                      <a:solidFill>
+                        <a:srgbClr val="D9E0E7"/>
+                      </a:solidFill>
+                      <a:prstDash val="solid"/>
+                      <a:round/>
+                      <a:headEnd type="none" w="med" len="med"/>
+                      <a:tailEnd type="none" w="med" len="med"/>
+                    </a:lnL>
+                    <a:lnR w="6350" cap="flat" cmpd="sng" algn="ctr">
+                      <a:solidFill>
+                        <a:srgbClr val="D9E0E7"/>
+                      </a:solidFill>
+                      <a:prstDash val="solid"/>
+                      <a:round/>
+                      <a:headEnd type="none" w="med" len="med"/>
+                      <a:tailEnd type="none" w="med" len="med"/>
+                    </a:lnR>
+                    <a:lnT w="6350" cap="flat" cmpd="sng" algn="ctr">
+                      <a:solidFill>
+                        <a:srgbClr val="D9E0E7"/>
+                      </a:solidFill>
+                      <a:prstDash val="solid"/>
+                      <a:round/>
+                      <a:headEnd type="none" w="med" len="med"/>
+                      <a:tailEnd type="none" w="med" len="med"/>
+                    </a:lnT>
+                    <a:lnB w="6350" cap="flat" cmpd="sng" algn="ctr">
+                      <a:solidFill>
+                        <a:srgbClr val="D9E0E7"/>
+                      </a:solidFill>
+                      <a:prstDash val="solid"/>
+                      <a:round/>
+                      <a:headEnd type="none" w="med" len="med"/>
+                      <a:tailEnd type="none" w="med" len="med"/>
+                    </a:lnB>
+                    <a:solidFill>
+                      <a:srgbClr val="6E2639"/>
+                    </a:solidFill>
+                  </a:tcPr>
+                </a:tc>
+              </a:tr>
+              <a:tr h="365760">
+                <a:tc>
+                  <a:txBody>
+                    <a:bodyPr/>
+                    <a:lstStyle/>
+                    <a:p>
+                      <a:pPr indent="0" marL="0">
+                        <a:buNone/>
+                      </a:pPr>
+                      <a:r>
+                        <a:rPr lang="en-US" sz="1100" b="1" dirty="0">
+                          <a:solidFill>
+                            <a:srgbClr val="3D4E60"/>
+                          </a:solidFill>
+                          <a:latin typeface="Meiryo" pitchFamily="34" charset="0"/>
+                          <a:ea typeface="Meiryo" pitchFamily="34" charset="-122"/>
+                          <a:cs typeface="Meiryo" pitchFamily="34" charset="-120"/>
+                        </a:rPr>
+                        <a:t>のれん</a:t>
+                      </a:r>
+                      <a:endParaRPr lang="en-US" sz="1100" dirty="0">
+                        <a:latin typeface="Meiryo" charset="0"/>
+                        <a:ea typeface="Meiryo" charset="0"/>
+                        <a:cs typeface="Meiryo" charset="0"/>
+                      </a:endParaRPr>
+                    </a:p>
+                  </a:txBody>
+                  <a:tcPr marL="91440" marR="91440" marT="45720" marB="45720" anchor="ctr">
+                    <a:lnL w="6350" cap="flat" cmpd="sng" algn="ctr">
+                      <a:solidFill>
+                        <a:srgbClr val="D9E0E7"/>
+                      </a:solidFill>
+                      <a:prstDash val="solid"/>
+                      <a:round/>
+                      <a:headEnd type="none" w="med" len="med"/>
+                      <a:tailEnd type="none" w="med" len="med"/>
+                    </a:lnL>
+                    <a:lnR w="6350" cap="flat" cmpd="sng" algn="ctr">
+                      <a:solidFill>
+                        <a:srgbClr val="D9E0E7"/>
+                      </a:solidFill>
+                      <a:prstDash val="solid"/>
+                      <a:round/>
+                      <a:headEnd type="none" w="med" len="med"/>
+                      <a:tailEnd type="none" w="med" len="med"/>
+                    </a:lnR>
+                    <a:lnT w="6350" cap="flat" cmpd="sng" algn="ctr">
+                      <a:solidFill>
+                        <a:srgbClr val="D9E0E7"/>
+                      </a:solidFill>
+                      <a:prstDash val="solid"/>
+                      <a:round/>
+                      <a:headEnd type="none" w="med" len="med"/>
+                      <a:tailEnd type="none" w="med" len="med"/>
+                    </a:lnT>
+                    <a:lnB w="6350" cap="flat" cmpd="sng" algn="ctr">
+                      <a:solidFill>
+                        <a:srgbClr val="D9E0E7"/>
+                      </a:solidFill>
+                      <a:prstDash val="solid"/>
+                      <a:round/>
+                      <a:headEnd type="none" w="med" len="med"/>
+                      <a:tailEnd type="none" w="med" len="med"/>
+                    </a:lnB>
+                  </a:tcPr>
+                </a:tc>
+                <a:tc>
+                  <a:txBody>
+                    <a:bodyPr/>
+                    <a:lstStyle/>
+                    <a:p>
+                      <a:pPr algn="ctr" indent="0" marL="0">
+                        <a:buNone/>
+                      </a:pPr>
+                      <a:r>
+                        <a:rPr lang="en-US" sz="1100" dirty="0">
+                          <a:solidFill>
+                            <a:srgbClr val="3D4E60"/>
+                          </a:solidFill>
+                          <a:latin typeface="Meiryo" pitchFamily="34" charset="0"/>
+                          <a:ea typeface="Meiryo" pitchFamily="34" charset="-122"/>
+                          <a:cs typeface="Meiryo" pitchFamily="34" charset="-120"/>
+                        </a:rPr>
+                        <a:t>22.09億</a:t>
+                      </a:r>
+                      <a:endParaRPr lang="en-US" sz="1100" dirty="0">
+                        <a:latin typeface="Meiryo" charset="0"/>
+                        <a:ea typeface="Meiryo" charset="0"/>
+                        <a:cs typeface="Meiryo" charset="0"/>
+                      </a:endParaRPr>
+                    </a:p>
+                  </a:txBody>
+                  <a:tcPr marL="91440" marR="91440" marT="45720" marB="45720" anchor="ctr">
+                    <a:lnL w="6350" cap="flat" cmpd="sng" algn="ctr">
+                      <a:solidFill>
+                        <a:srgbClr val="D9E0E7"/>
+                      </a:solidFill>
+                      <a:prstDash val="solid"/>
+                      <a:round/>
+                      <a:headEnd type="none" w="med" len="med"/>
+                      <a:tailEnd type="none" w="med" len="med"/>
+                    </a:lnL>
+                    <a:lnR w="6350" cap="flat" cmpd="sng" algn="ctr">
+                      <a:solidFill>
+                        <a:srgbClr val="D9E0E7"/>
+                      </a:solidFill>
+                      <a:prstDash val="solid"/>
+                      <a:round/>
+                      <a:headEnd type="none" w="med" len="med"/>
+                      <a:tailEnd type="none" w="med" len="med"/>
+                    </a:lnR>
+                    <a:lnT w="6350" cap="flat" cmpd="sng" algn="ctr">
+                      <a:solidFill>
+                        <a:srgbClr val="D9E0E7"/>
+                      </a:solidFill>
+                      <a:prstDash val="solid"/>
+                      <a:round/>
+                      <a:headEnd type="none" w="med" len="med"/>
+                      <a:tailEnd type="none" w="med" len="med"/>
+                    </a:lnT>
+                    <a:lnB w="6350" cap="flat" cmpd="sng" algn="ctr">
+                      <a:solidFill>
+                        <a:srgbClr val="D9E0E7"/>
+                      </a:solidFill>
+                      <a:prstDash val="solid"/>
+                      <a:round/>
+                      <a:headEnd type="none" w="med" len="med"/>
+                      <a:tailEnd type="none" w="med" len="med"/>
+                    </a:lnB>
+                  </a:tcPr>
+                </a:tc>
+                <a:tc>
+                  <a:txBody>
+                    <a:bodyPr/>
+                    <a:lstStyle/>
+                    <a:p>
+                      <a:pPr algn="ctr" indent="0" marL="0">
+                        <a:buNone/>
+                      </a:pPr>
+                      <a:r>
+                        <a:rPr lang="en-US" sz="1100" dirty="0">
+                          <a:solidFill>
+                            <a:srgbClr val="3D4E60"/>
+                          </a:solidFill>
+                          <a:latin typeface="Meiryo" pitchFamily="34" charset="0"/>
+                          <a:ea typeface="Meiryo" pitchFamily="34" charset="-122"/>
+                          <a:cs typeface="Meiryo" pitchFamily="34" charset="-120"/>
+                        </a:rPr>
+                        <a:t>22.95億</a:t>
+                      </a:r>
+                      <a:endParaRPr lang="en-US" sz="1100" dirty="0">
+                        <a:latin typeface="Meiryo" charset="0"/>
+                        <a:ea typeface="Meiryo" charset="0"/>
+                        <a:cs typeface="Meiryo" charset="0"/>
+                      </a:endParaRPr>
+                    </a:p>
+                  </a:txBody>
+                  <a:tcPr marL="91440" marR="91440" marT="45720" marB="45720" anchor="ctr">
+                    <a:lnL w="6350" cap="flat" cmpd="sng" algn="ctr">
+                      <a:solidFill>
+                        <a:srgbClr val="D9E0E7"/>
+                      </a:solidFill>
+                      <a:prstDash val="solid"/>
+                      <a:round/>
+                      <a:headEnd type="none" w="med" len="med"/>
+                      <a:tailEnd type="none" w="med" len="med"/>
+                    </a:lnL>
+                    <a:lnR w="6350" cap="flat" cmpd="sng" algn="ctr">
+                      <a:solidFill>
+                        <a:srgbClr val="D9E0E7"/>
+                      </a:solidFill>
+                      <a:prstDash val="solid"/>
+                      <a:round/>
+                      <a:headEnd type="none" w="med" len="med"/>
+                      <a:tailEnd type="none" w="med" len="med"/>
+                    </a:lnR>
+                    <a:lnT w="6350" cap="flat" cmpd="sng" algn="ctr">
+                      <a:solidFill>
+                        <a:srgbClr val="D9E0E7"/>
+                      </a:solidFill>
+                      <a:prstDash val="solid"/>
+                      <a:round/>
+                      <a:headEnd type="none" w="med" len="med"/>
+                      <a:tailEnd type="none" w="med" len="med"/>
+                    </a:lnT>
+                    <a:lnB w="6350" cap="flat" cmpd="sng" algn="ctr">
+                      <a:solidFill>
+                        <a:srgbClr val="D9E0E7"/>
+                      </a:solidFill>
+                      <a:prstDash val="solid"/>
+                      <a:round/>
+                      <a:headEnd type="none" w="med" len="med"/>
+                      <a:tailEnd type="none" w="med" len="med"/>
+                    </a:lnB>
+                  </a:tcPr>
+                </a:tc>
+              </a:tr>
+              <a:tr h="365760">
+                <a:tc>
+                  <a:txBody>
+                    <a:bodyPr/>
+                    <a:lstStyle/>
+                    <a:p>
+                      <a:pPr indent="0" marL="0">
+                        <a:buNone/>
+                      </a:pPr>
+                      <a:r>
+                        <a:rPr lang="en-US" sz="1100" b="1" dirty="0">
+                          <a:solidFill>
+                            <a:srgbClr val="3D4E60"/>
+                          </a:solidFill>
+                          <a:latin typeface="Meiryo" pitchFamily="34" charset="0"/>
+                          <a:ea typeface="Meiryo" pitchFamily="34" charset="-122"/>
+                          <a:cs typeface="Meiryo" pitchFamily="34" charset="-120"/>
+                        </a:rPr>
+                        <a:t>総資産</a:t>
+                      </a:r>
+                      <a:endParaRPr lang="en-US" sz="1100" dirty="0">
+                        <a:latin typeface="Meiryo" charset="0"/>
+                        <a:ea typeface="Meiryo" charset="0"/>
+                        <a:cs typeface="Meiryo" charset="0"/>
+                      </a:endParaRPr>
+                    </a:p>
+                  </a:txBody>
+                  <a:tcPr marL="91440" marR="91440" marT="45720" marB="45720" anchor="ctr">
+                    <a:lnL w="6350" cap="flat" cmpd="sng" algn="ctr">
+                      <a:solidFill>
+                        <a:srgbClr val="D9E0E7"/>
+                      </a:solidFill>
+                      <a:prstDash val="solid"/>
+                      <a:round/>
+                      <a:headEnd type="none" w="med" len="med"/>
+                      <a:tailEnd type="none" w="med" len="med"/>
+                    </a:lnL>
+                    <a:lnR w="6350" cap="flat" cmpd="sng" algn="ctr">
+                      <a:solidFill>
+                        <a:srgbClr val="D9E0E7"/>
+                      </a:solidFill>
+                      <a:prstDash val="solid"/>
+                      <a:round/>
+                      <a:headEnd type="none" w="med" len="med"/>
+                      <a:tailEnd type="none" w="med" len="med"/>
+                    </a:lnR>
+                    <a:lnT w="6350" cap="flat" cmpd="sng" algn="ctr">
+                      <a:solidFill>
+                        <a:srgbClr val="D9E0E7"/>
+                      </a:solidFill>
+                      <a:prstDash val="solid"/>
+                      <a:round/>
+                      <a:headEnd type="none" w="med" len="med"/>
+                      <a:tailEnd type="none" w="med" len="med"/>
+                    </a:lnT>
+                    <a:lnB w="6350" cap="flat" cmpd="sng" algn="ctr">
+                      <a:solidFill>
+                        <a:srgbClr val="D9E0E7"/>
+                      </a:solidFill>
+                      <a:prstDash val="solid"/>
+                      <a:round/>
+                      <a:headEnd type="none" w="med" len="med"/>
+                      <a:tailEnd type="none" w="med" len="med"/>
+                    </a:lnB>
+                  </a:tcPr>
+                </a:tc>
+                <a:tc>
+                  <a:txBody>
+                    <a:bodyPr/>
+                    <a:lstStyle/>
+                    <a:p>
+                      <a:pPr algn="ctr" indent="0" marL="0">
+                        <a:buNone/>
+                      </a:pPr>
+                      <a:r>
+                        <a:rPr lang="en-US" sz="1100" dirty="0">
+                          <a:solidFill>
+                            <a:srgbClr val="3D4E60"/>
+                          </a:solidFill>
+                          <a:latin typeface="Meiryo" pitchFamily="34" charset="0"/>
+                          <a:ea typeface="Meiryo" pitchFamily="34" charset="-122"/>
+                          <a:cs typeface="Meiryo" pitchFamily="34" charset="-120"/>
+                        </a:rPr>
+                        <a:t>72.64億</a:t>
+                      </a:r>
+                      <a:endParaRPr lang="en-US" sz="1100" dirty="0">
+                        <a:latin typeface="Meiryo" charset="0"/>
+                        <a:ea typeface="Meiryo" charset="0"/>
+                        <a:cs typeface="Meiryo" charset="0"/>
+                      </a:endParaRPr>
+                    </a:p>
+                  </a:txBody>
+                  <a:tcPr marL="91440" marR="91440" marT="45720" marB="45720" anchor="ctr">
+                    <a:lnL w="6350" cap="flat" cmpd="sng" algn="ctr">
+                      <a:solidFill>
+                        <a:srgbClr val="D9E0E7"/>
+                      </a:solidFill>
+                      <a:prstDash val="solid"/>
+                      <a:round/>
+                      <a:headEnd type="none" w="med" len="med"/>
+                      <a:tailEnd type="none" w="med" len="med"/>
+                    </a:lnL>
+                    <a:lnR w="6350" cap="flat" cmpd="sng" algn="ctr">
+                      <a:solidFill>
+                        <a:srgbClr val="D9E0E7"/>
+                      </a:solidFill>
+                      <a:prstDash val="solid"/>
+                      <a:round/>
+                      <a:headEnd type="none" w="med" len="med"/>
+                      <a:tailEnd type="none" w="med" len="med"/>
+                    </a:lnR>
+                    <a:lnT w="6350" cap="flat" cmpd="sng" algn="ctr">
+                      <a:solidFill>
+                        <a:srgbClr val="D9E0E7"/>
+                      </a:solidFill>
+                      <a:prstDash val="solid"/>
+                      <a:round/>
+                      <a:headEnd type="none" w="med" len="med"/>
+                      <a:tailEnd type="none" w="med" len="med"/>
+                    </a:lnT>
+                    <a:lnB w="6350" cap="flat" cmpd="sng" algn="ctr">
+                      <a:solidFill>
+                        <a:srgbClr val="D9E0E7"/>
+                      </a:solidFill>
+                      <a:prstDash val="solid"/>
+                      <a:round/>
+                      <a:headEnd type="none" w="med" len="med"/>
+                      <a:tailEnd type="none" w="med" len="med"/>
+                    </a:lnB>
+                  </a:tcPr>
+                </a:tc>
+                <a:tc>
+                  <a:txBody>
+                    <a:bodyPr/>
+                    <a:lstStyle/>
+                    <a:p>
+                      <a:pPr algn="ctr" indent="0" marL="0">
+                        <a:buNone/>
+                      </a:pPr>
+                      <a:r>
+                        <a:rPr lang="en-US" sz="1100" dirty="0">
+                          <a:solidFill>
+                            <a:srgbClr val="3D4E60"/>
+                          </a:solidFill>
+                          <a:latin typeface="Meiryo" pitchFamily="34" charset="0"/>
+                          <a:ea typeface="Meiryo" pitchFamily="34" charset="-122"/>
+                          <a:cs typeface="Meiryo" pitchFamily="34" charset="-120"/>
+                        </a:rPr>
+                        <a:t>75.97億</a:t>
+                      </a:r>
+                      <a:endParaRPr lang="en-US" sz="1100" dirty="0">
+                        <a:latin typeface="Meiryo" charset="0"/>
+                        <a:ea typeface="Meiryo" charset="0"/>
+                        <a:cs typeface="Meiryo" charset="0"/>
+                      </a:endParaRPr>
+                    </a:p>
+                  </a:txBody>
+                  <a:tcPr marL="91440" marR="91440" marT="45720" marB="45720" anchor="ctr">
+                    <a:lnL w="6350" cap="flat" cmpd="sng" algn="ctr">
+                      <a:solidFill>
+                        <a:srgbClr val="D9E0E7"/>
+                      </a:solidFill>
+                      <a:prstDash val="solid"/>
+                      <a:round/>
+                      <a:headEnd type="none" w="med" len="med"/>
+                      <a:tailEnd type="none" w="med" len="med"/>
+                    </a:lnL>
+                    <a:lnR w="6350" cap="flat" cmpd="sng" algn="ctr">
+                      <a:solidFill>
+                        <a:srgbClr val="D9E0E7"/>
+                      </a:solidFill>
+                      <a:prstDash val="solid"/>
+                      <a:round/>
+                      <a:headEnd type="none" w="med" len="med"/>
+                      <a:tailEnd type="none" w="med" len="med"/>
+                    </a:lnR>
+                    <a:lnT w="6350" cap="flat" cmpd="sng" algn="ctr">
+                      <a:solidFill>
+                        <a:srgbClr val="D9E0E7"/>
+                      </a:solidFill>
+                      <a:prstDash val="solid"/>
+                      <a:round/>
+                      <a:headEnd type="none" w="med" len="med"/>
+                      <a:tailEnd type="none" w="med" len="med"/>
+                    </a:lnT>
+                    <a:lnB w="6350" cap="flat" cmpd="sng" algn="ctr">
+                      <a:solidFill>
+                        <a:srgbClr val="D9E0E7"/>
+                      </a:solidFill>
+                      <a:prstDash val="solid"/>
+                      <a:round/>
+                      <a:headEnd type="none" w="med" len="med"/>
+                      <a:tailEnd type="none" w="med" len="med"/>
+                    </a:lnB>
+                  </a:tcPr>
+                </a:tc>
+              </a:tr>
+              <a:tr h="365760">
+                <a:tc>
+                  <a:txBody>
+                    <a:bodyPr/>
+                    <a:lstStyle/>
+                    <a:p>
+                      <a:pPr indent="0" marL="0">
+                        <a:buNone/>
+                      </a:pPr>
+                      <a:r>
+                        <a:rPr lang="en-US" sz="1100" b="1" dirty="0">
+                          <a:solidFill>
+                            <a:srgbClr val="3D4E60"/>
+                          </a:solidFill>
+                          <a:latin typeface="Meiryo" pitchFamily="34" charset="0"/>
+                          <a:ea typeface="Meiryo" pitchFamily="34" charset="-122"/>
+                          <a:cs typeface="Meiryo" pitchFamily="34" charset="-120"/>
+                        </a:rPr>
+                        <a:t>純資産</a:t>
+                      </a:r>
+                      <a:endParaRPr lang="en-US" sz="1100" dirty="0">
+                        <a:latin typeface="Meiryo" charset="0"/>
+                        <a:ea typeface="Meiryo" charset="0"/>
+                        <a:cs typeface="Meiryo" charset="0"/>
+                      </a:endParaRPr>
+                    </a:p>
+                  </a:txBody>
+                  <a:tcPr marL="91440" marR="91440" marT="45720" marB="45720" anchor="ctr">
+                    <a:lnL w="6350" cap="flat" cmpd="sng" algn="ctr">
+                      <a:solidFill>
+                        <a:srgbClr val="D9E0E7"/>
+                      </a:solidFill>
+                      <a:prstDash val="solid"/>
+                      <a:round/>
+                      <a:headEnd type="none" w="med" len="med"/>
+                      <a:tailEnd type="none" w="med" len="med"/>
+                    </a:lnL>
+                    <a:lnR w="6350" cap="flat" cmpd="sng" algn="ctr">
+                      <a:solidFill>
+                        <a:srgbClr val="D9E0E7"/>
+                      </a:solidFill>
+                      <a:prstDash val="solid"/>
+                      <a:round/>
+                      <a:headEnd type="none" w="med" len="med"/>
+                      <a:tailEnd type="none" w="med" len="med"/>
+                    </a:lnR>
+                    <a:lnT w="6350" cap="flat" cmpd="sng" algn="ctr">
+                      <a:solidFill>
+                        <a:srgbClr val="D9E0E7"/>
+                      </a:solidFill>
+                      <a:prstDash val="solid"/>
+                      <a:round/>
+                      <a:headEnd type="none" w="med" len="med"/>
+                      <a:tailEnd type="none" w="med" len="med"/>
+                    </a:lnT>
+                    <a:lnB w="6350" cap="flat" cmpd="sng" algn="ctr">
+                      <a:solidFill>
+                        <a:srgbClr val="D9E0E7"/>
+                      </a:solidFill>
+                      <a:prstDash val="solid"/>
+                      <a:round/>
+                      <a:headEnd type="none" w="med" len="med"/>
+                      <a:tailEnd type="none" w="med" len="med"/>
+                    </a:lnB>
+                  </a:tcPr>
+                </a:tc>
+                <a:tc>
+                  <a:txBody>
+                    <a:bodyPr/>
+                    <a:lstStyle/>
+                    <a:p>
+                      <a:pPr algn="ctr" indent="0" marL="0">
+                        <a:buNone/>
+                      </a:pPr>
+                      <a:r>
+                        <a:rPr lang="en-US" sz="1100" dirty="0">
+                          <a:solidFill>
+                            <a:srgbClr val="3D4E60"/>
+                          </a:solidFill>
+                          <a:latin typeface="Meiryo" pitchFamily="34" charset="0"/>
+                          <a:ea typeface="Meiryo" pitchFamily="34" charset="-122"/>
+                          <a:cs typeface="Meiryo" pitchFamily="34" charset="-120"/>
+                        </a:rPr>
+                        <a:t>28.07億</a:t>
+                      </a:r>
+                      <a:endParaRPr lang="en-US" sz="1100" dirty="0">
+                        <a:latin typeface="Meiryo" charset="0"/>
+                        <a:ea typeface="Meiryo" charset="0"/>
+                        <a:cs typeface="Meiryo" charset="0"/>
+                      </a:endParaRPr>
+                    </a:p>
+                  </a:txBody>
+                  <a:tcPr marL="91440" marR="91440" marT="45720" marB="45720" anchor="ctr">
+                    <a:lnL w="6350" cap="flat" cmpd="sng" algn="ctr">
+                      <a:solidFill>
+                        <a:srgbClr val="D9E0E7"/>
+                      </a:solidFill>
+                      <a:prstDash val="solid"/>
+                      <a:round/>
+                      <a:headEnd type="none" w="med" len="med"/>
+                      <a:tailEnd type="none" w="med" len="med"/>
+                    </a:lnL>
+                    <a:lnR w="6350" cap="flat" cmpd="sng" algn="ctr">
+                      <a:solidFill>
+                        <a:srgbClr val="D9E0E7"/>
+                      </a:solidFill>
+                      <a:prstDash val="solid"/>
+                      <a:round/>
+                      <a:headEnd type="none" w="med" len="med"/>
+                      <a:tailEnd type="none" w="med" len="med"/>
+                    </a:lnR>
+                    <a:lnT w="6350" cap="flat" cmpd="sng" algn="ctr">
+                      <a:solidFill>
+                        <a:srgbClr val="D9E0E7"/>
+                      </a:solidFill>
+                      <a:prstDash val="solid"/>
+                      <a:round/>
+                      <a:headEnd type="none" w="med" len="med"/>
+                      <a:tailEnd type="none" w="med" len="med"/>
+                    </a:lnT>
+                    <a:lnB w="6350" cap="flat" cmpd="sng" algn="ctr">
+                      <a:solidFill>
+                        <a:srgbClr val="D9E0E7"/>
+                      </a:solidFill>
+                      <a:prstDash val="solid"/>
+                      <a:round/>
+                      <a:headEnd type="none" w="med" len="med"/>
+                      <a:tailEnd type="none" w="med" len="med"/>
+                    </a:lnB>
+                  </a:tcPr>
+                </a:tc>
+                <a:tc>
+                  <a:txBody>
+                    <a:bodyPr/>
+                    <a:lstStyle/>
+                    <a:p>
+                      <a:pPr algn="ctr" indent="0" marL="0">
+                        <a:buNone/>
+                      </a:pPr>
+                      <a:r>
+                        <a:rPr lang="en-US" sz="1100" b="1" dirty="0">
+                          <a:solidFill>
+                            <a:srgbClr val="3D4E60"/>
+                          </a:solidFill>
+                          <a:latin typeface="Meiryo" pitchFamily="34" charset="0"/>
+                          <a:ea typeface="Meiryo" pitchFamily="34" charset="-122"/>
+                          <a:cs typeface="Meiryo" pitchFamily="34" charset="-120"/>
+                        </a:rPr>
+                        <a:t>36.92億</a:t>
+                      </a:r>
+                      <a:endParaRPr lang="en-US" sz="1100" dirty="0">
+                        <a:latin typeface="Meiryo" charset="0"/>
+                        <a:ea typeface="Meiryo" charset="0"/>
+                        <a:cs typeface="Meiryo" charset="0"/>
+                      </a:endParaRPr>
+                    </a:p>
+                  </a:txBody>
+                  <a:tcPr marL="91440" marR="91440" marT="45720" marB="45720" anchor="ctr">
+                    <a:lnL w="6350" cap="flat" cmpd="sng" algn="ctr">
+                      <a:solidFill>
+                        <a:srgbClr val="D9E0E7"/>
+                      </a:solidFill>
+                      <a:prstDash val="solid"/>
+                      <a:round/>
+                      <a:headEnd type="none" w="med" len="med"/>
+                      <a:tailEnd type="none" w="med" len="med"/>
+                    </a:lnL>
+                    <a:lnR w="6350" cap="flat" cmpd="sng" algn="ctr">
+                      <a:solidFill>
+                        <a:srgbClr val="D9E0E7"/>
+                      </a:solidFill>
+                      <a:prstDash val="solid"/>
+                      <a:round/>
+                      <a:headEnd type="none" w="med" len="med"/>
+                      <a:tailEnd type="none" w="med" len="med"/>
+                    </a:lnR>
+                    <a:lnT w="6350" cap="flat" cmpd="sng" algn="ctr">
+                      <a:solidFill>
+                        <a:srgbClr val="D9E0E7"/>
+                      </a:solidFill>
+                      <a:prstDash val="solid"/>
+                      <a:round/>
+                      <a:headEnd type="none" w="med" len="med"/>
+                      <a:tailEnd type="none" w="med" len="med"/>
+                    </a:lnT>
+                    <a:lnB w="6350" cap="flat" cmpd="sng" algn="ctr">
+                      <a:solidFill>
+                        <a:srgbClr val="D9E0E7"/>
+                      </a:solidFill>
+                      <a:prstDash val="solid"/>
+                      <a:round/>
+                      <a:headEnd type="none" w="med" len="med"/>
+                      <a:tailEnd type="none" w="med" len="med"/>
+                    </a:lnB>
+                  </a:tcPr>
+                </a:tc>
+              </a:tr>
+              <a:tr h="365760">
+                <a:tc>
+                  <a:txBody>
+                    <a:bodyPr/>
+                    <a:lstStyle/>
+                    <a:p>
+                      <a:pPr indent="0" marL="0">
+                        <a:buNone/>
+                      </a:pPr>
+                      <a:r>
+                        <a:rPr lang="en-US" sz="1100" b="1" dirty="0">
+                          <a:solidFill>
+                            <a:srgbClr val="3D4E60"/>
+                          </a:solidFill>
+                          <a:latin typeface="Meiryo" pitchFamily="34" charset="0"/>
+                          <a:ea typeface="Meiryo" pitchFamily="34" charset="-122"/>
+                          <a:cs typeface="Meiryo" pitchFamily="34" charset="-120"/>
+                        </a:rPr>
+                        <a:t>自己資本比率（表面）</a:t>
+                      </a:r>
+                      <a:endParaRPr lang="en-US" sz="1100" dirty="0">
+                        <a:latin typeface="Meiryo" charset="0"/>
+                        <a:ea typeface="Meiryo" charset="0"/>
+                        <a:cs typeface="Meiryo" charset="0"/>
+                      </a:endParaRPr>
+                    </a:p>
+                  </a:txBody>
+                  <a:tcPr marL="91440" marR="91440" marT="45720" marB="45720" anchor="ctr">
+                    <a:lnL w="6350" cap="flat" cmpd="sng" algn="ctr">
+                      <a:solidFill>
+                        <a:srgbClr val="D9E0E7"/>
+                      </a:solidFill>
+                      <a:prstDash val="solid"/>
+                      <a:round/>
+                      <a:headEnd type="none" w="med" len="med"/>
+                      <a:tailEnd type="none" w="med" len="med"/>
+                    </a:lnL>
+                    <a:lnR w="6350" cap="flat" cmpd="sng" algn="ctr">
+                      <a:solidFill>
+                        <a:srgbClr val="D9E0E7"/>
+                      </a:solidFill>
+                      <a:prstDash val="solid"/>
+                      <a:round/>
+                      <a:headEnd type="none" w="med" len="med"/>
+                      <a:tailEnd type="none" w="med" len="med"/>
+                    </a:lnR>
+                    <a:lnT w="6350" cap="flat" cmpd="sng" algn="ctr">
+                      <a:solidFill>
+                        <a:srgbClr val="D9E0E7"/>
+                      </a:solidFill>
+                      <a:prstDash val="solid"/>
+                      <a:round/>
+                      <a:headEnd type="none" w="med" len="med"/>
+                      <a:tailEnd type="none" w="med" len="med"/>
+                    </a:lnT>
+                    <a:lnB w="6350" cap="flat" cmpd="sng" algn="ctr">
+                      <a:solidFill>
+                        <a:srgbClr val="D9E0E7"/>
+                      </a:solidFill>
+                      <a:prstDash val="solid"/>
+                      <a:round/>
+                      <a:headEnd type="none" w="med" len="med"/>
+                      <a:tailEnd type="none" w="med" len="med"/>
+                    </a:lnB>
+                  </a:tcPr>
+                </a:tc>
+                <a:tc>
+                  <a:txBody>
+                    <a:bodyPr/>
+                    <a:lstStyle/>
+                    <a:p>
+                      <a:pPr algn="ctr" indent="0" marL="0">
+                        <a:buNone/>
+                      </a:pPr>
+                      <a:r>
+                        <a:rPr lang="en-US" sz="1100" dirty="0">
+                          <a:solidFill>
+                            <a:srgbClr val="3D4E60"/>
+                          </a:solidFill>
+                          <a:latin typeface="Meiryo" pitchFamily="34" charset="0"/>
+                          <a:ea typeface="Meiryo" pitchFamily="34" charset="-122"/>
+                          <a:cs typeface="Meiryo" pitchFamily="34" charset="-120"/>
+                        </a:rPr>
+                        <a:t>38.6%</a:t>
+                      </a:r>
+                      <a:endParaRPr lang="en-US" sz="1100" dirty="0">
+                        <a:latin typeface="Meiryo" charset="0"/>
+                        <a:ea typeface="Meiryo" charset="0"/>
+                        <a:cs typeface="Meiryo" charset="0"/>
+                      </a:endParaRPr>
+                    </a:p>
+                  </a:txBody>
+                  <a:tcPr marL="91440" marR="91440" marT="45720" marB="45720" anchor="ctr">
+                    <a:lnL w="6350" cap="flat" cmpd="sng" algn="ctr">
+                      <a:solidFill>
+                        <a:srgbClr val="D9E0E7"/>
+                      </a:solidFill>
+                      <a:prstDash val="solid"/>
+                      <a:round/>
+                      <a:headEnd type="none" w="med" len="med"/>
+                      <a:tailEnd type="none" w="med" len="med"/>
+                    </a:lnL>
+                    <a:lnR w="6350" cap="flat" cmpd="sng" algn="ctr">
+                      <a:solidFill>
+                        <a:srgbClr val="D9E0E7"/>
+                      </a:solidFill>
+                      <a:prstDash val="solid"/>
+                      <a:round/>
+                      <a:headEnd type="none" w="med" len="med"/>
+                      <a:tailEnd type="none" w="med" len="med"/>
+                    </a:lnR>
+                    <a:lnT w="6350" cap="flat" cmpd="sng" algn="ctr">
+                      <a:solidFill>
+                        <a:srgbClr val="D9E0E7"/>
+                      </a:solidFill>
+                      <a:prstDash val="solid"/>
+                      <a:round/>
+                      <a:headEnd type="none" w="med" len="med"/>
+                      <a:tailEnd type="none" w="med" len="med"/>
+                    </a:lnT>
+                    <a:lnB w="6350" cap="flat" cmpd="sng" algn="ctr">
+                      <a:solidFill>
+                        <a:srgbClr val="D9E0E7"/>
+                      </a:solidFill>
+                      <a:prstDash val="solid"/>
+                      <a:round/>
+                      <a:headEnd type="none" w="med" len="med"/>
+                      <a:tailEnd type="none" w="med" len="med"/>
+                    </a:lnB>
+                  </a:tcPr>
+                </a:tc>
+                <a:tc>
+                  <a:txBody>
+                    <a:bodyPr/>
+                    <a:lstStyle/>
+                    <a:p>
+                      <a:pPr algn="ctr" indent="0" marL="0">
+                        <a:buNone/>
+                      </a:pPr>
+                      <a:r>
+                        <a:rPr lang="en-US" sz="1100" b="1" dirty="0">
+                          <a:solidFill>
+                            <a:srgbClr val="3D4E60"/>
+                          </a:solidFill>
+                          <a:latin typeface="Meiryo" pitchFamily="34" charset="0"/>
+                          <a:ea typeface="Meiryo" pitchFamily="34" charset="-122"/>
+                          <a:cs typeface="Meiryo" pitchFamily="34" charset="-120"/>
+                        </a:rPr>
+                        <a:t>48.6%</a:t>
+                      </a:r>
+                      <a:endParaRPr lang="en-US" sz="1100" dirty="0">
+                        <a:latin typeface="Meiryo" charset="0"/>
+                        <a:ea typeface="Meiryo" charset="0"/>
+                        <a:cs typeface="Meiryo" charset="0"/>
+                      </a:endParaRPr>
+                    </a:p>
+                  </a:txBody>
+                  <a:tcPr marL="91440" marR="91440" marT="45720" marB="45720" anchor="ctr">
+                    <a:lnL w="6350" cap="flat" cmpd="sng" algn="ctr">
+                      <a:solidFill>
+                        <a:srgbClr val="D9E0E7"/>
+                      </a:solidFill>
+                      <a:prstDash val="solid"/>
+                      <a:round/>
+                      <a:headEnd type="none" w="med" len="med"/>
+                      <a:tailEnd type="none" w="med" len="med"/>
+                    </a:lnL>
+                    <a:lnR w="6350" cap="flat" cmpd="sng" algn="ctr">
+                      <a:solidFill>
+                        <a:srgbClr val="D9E0E7"/>
+                      </a:solidFill>
+                      <a:prstDash val="solid"/>
+                      <a:round/>
+                      <a:headEnd type="none" w="med" len="med"/>
+                      <a:tailEnd type="none" w="med" len="med"/>
+                    </a:lnR>
+                    <a:lnT w="6350" cap="flat" cmpd="sng" algn="ctr">
+                      <a:solidFill>
+                        <a:srgbClr val="D9E0E7"/>
+                      </a:solidFill>
+                      <a:prstDash val="solid"/>
+                      <a:round/>
+                      <a:headEnd type="none" w="med" len="med"/>
+                      <a:tailEnd type="none" w="med" len="med"/>
+                    </a:lnT>
+                    <a:lnB w="6350" cap="flat" cmpd="sng" algn="ctr">
+                      <a:solidFill>
+                        <a:srgbClr val="D9E0E7"/>
+                      </a:solidFill>
+                      <a:prstDash val="solid"/>
+                      <a:round/>
+                      <a:headEnd type="none" w="med" len="med"/>
+                      <a:tailEnd type="none" w="med" len="med"/>
+                    </a:lnB>
+                  </a:tcPr>
+                </a:tc>
+              </a:tr>
+              <a:tr h="365760">
+                <a:tc>
+                  <a:txBody>
+                    <a:bodyPr/>
+                    <a:lstStyle/>
+                    <a:p>
+                      <a:pPr indent="0" marL="0">
+                        <a:buNone/>
+                      </a:pPr>
+                      <a:r>
+                        <a:rPr lang="en-US" sz="1100" b="1" dirty="0">
+                          <a:solidFill>
+                            <a:srgbClr val="3D4E60"/>
+                          </a:solidFill>
+                          <a:latin typeface="Meiryo" pitchFamily="34" charset="0"/>
+                          <a:ea typeface="Meiryo" pitchFamily="34" charset="-122"/>
+                          <a:cs typeface="Meiryo" pitchFamily="34" charset="-120"/>
+                        </a:rPr>
+                        <a:t>のれん控除後の自己資本</a:t>
+                      </a:r>
+                      <a:endParaRPr lang="en-US" sz="1100" dirty="0">
+                        <a:latin typeface="Meiryo" charset="0"/>
+                        <a:ea typeface="Meiryo" charset="0"/>
+                        <a:cs typeface="Meiryo" charset="0"/>
+                      </a:endParaRPr>
+                    </a:p>
+                  </a:txBody>
+                  <a:tcPr marL="91440" marR="91440" marT="45720" marB="45720" anchor="ctr">
+                    <a:lnL w="6350" cap="flat" cmpd="sng" algn="ctr">
+                      <a:solidFill>
+                        <a:srgbClr val="D9E0E7"/>
+                      </a:solidFill>
+                      <a:prstDash val="solid"/>
+                      <a:round/>
+                      <a:headEnd type="none" w="med" len="med"/>
+                      <a:tailEnd type="none" w="med" len="med"/>
+                    </a:lnL>
+                    <a:lnR w="6350" cap="flat" cmpd="sng" algn="ctr">
+                      <a:solidFill>
+                        <a:srgbClr val="D9E0E7"/>
+                      </a:solidFill>
+                      <a:prstDash val="solid"/>
+                      <a:round/>
+                      <a:headEnd type="none" w="med" len="med"/>
+                      <a:tailEnd type="none" w="med" len="med"/>
+                    </a:lnR>
+                    <a:lnT w="6350" cap="flat" cmpd="sng" algn="ctr">
+                      <a:solidFill>
+                        <a:srgbClr val="D9E0E7"/>
+                      </a:solidFill>
+                      <a:prstDash val="solid"/>
+                      <a:round/>
+                      <a:headEnd type="none" w="med" len="med"/>
+                      <a:tailEnd type="none" w="med" len="med"/>
+                    </a:lnT>
+                    <a:lnB w="6350" cap="flat" cmpd="sng" algn="ctr">
+                      <a:solidFill>
+                        <a:srgbClr val="D9E0E7"/>
+                      </a:solidFill>
+                      <a:prstDash val="solid"/>
+                      <a:round/>
+                      <a:headEnd type="none" w="med" len="med"/>
+                      <a:tailEnd type="none" w="med" len="med"/>
+                    </a:lnB>
+                    <a:solidFill>
+                      <a:srgbClr val="F3E7EA"/>
+                    </a:solidFill>
+                  </a:tcPr>
+                </a:tc>
+                <a:tc>
+                  <a:txBody>
+                    <a:bodyPr/>
+                    <a:lstStyle/>
+                    <a:p>
+                      <a:pPr algn="ctr" indent="0" marL="0">
+                        <a:buNone/>
+                      </a:pPr>
+                      <a:r>
+                        <a:rPr lang="en-US" sz="1100" b="1" dirty="0">
+                          <a:solidFill>
+                            <a:srgbClr val="8A2E26"/>
+                          </a:solidFill>
+                          <a:latin typeface="Meiryo" pitchFamily="34" charset="0"/>
+                          <a:ea typeface="Meiryo" pitchFamily="34" charset="-122"/>
+                          <a:cs typeface="Meiryo" pitchFamily="34" charset="-120"/>
+                        </a:rPr>
+                        <a:t>5.98億</a:t>
+                      </a:r>
+                      <a:endParaRPr lang="en-US" sz="1100" dirty="0">
+                        <a:latin typeface="Meiryo" charset="0"/>
+                        <a:ea typeface="Meiryo" charset="0"/>
+                        <a:cs typeface="Meiryo" charset="0"/>
+                      </a:endParaRPr>
+                    </a:p>
+                  </a:txBody>
+                  <a:tcPr marL="91440" marR="91440" marT="45720" marB="45720" anchor="ctr">
+                    <a:lnL w="6350" cap="flat" cmpd="sng" algn="ctr">
+                      <a:solidFill>
+                        <a:srgbClr val="D9E0E7"/>
+                      </a:solidFill>
+                      <a:prstDash val="solid"/>
+                      <a:round/>
+                      <a:headEnd type="none" w="med" len="med"/>
+                      <a:tailEnd type="none" w="med" len="med"/>
+                    </a:lnL>
+                    <a:lnR w="6350" cap="flat" cmpd="sng" algn="ctr">
+                      <a:solidFill>
+                        <a:srgbClr val="D9E0E7"/>
+                      </a:solidFill>
+                      <a:prstDash val="solid"/>
+                      <a:round/>
+                      <a:headEnd type="none" w="med" len="med"/>
+                      <a:tailEnd type="none" w="med" len="med"/>
+                    </a:lnR>
+                    <a:lnT w="6350" cap="flat" cmpd="sng" algn="ctr">
+                      <a:solidFill>
+                        <a:srgbClr val="D9E0E7"/>
+                      </a:solidFill>
+                      <a:prstDash val="solid"/>
+                      <a:round/>
+                      <a:headEnd type="none" w="med" len="med"/>
+                      <a:tailEnd type="none" w="med" len="med"/>
+                    </a:lnT>
+                    <a:lnB w="6350" cap="flat" cmpd="sng" algn="ctr">
+                      <a:solidFill>
+                        <a:srgbClr val="D9E0E7"/>
+                      </a:solidFill>
+                      <a:prstDash val="solid"/>
+                      <a:round/>
+                      <a:headEnd type="none" w="med" len="med"/>
+                      <a:tailEnd type="none" w="med" len="med"/>
+                    </a:lnB>
+                    <a:solidFill>
+                      <a:srgbClr val="F3E7EA"/>
+                    </a:solidFill>
+                  </a:tcPr>
+                </a:tc>
+                <a:tc>
+                  <a:txBody>
+                    <a:bodyPr/>
+                    <a:lstStyle/>
+                    <a:p>
+                      <a:pPr algn="ctr" indent="0" marL="0">
+                        <a:buNone/>
+                      </a:pPr>
+                      <a:r>
+                        <a:rPr lang="en-US" sz="1100" b="1" dirty="0">
+                          <a:solidFill>
+                            <a:srgbClr val="2C6A4E"/>
+                          </a:solidFill>
+                          <a:latin typeface="Meiryo" pitchFamily="34" charset="0"/>
+                          <a:ea typeface="Meiryo" pitchFamily="34" charset="-122"/>
+                          <a:cs typeface="Meiryo" pitchFamily="34" charset="-120"/>
+                        </a:rPr>
+                        <a:t>13.97億</a:t>
+                      </a:r>
+                      <a:endParaRPr lang="en-US" sz="1100" dirty="0">
+                        <a:latin typeface="Meiryo" charset="0"/>
+                        <a:ea typeface="Meiryo" charset="0"/>
+                        <a:cs typeface="Meiryo" charset="0"/>
+                      </a:endParaRPr>
+                    </a:p>
+                  </a:txBody>
+                  <a:tcPr marL="91440" marR="91440" marT="45720" marB="45720" anchor="ctr">
+                    <a:lnL w="6350" cap="flat" cmpd="sng" algn="ctr">
+                      <a:solidFill>
+                        <a:srgbClr val="D9E0E7"/>
+                      </a:solidFill>
+                      <a:prstDash val="solid"/>
+                      <a:round/>
+                      <a:headEnd type="none" w="med" len="med"/>
+                      <a:tailEnd type="none" w="med" len="med"/>
+                    </a:lnL>
+                    <a:lnR w="6350" cap="flat" cmpd="sng" algn="ctr">
+                      <a:solidFill>
+                        <a:srgbClr val="D9E0E7"/>
+                      </a:solidFill>
+                      <a:prstDash val="solid"/>
+                      <a:round/>
+                      <a:headEnd type="none" w="med" len="med"/>
+                      <a:tailEnd type="none" w="med" len="med"/>
+                    </a:lnR>
+                    <a:lnT w="6350" cap="flat" cmpd="sng" algn="ctr">
+                      <a:solidFill>
+                        <a:srgbClr val="D9E0E7"/>
+                      </a:solidFill>
+                      <a:prstDash val="solid"/>
+                      <a:round/>
+                      <a:headEnd type="none" w="med" len="med"/>
+                      <a:tailEnd type="none" w="med" len="med"/>
+                    </a:lnT>
+                    <a:lnB w="6350" cap="flat" cmpd="sng" algn="ctr">
+                      <a:solidFill>
+                        <a:srgbClr val="D9E0E7"/>
+                      </a:solidFill>
+                      <a:prstDash val="solid"/>
+                      <a:round/>
+                      <a:headEnd type="none" w="med" len="med"/>
+                      <a:tailEnd type="none" w="med" len="med"/>
+                    </a:lnB>
+                    <a:solidFill>
+                      <a:srgbClr val="F3E7EA"/>
+                    </a:solidFill>
+                  </a:tcPr>
+                </a:tc>
+              </a:tr>
+              <a:tr h="365760">
+                <a:tc>
+                  <a:txBody>
+                    <a:bodyPr/>
+                    <a:lstStyle/>
+                    <a:p>
+                      <a:pPr indent="0" marL="0">
+                        <a:buNone/>
+                      </a:pPr>
+                      <a:r>
+                        <a:rPr lang="en-US" sz="1100" b="1" dirty="0">
+                          <a:solidFill>
+                            <a:srgbClr val="3D4E60"/>
+                          </a:solidFill>
+                          <a:latin typeface="Meiryo" pitchFamily="34" charset="0"/>
+                          <a:ea typeface="Meiryo" pitchFamily="34" charset="-122"/>
+                          <a:cs typeface="Meiryo" pitchFamily="34" charset="-120"/>
+                        </a:rPr>
+                        <a:t>のれん控除後の比率</a:t>
+                      </a:r>
+                      <a:endParaRPr lang="en-US" sz="1100" dirty="0">
+                        <a:latin typeface="Meiryo" charset="0"/>
+                        <a:ea typeface="Meiryo" charset="0"/>
+                        <a:cs typeface="Meiryo" charset="0"/>
+                      </a:endParaRPr>
+                    </a:p>
+                  </a:txBody>
+                  <a:tcPr marL="91440" marR="91440" marT="45720" marB="45720" anchor="ctr">
+                    <a:lnL w="6350" cap="flat" cmpd="sng" algn="ctr">
+                      <a:solidFill>
+                        <a:srgbClr val="D9E0E7"/>
+                      </a:solidFill>
+                      <a:prstDash val="solid"/>
+                      <a:round/>
+                      <a:headEnd type="none" w="med" len="med"/>
+                      <a:tailEnd type="none" w="med" len="med"/>
+                    </a:lnL>
+                    <a:lnR w="6350" cap="flat" cmpd="sng" algn="ctr">
+                      <a:solidFill>
+                        <a:srgbClr val="D9E0E7"/>
+                      </a:solidFill>
+                      <a:prstDash val="solid"/>
+                      <a:round/>
+                      <a:headEnd type="none" w="med" len="med"/>
+                      <a:tailEnd type="none" w="med" len="med"/>
+                    </a:lnR>
+                    <a:lnT w="6350" cap="flat" cmpd="sng" algn="ctr">
+                      <a:solidFill>
+                        <a:srgbClr val="D9E0E7"/>
+                      </a:solidFill>
+                      <a:prstDash val="solid"/>
+                      <a:round/>
+                      <a:headEnd type="none" w="med" len="med"/>
+                      <a:tailEnd type="none" w="med" len="med"/>
+                    </a:lnT>
+                    <a:lnB w="6350" cap="flat" cmpd="sng" algn="ctr">
+                      <a:solidFill>
+                        <a:srgbClr val="D9E0E7"/>
+                      </a:solidFill>
+                      <a:prstDash val="solid"/>
+                      <a:round/>
+                      <a:headEnd type="none" w="med" len="med"/>
+                      <a:tailEnd type="none" w="med" len="med"/>
+                    </a:lnB>
+                    <a:solidFill>
+                      <a:srgbClr val="F3E7EA"/>
+                    </a:solidFill>
+                  </a:tcPr>
+                </a:tc>
+                <a:tc>
+                  <a:txBody>
+                    <a:bodyPr/>
+                    <a:lstStyle/>
+                    <a:p>
+                      <a:pPr algn="ctr" indent="0" marL="0">
+                        <a:buNone/>
+                      </a:pPr>
+                      <a:r>
+                        <a:rPr lang="en-US" sz="1100" b="1" dirty="0">
+                          <a:solidFill>
+                            <a:srgbClr val="8A2E26"/>
+                          </a:solidFill>
+                          <a:latin typeface="Meiryo" pitchFamily="34" charset="0"/>
+                          <a:ea typeface="Meiryo" pitchFamily="34" charset="-122"/>
+                          <a:cs typeface="Meiryo" pitchFamily="34" charset="-120"/>
+                        </a:rPr>
+                        <a:t>11.8%</a:t>
+                      </a:r>
+                      <a:endParaRPr lang="en-US" sz="1100" dirty="0">
+                        <a:latin typeface="Meiryo" charset="0"/>
+                        <a:ea typeface="Meiryo" charset="0"/>
+                        <a:cs typeface="Meiryo" charset="0"/>
+                      </a:endParaRPr>
+                    </a:p>
+                  </a:txBody>
+                  <a:tcPr marL="91440" marR="91440" marT="45720" marB="45720" anchor="ctr">
+                    <a:lnL w="6350" cap="flat" cmpd="sng" algn="ctr">
+                      <a:solidFill>
+                        <a:srgbClr val="D9E0E7"/>
+                      </a:solidFill>
+                      <a:prstDash val="solid"/>
+                      <a:round/>
+                      <a:headEnd type="none" w="med" len="med"/>
+                      <a:tailEnd type="none" w="med" len="med"/>
+                    </a:lnL>
+                    <a:lnR w="6350" cap="flat" cmpd="sng" algn="ctr">
+                      <a:solidFill>
+                        <a:srgbClr val="D9E0E7"/>
+                      </a:solidFill>
+                      <a:prstDash val="solid"/>
+                      <a:round/>
+                      <a:headEnd type="none" w="med" len="med"/>
+                      <a:tailEnd type="none" w="med" len="med"/>
+                    </a:lnR>
+                    <a:lnT w="6350" cap="flat" cmpd="sng" algn="ctr">
+                      <a:solidFill>
+                        <a:srgbClr val="D9E0E7"/>
+                      </a:solidFill>
+                      <a:prstDash val="solid"/>
+                      <a:round/>
+                      <a:headEnd type="none" w="med" len="med"/>
+                      <a:tailEnd type="none" w="med" len="med"/>
+                    </a:lnT>
+                    <a:lnB w="6350" cap="flat" cmpd="sng" algn="ctr">
+                      <a:solidFill>
+                        <a:srgbClr val="D9E0E7"/>
+                      </a:solidFill>
+                      <a:prstDash val="solid"/>
+                      <a:round/>
+                      <a:headEnd type="none" w="med" len="med"/>
+                      <a:tailEnd type="none" w="med" len="med"/>
+                    </a:lnB>
+                    <a:solidFill>
+                      <a:srgbClr val="F3E7EA"/>
+                    </a:solidFill>
+                  </a:tcPr>
+                </a:tc>
+                <a:tc>
+                  <a:txBody>
+                    <a:bodyPr/>
+                    <a:lstStyle/>
+                    <a:p>
+                      <a:pPr algn="ctr" indent="0" marL="0">
+                        <a:buNone/>
+                      </a:pPr>
+                      <a:r>
+                        <a:rPr lang="en-US" sz="1100" b="1" dirty="0">
+                          <a:solidFill>
+                            <a:srgbClr val="2C6A4E"/>
+                          </a:solidFill>
+                          <a:latin typeface="Meiryo" pitchFamily="34" charset="0"/>
+                          <a:ea typeface="Meiryo" pitchFamily="34" charset="-122"/>
+                          <a:cs typeface="Meiryo" pitchFamily="34" charset="-120"/>
+                        </a:rPr>
+                        <a:t>26.3%</a:t>
+                      </a:r>
+                      <a:endParaRPr lang="en-US" sz="1100" dirty="0">
+                        <a:latin typeface="Meiryo" charset="0"/>
+                        <a:ea typeface="Meiryo" charset="0"/>
+                        <a:cs typeface="Meiryo" charset="0"/>
+                      </a:endParaRPr>
+                    </a:p>
+                  </a:txBody>
+                  <a:tcPr marL="91440" marR="91440" marT="45720" marB="45720" anchor="ctr">
+                    <a:lnL w="6350" cap="flat" cmpd="sng" algn="ctr">
+                      <a:solidFill>
+                        <a:srgbClr val="D9E0E7"/>
+                      </a:solidFill>
+                      <a:prstDash val="solid"/>
+                      <a:round/>
+                      <a:headEnd type="none" w="med" len="med"/>
+                      <a:tailEnd type="none" w="med" len="med"/>
+                    </a:lnL>
+                    <a:lnR w="6350" cap="flat" cmpd="sng" algn="ctr">
+                      <a:solidFill>
+                        <a:srgbClr val="D9E0E7"/>
+                      </a:solidFill>
+                      <a:prstDash val="solid"/>
+                      <a:round/>
+                      <a:headEnd type="none" w="med" len="med"/>
+                      <a:tailEnd type="none" w="med" len="med"/>
+                    </a:lnR>
+                    <a:lnT w="6350" cap="flat" cmpd="sng" algn="ctr">
+                      <a:solidFill>
+                        <a:srgbClr val="D9E0E7"/>
+                      </a:solidFill>
+                      <a:prstDash val="solid"/>
+                      <a:round/>
+                      <a:headEnd type="none" w="med" len="med"/>
+                      <a:tailEnd type="none" w="med" len="med"/>
+                    </a:lnT>
+                    <a:lnB w="6350" cap="flat" cmpd="sng" algn="ctr">
+                      <a:solidFill>
+                        <a:srgbClr val="D9E0E7"/>
+                      </a:solidFill>
+                      <a:prstDash val="solid"/>
+                      <a:round/>
+                      <a:headEnd type="none" w="med" len="med"/>
+                      <a:tailEnd type="none" w="med" len="med"/>
+                    </a:lnB>
+                    <a:solidFill>
+                      <a:srgbClr val="F3E7EA"/>
+                    </a:solidFill>
+                  </a:tcPr>
+                </a:tc>
+              </a:tr>
+              <a:tr h="365760">
+                <a:tc>
+                  <a:txBody>
+                    <a:bodyPr/>
+                    <a:lstStyle/>
+                    <a:p>
+                      <a:pPr indent="0" marL="0">
+                        <a:buNone/>
+                      </a:pPr>
+                      <a:r>
+                        <a:rPr lang="en-US" sz="1100" b="1" dirty="0">
+                          <a:solidFill>
+                            <a:srgbClr val="3D4E60"/>
+                          </a:solidFill>
+                          <a:latin typeface="Meiryo" pitchFamily="34" charset="0"/>
+                          <a:ea typeface="Meiryo" pitchFamily="34" charset="-122"/>
+                          <a:cs typeface="Meiryo" pitchFamily="34" charset="-120"/>
+                        </a:rPr>
+                        <a:t>合算 営業利益</a:t>
+                      </a:r>
+                      <a:endParaRPr lang="en-US" sz="1100" dirty="0">
+                        <a:latin typeface="Meiryo" charset="0"/>
+                        <a:ea typeface="Meiryo" charset="0"/>
+                        <a:cs typeface="Meiryo" charset="0"/>
+                      </a:endParaRPr>
+                    </a:p>
+                  </a:txBody>
+                  <a:tcPr marL="91440" marR="91440" marT="45720" marB="45720" anchor="ctr">
+                    <a:lnL w="6350" cap="flat" cmpd="sng" algn="ctr">
+                      <a:solidFill>
+                        <a:srgbClr val="D9E0E7"/>
+                      </a:solidFill>
+                      <a:prstDash val="solid"/>
+                      <a:round/>
+                      <a:headEnd type="none" w="med" len="med"/>
+                      <a:tailEnd type="none" w="med" len="med"/>
+                    </a:lnL>
+                    <a:lnR w="6350" cap="flat" cmpd="sng" algn="ctr">
+                      <a:solidFill>
+                        <a:srgbClr val="D9E0E7"/>
+                      </a:solidFill>
+                      <a:prstDash val="solid"/>
+                      <a:round/>
+                      <a:headEnd type="none" w="med" len="med"/>
+                      <a:tailEnd type="none" w="med" len="med"/>
+                    </a:lnR>
+                    <a:lnT w="6350" cap="flat" cmpd="sng" algn="ctr">
+                      <a:solidFill>
+                        <a:srgbClr val="D9E0E7"/>
+                      </a:solidFill>
+                      <a:prstDash val="solid"/>
+                      <a:round/>
+                      <a:headEnd type="none" w="med" len="med"/>
+                      <a:tailEnd type="none" w="med" len="med"/>
+                    </a:lnT>
+                    <a:lnB w="6350" cap="flat" cmpd="sng" algn="ctr">
+                      <a:solidFill>
+                        <a:srgbClr val="D9E0E7"/>
+                      </a:solidFill>
+                      <a:prstDash val="solid"/>
+                      <a:round/>
+                      <a:headEnd type="none" w="med" len="med"/>
+                      <a:tailEnd type="none" w="med" len="med"/>
+                    </a:lnB>
+                  </a:tcPr>
+                </a:tc>
+                <a:tc>
+                  <a:txBody>
+                    <a:bodyPr/>
+                    <a:lstStyle/>
+                    <a:p>
+                      <a:pPr algn="ctr" indent="0" marL="0">
+                        <a:buNone/>
+                      </a:pPr>
+                      <a:r>
+                        <a:rPr lang="en-US" sz="1100" dirty="0">
+                          <a:solidFill>
+                            <a:srgbClr val="3D4E60"/>
+                          </a:solidFill>
+                          <a:latin typeface="Meiryo" pitchFamily="34" charset="0"/>
+                          <a:ea typeface="Meiryo" pitchFamily="34" charset="-122"/>
+                          <a:cs typeface="Meiryo" pitchFamily="34" charset="-120"/>
+                        </a:rPr>
+                        <a:t>4.90億</a:t>
+                      </a:r>
+                      <a:endParaRPr lang="en-US" sz="1100" dirty="0">
+                        <a:latin typeface="Meiryo" charset="0"/>
+                        <a:ea typeface="Meiryo" charset="0"/>
+                        <a:cs typeface="Meiryo" charset="0"/>
+                      </a:endParaRPr>
+                    </a:p>
+                  </a:txBody>
+                  <a:tcPr marL="91440" marR="91440" marT="45720" marB="45720" anchor="ctr">
+                    <a:lnL w="6350" cap="flat" cmpd="sng" algn="ctr">
+                      <a:solidFill>
+                        <a:srgbClr val="D9E0E7"/>
+                      </a:solidFill>
+                      <a:prstDash val="solid"/>
+                      <a:round/>
+                      <a:headEnd type="none" w="med" len="med"/>
+                      <a:tailEnd type="none" w="med" len="med"/>
+                    </a:lnL>
+                    <a:lnR w="6350" cap="flat" cmpd="sng" algn="ctr">
+                      <a:solidFill>
+                        <a:srgbClr val="D9E0E7"/>
+                      </a:solidFill>
+                      <a:prstDash val="solid"/>
+                      <a:round/>
+                      <a:headEnd type="none" w="med" len="med"/>
+                      <a:tailEnd type="none" w="med" len="med"/>
+                    </a:lnR>
+                    <a:lnT w="6350" cap="flat" cmpd="sng" algn="ctr">
+                      <a:solidFill>
+                        <a:srgbClr val="D9E0E7"/>
+                      </a:solidFill>
+                      <a:prstDash val="solid"/>
+                      <a:round/>
+                      <a:headEnd type="none" w="med" len="med"/>
+                      <a:tailEnd type="none" w="med" len="med"/>
+                    </a:lnT>
+                    <a:lnB w="6350" cap="flat" cmpd="sng" algn="ctr">
+                      <a:solidFill>
+                        <a:srgbClr val="D9E0E7"/>
+                      </a:solidFill>
+                      <a:prstDash val="solid"/>
+                      <a:round/>
+                      <a:headEnd type="none" w="med" len="med"/>
+                      <a:tailEnd type="none" w="med" len="med"/>
+                    </a:lnB>
+                  </a:tcPr>
+                </a:tc>
+                <a:tc>
+                  <a:txBody>
+                    <a:bodyPr/>
+                    <a:lstStyle/>
+                    <a:p>
+                      <a:pPr algn="ctr" indent="0" marL="0">
+                        <a:buNone/>
+                      </a:pPr>
+                      <a:r>
+                        <a:rPr lang="en-US" sz="1100" dirty="0">
+                          <a:solidFill>
+                            <a:srgbClr val="3D4E60"/>
+                          </a:solidFill>
+                          <a:latin typeface="Meiryo" pitchFamily="34" charset="0"/>
+                          <a:ea typeface="Meiryo" pitchFamily="34" charset="-122"/>
+                          <a:cs typeface="Meiryo" pitchFamily="34" charset="-120"/>
+                        </a:rPr>
+                        <a:t>4.90億</a:t>
+                      </a:r>
+                      <a:endParaRPr lang="en-US" sz="1100" dirty="0">
+                        <a:latin typeface="Meiryo" charset="0"/>
+                        <a:ea typeface="Meiryo" charset="0"/>
+                        <a:cs typeface="Meiryo" charset="0"/>
+                      </a:endParaRPr>
+                    </a:p>
+                  </a:txBody>
+                  <a:tcPr marL="91440" marR="91440" marT="45720" marB="45720" anchor="ctr">
+                    <a:lnL w="6350" cap="flat" cmpd="sng" algn="ctr">
+                      <a:solidFill>
+                        <a:srgbClr val="D9E0E7"/>
+                      </a:solidFill>
+                      <a:prstDash val="solid"/>
+                      <a:round/>
+                      <a:headEnd type="none" w="med" len="med"/>
+                      <a:tailEnd type="none" w="med" len="med"/>
+                    </a:lnL>
+                    <a:lnR w="6350" cap="flat" cmpd="sng" algn="ctr">
+                      <a:solidFill>
+                        <a:srgbClr val="D9E0E7"/>
+                      </a:solidFill>
+                      <a:prstDash val="solid"/>
+                      <a:round/>
+                      <a:headEnd type="none" w="med" len="med"/>
+                      <a:tailEnd type="none" w="med" len="med"/>
+                    </a:lnR>
+                    <a:lnT w="6350" cap="flat" cmpd="sng" algn="ctr">
+                      <a:solidFill>
+                        <a:srgbClr val="D9E0E7"/>
+                      </a:solidFill>
+                      <a:prstDash val="solid"/>
+                      <a:round/>
+                      <a:headEnd type="none" w="med" len="med"/>
+                      <a:tailEnd type="none" w="med" len="med"/>
+                    </a:lnT>
+                    <a:lnB w="6350" cap="flat" cmpd="sng" algn="ctr">
+                      <a:solidFill>
+                        <a:srgbClr val="D9E0E7"/>
+                      </a:solidFill>
+                      <a:prstDash val="solid"/>
+                      <a:round/>
+                      <a:headEnd type="none" w="med" len="med"/>
+                      <a:tailEnd type="none" w="med" len="med"/>
+                    </a:lnB>
+                  </a:tcPr>
+                </a:tc>
+              </a:tr>
+              <a:tr h="365760">
+                <a:tc>
+                  <a:txBody>
+                    <a:bodyPr/>
+                    <a:lstStyle/>
+                    <a:p>
+                      <a:pPr indent="0" marL="0">
+                        <a:buNone/>
+                      </a:pPr>
+                      <a:r>
+                        <a:rPr lang="en-US" sz="1100" b="1" dirty="0">
+                          <a:solidFill>
+                            <a:srgbClr val="3D4E60"/>
+                          </a:solidFill>
+                          <a:latin typeface="Meiryo" pitchFamily="34" charset="0"/>
+                          <a:ea typeface="Meiryo" pitchFamily="34" charset="-122"/>
+                          <a:cs typeface="Meiryo" pitchFamily="34" charset="-120"/>
+                        </a:rPr>
+                        <a:t>のれん償却後（20年）</a:t>
+                      </a:r>
+                      <a:endParaRPr lang="en-US" sz="1100" dirty="0">
+                        <a:latin typeface="Meiryo" charset="0"/>
+                        <a:ea typeface="Meiryo" charset="0"/>
+                        <a:cs typeface="Meiryo" charset="0"/>
+                      </a:endParaRPr>
+                    </a:p>
+                  </a:txBody>
+                  <a:tcPr marL="91440" marR="91440" marT="45720" marB="45720" anchor="ctr">
+                    <a:lnL w="6350" cap="flat" cmpd="sng" algn="ctr">
+                      <a:solidFill>
+                        <a:srgbClr val="D9E0E7"/>
+                      </a:solidFill>
+                      <a:prstDash val="solid"/>
+                      <a:round/>
+                      <a:headEnd type="none" w="med" len="med"/>
+                      <a:tailEnd type="none" w="med" len="med"/>
+                    </a:lnL>
+                    <a:lnR w="6350" cap="flat" cmpd="sng" algn="ctr">
+                      <a:solidFill>
+                        <a:srgbClr val="D9E0E7"/>
+                      </a:solidFill>
+                      <a:prstDash val="solid"/>
+                      <a:round/>
+                      <a:headEnd type="none" w="med" len="med"/>
+                      <a:tailEnd type="none" w="med" len="med"/>
+                    </a:lnR>
+                    <a:lnT w="6350" cap="flat" cmpd="sng" algn="ctr">
+                      <a:solidFill>
+                        <a:srgbClr val="D9E0E7"/>
+                      </a:solidFill>
+                      <a:prstDash val="solid"/>
+                      <a:round/>
+                      <a:headEnd type="none" w="med" len="med"/>
+                      <a:tailEnd type="none" w="med" len="med"/>
+                    </a:lnT>
+                    <a:lnB w="6350" cap="flat" cmpd="sng" algn="ctr">
+                      <a:solidFill>
+                        <a:srgbClr val="D9E0E7"/>
+                      </a:solidFill>
+                      <a:prstDash val="solid"/>
+                      <a:round/>
+                      <a:headEnd type="none" w="med" len="med"/>
+                      <a:tailEnd type="none" w="med" len="med"/>
+                    </a:lnB>
+                  </a:tcPr>
+                </a:tc>
+                <a:tc>
+                  <a:txBody>
+                    <a:bodyPr/>
+                    <a:lstStyle/>
+                    <a:p>
+                      <a:pPr algn="ctr" indent="0" marL="0">
+                        <a:buNone/>
+                      </a:pPr>
+                      <a:r>
+                        <a:rPr lang="en-US" sz="1100" dirty="0">
+                          <a:solidFill>
+                            <a:srgbClr val="3D4E60"/>
+                          </a:solidFill>
+                          <a:latin typeface="Meiryo" pitchFamily="34" charset="0"/>
+                          <a:ea typeface="Meiryo" pitchFamily="34" charset="-122"/>
+                          <a:cs typeface="Meiryo" pitchFamily="34" charset="-120"/>
+                        </a:rPr>
+                        <a:t>3.80億（△23%）</a:t>
+                      </a:r>
+                      <a:endParaRPr lang="en-US" sz="1100" dirty="0">
+                        <a:latin typeface="Meiryo" charset="0"/>
+                        <a:ea typeface="Meiryo" charset="0"/>
+                        <a:cs typeface="Meiryo" charset="0"/>
+                      </a:endParaRPr>
+                    </a:p>
+                  </a:txBody>
+                  <a:tcPr marL="91440" marR="91440" marT="45720" marB="45720" anchor="ctr">
+                    <a:lnL w="6350" cap="flat" cmpd="sng" algn="ctr">
+                      <a:solidFill>
+                        <a:srgbClr val="D9E0E7"/>
+                      </a:solidFill>
+                      <a:prstDash val="solid"/>
+                      <a:round/>
+                      <a:headEnd type="none" w="med" len="med"/>
+                      <a:tailEnd type="none" w="med" len="med"/>
+                    </a:lnL>
+                    <a:lnR w="6350" cap="flat" cmpd="sng" algn="ctr">
+                      <a:solidFill>
+                        <a:srgbClr val="D9E0E7"/>
+                      </a:solidFill>
+                      <a:prstDash val="solid"/>
+                      <a:round/>
+                      <a:headEnd type="none" w="med" len="med"/>
+                      <a:tailEnd type="none" w="med" len="med"/>
+                    </a:lnR>
+                    <a:lnT w="6350" cap="flat" cmpd="sng" algn="ctr">
+                      <a:solidFill>
+                        <a:srgbClr val="D9E0E7"/>
+                      </a:solidFill>
+                      <a:prstDash val="solid"/>
+                      <a:round/>
+                      <a:headEnd type="none" w="med" len="med"/>
+                      <a:tailEnd type="none" w="med" len="med"/>
+                    </a:lnT>
+                    <a:lnB w="6350" cap="flat" cmpd="sng" algn="ctr">
+                      <a:solidFill>
+                        <a:srgbClr val="D9E0E7"/>
+                      </a:solidFill>
+                      <a:prstDash val="solid"/>
+                      <a:round/>
+                      <a:headEnd type="none" w="med" len="med"/>
+                      <a:tailEnd type="none" w="med" len="med"/>
+                    </a:lnB>
+                  </a:tcPr>
+                </a:tc>
+                <a:tc>
+                  <a:txBody>
+                    <a:bodyPr/>
+                    <a:lstStyle/>
+                    <a:p>
+                      <a:pPr algn="ctr" indent="0" marL="0">
+                        <a:buNone/>
+                      </a:pPr>
+                      <a:r>
+                        <a:rPr lang="en-US" sz="1100" dirty="0">
+                          <a:solidFill>
+                            <a:srgbClr val="3D4E60"/>
+                          </a:solidFill>
+                          <a:latin typeface="Meiryo" pitchFamily="34" charset="0"/>
+                          <a:ea typeface="Meiryo" pitchFamily="34" charset="-122"/>
+                          <a:cs typeface="Meiryo" pitchFamily="34" charset="-120"/>
+                        </a:rPr>
+                        <a:t>3.75億（△23%）</a:t>
+                      </a:r>
+                      <a:endParaRPr lang="en-US" sz="1100" dirty="0">
+                        <a:latin typeface="Meiryo" charset="0"/>
+                        <a:ea typeface="Meiryo" charset="0"/>
+                        <a:cs typeface="Meiryo" charset="0"/>
+                      </a:endParaRPr>
+                    </a:p>
+                  </a:txBody>
+                  <a:tcPr marL="91440" marR="91440" marT="45720" marB="45720" anchor="ctr">
+                    <a:lnL w="6350" cap="flat" cmpd="sng" algn="ctr">
+                      <a:solidFill>
+                        <a:srgbClr val="D9E0E7"/>
+                      </a:solidFill>
+                      <a:prstDash val="solid"/>
+                      <a:round/>
+                      <a:headEnd type="none" w="med" len="med"/>
+                      <a:tailEnd type="none" w="med" len="med"/>
+                    </a:lnL>
+                    <a:lnR w="6350" cap="flat" cmpd="sng" algn="ctr">
+                      <a:solidFill>
+                        <a:srgbClr val="D9E0E7"/>
+                      </a:solidFill>
+                      <a:prstDash val="solid"/>
+                      <a:round/>
+                      <a:headEnd type="none" w="med" len="med"/>
+                      <a:tailEnd type="none" w="med" len="med"/>
+                    </a:lnR>
+                    <a:lnT w="6350" cap="flat" cmpd="sng" algn="ctr">
+                      <a:solidFill>
+                        <a:srgbClr val="D9E0E7"/>
+                      </a:solidFill>
+                      <a:prstDash val="solid"/>
+                      <a:round/>
+                      <a:headEnd type="none" w="med" len="med"/>
+                      <a:tailEnd type="none" w="med" len="med"/>
+                    </a:lnT>
+                    <a:lnB w="6350" cap="flat" cmpd="sng" algn="ctr">
+                      <a:solidFill>
+                        <a:srgbClr val="D9E0E7"/>
+                      </a:solidFill>
+                      <a:prstDash val="solid"/>
+                      <a:round/>
+                      <a:headEnd type="none" w="med" len="med"/>
+                      <a:tailEnd type="none" w="med" len="med"/>
+                    </a:lnB>
+                  </a:tcPr>
+                </a:tc>
+              </a:tr>
+              <a:tr h="365760">
+                <a:tc>
+                  <a:txBody>
+                    <a:bodyPr/>
+                    <a:lstStyle/>
+                    <a:p>
+                      <a:pPr indent="0" marL="0">
+                        <a:buNone/>
+                      </a:pPr>
+                      <a:r>
+                        <a:rPr lang="en-US" sz="1100" b="1" dirty="0">
+                          <a:solidFill>
+                            <a:srgbClr val="3D4E60"/>
+                          </a:solidFill>
+                          <a:latin typeface="Meiryo" pitchFamily="34" charset="0"/>
+                          <a:ea typeface="Meiryo" pitchFamily="34" charset="-122"/>
+                          <a:cs typeface="Meiryo" pitchFamily="34" charset="-120"/>
+                        </a:rPr>
+                        <a:t>合算 現預金</a:t>
+                      </a:r>
+                      <a:endParaRPr lang="en-US" sz="1100" dirty="0">
+                        <a:latin typeface="Meiryo" charset="0"/>
+                        <a:ea typeface="Meiryo" charset="0"/>
+                        <a:cs typeface="Meiryo" charset="0"/>
+                      </a:endParaRPr>
+                    </a:p>
+                  </a:txBody>
+                  <a:tcPr marL="91440" marR="91440" marT="45720" marB="45720" anchor="ctr">
+                    <a:lnL w="6350" cap="flat" cmpd="sng" algn="ctr">
+                      <a:solidFill>
+                        <a:srgbClr val="D9E0E7"/>
+                      </a:solidFill>
+                      <a:prstDash val="solid"/>
+                      <a:round/>
+                      <a:headEnd type="none" w="med" len="med"/>
+                      <a:tailEnd type="none" w="med" len="med"/>
+                    </a:lnL>
+                    <a:lnR w="6350" cap="flat" cmpd="sng" algn="ctr">
+                      <a:solidFill>
+                        <a:srgbClr val="D9E0E7"/>
+                      </a:solidFill>
+                      <a:prstDash val="solid"/>
+                      <a:round/>
+                      <a:headEnd type="none" w="med" len="med"/>
+                      <a:tailEnd type="none" w="med" len="med"/>
+                    </a:lnR>
+                    <a:lnT w="6350" cap="flat" cmpd="sng" algn="ctr">
+                      <a:solidFill>
+                        <a:srgbClr val="D9E0E7"/>
+                      </a:solidFill>
+                      <a:prstDash val="solid"/>
+                      <a:round/>
+                      <a:headEnd type="none" w="med" len="med"/>
+                      <a:tailEnd type="none" w="med" len="med"/>
+                    </a:lnT>
+                    <a:lnB w="6350" cap="flat" cmpd="sng" algn="ctr">
+                      <a:solidFill>
+                        <a:srgbClr val="D9E0E7"/>
+                      </a:solidFill>
+                      <a:prstDash val="solid"/>
+                      <a:round/>
+                      <a:headEnd type="none" w="med" len="med"/>
+                      <a:tailEnd type="none" w="med" len="med"/>
+                    </a:lnB>
+                  </a:tcPr>
+                </a:tc>
+                <a:tc>
+                  <a:txBody>
+                    <a:bodyPr/>
+                    <a:lstStyle/>
+                    <a:p>
+                      <a:pPr algn="ctr" indent="0" marL="0">
+                        <a:buNone/>
+                      </a:pPr>
+                      <a:r>
+                        <a:rPr lang="en-US" sz="1100" dirty="0">
+                          <a:solidFill>
+                            <a:srgbClr val="3D4E60"/>
+                          </a:solidFill>
+                          <a:latin typeface="Meiryo" pitchFamily="34" charset="0"/>
+                          <a:ea typeface="Meiryo" pitchFamily="34" charset="-122"/>
+                          <a:cs typeface="Meiryo" pitchFamily="34" charset="-120"/>
+                        </a:rPr>
+                        <a:t>11.96億</a:t>
+                      </a:r>
+                      <a:endParaRPr lang="en-US" sz="1100" dirty="0">
+                        <a:latin typeface="Meiryo" charset="0"/>
+                        <a:ea typeface="Meiryo" charset="0"/>
+                        <a:cs typeface="Meiryo" charset="0"/>
+                      </a:endParaRPr>
+                    </a:p>
+                  </a:txBody>
+                  <a:tcPr marL="91440" marR="91440" marT="45720" marB="45720" anchor="ctr">
+                    <a:lnL w="6350" cap="flat" cmpd="sng" algn="ctr">
+                      <a:solidFill>
+                        <a:srgbClr val="D9E0E7"/>
+                      </a:solidFill>
+                      <a:prstDash val="solid"/>
+                      <a:round/>
+                      <a:headEnd type="none" w="med" len="med"/>
+                      <a:tailEnd type="none" w="med" len="med"/>
+                    </a:lnL>
+                    <a:lnR w="6350" cap="flat" cmpd="sng" algn="ctr">
+                      <a:solidFill>
+                        <a:srgbClr val="D9E0E7"/>
+                      </a:solidFill>
+                      <a:prstDash val="solid"/>
+                      <a:round/>
+                      <a:headEnd type="none" w="med" len="med"/>
+                      <a:tailEnd type="none" w="med" len="med"/>
+                    </a:lnR>
+                    <a:lnT w="6350" cap="flat" cmpd="sng" algn="ctr">
+                      <a:solidFill>
+                        <a:srgbClr val="D9E0E7"/>
+                      </a:solidFill>
+                      <a:prstDash val="solid"/>
+                      <a:round/>
+                      <a:headEnd type="none" w="med" len="med"/>
+                      <a:tailEnd type="none" w="med" len="med"/>
+                    </a:lnT>
+                    <a:lnB w="6350" cap="flat" cmpd="sng" algn="ctr">
+                      <a:solidFill>
+                        <a:srgbClr val="D9E0E7"/>
+                      </a:solidFill>
+                      <a:prstDash val="solid"/>
+                      <a:round/>
+                      <a:headEnd type="none" w="med" len="med"/>
+                      <a:tailEnd type="none" w="med" len="med"/>
+                    </a:lnB>
+                  </a:tcPr>
+                </a:tc>
+                <a:tc>
+                  <a:txBody>
+                    <a:bodyPr/>
+                    <a:lstStyle/>
+                    <a:p>
+                      <a:pPr algn="ctr" indent="0" marL="0">
+                        <a:buNone/>
+                      </a:pPr>
+                      <a:r>
+                        <a:rPr lang="en-US" sz="1100" b="1" dirty="0">
+                          <a:solidFill>
+                            <a:srgbClr val="3D4E60"/>
+                          </a:solidFill>
+                          <a:latin typeface="Meiryo" pitchFamily="34" charset="0"/>
+                          <a:ea typeface="Meiryo" pitchFamily="34" charset="-122"/>
+                          <a:cs typeface="Meiryo" pitchFamily="34" charset="-120"/>
+                        </a:rPr>
+                        <a:t>13.75億</a:t>
+                      </a:r>
+                      <a:endParaRPr lang="en-US" sz="1100" dirty="0">
+                        <a:latin typeface="Meiryo" charset="0"/>
+                        <a:ea typeface="Meiryo" charset="0"/>
+                        <a:cs typeface="Meiryo" charset="0"/>
+                      </a:endParaRPr>
+                    </a:p>
+                  </a:txBody>
+                  <a:tcPr marL="91440" marR="91440" marT="45720" marB="45720" anchor="ctr">
+                    <a:lnL w="6350" cap="flat" cmpd="sng" algn="ctr">
+                      <a:solidFill>
+                        <a:srgbClr val="D9E0E7"/>
+                      </a:solidFill>
+                      <a:prstDash val="solid"/>
+                      <a:round/>
+                      <a:headEnd type="none" w="med" len="med"/>
+                      <a:tailEnd type="none" w="med" len="med"/>
+                    </a:lnL>
+                    <a:lnR w="6350" cap="flat" cmpd="sng" algn="ctr">
+                      <a:solidFill>
+                        <a:srgbClr val="D9E0E7"/>
+                      </a:solidFill>
+                      <a:prstDash val="solid"/>
+                      <a:round/>
+                      <a:headEnd type="none" w="med" len="med"/>
+                      <a:tailEnd type="none" w="med" len="med"/>
+                    </a:lnR>
+                    <a:lnT w="6350" cap="flat" cmpd="sng" algn="ctr">
+                      <a:solidFill>
+                        <a:srgbClr val="D9E0E7"/>
+                      </a:solidFill>
+                      <a:prstDash val="solid"/>
+                      <a:round/>
+                      <a:headEnd type="none" w="med" len="med"/>
+                      <a:tailEnd type="none" w="med" len="med"/>
+                    </a:lnT>
+                    <a:lnB w="6350" cap="flat" cmpd="sng" algn="ctr">
+                      <a:solidFill>
+                        <a:srgbClr val="D9E0E7"/>
+                      </a:solidFill>
+                      <a:prstDash val="solid"/>
+                      <a:round/>
+                      <a:headEnd type="none" w="med" len="med"/>
+                      <a:tailEnd type="none" w="med" len="med"/>
+                    </a:lnB>
+                  </a:tcPr>
+                </a:tc>
+              </a:tr>
+            </a:tbl>
+          </a:graphicData>
+        </a:graphic>
+      </p:graphicFrame>
+      <p:sp>
+        <p:nvSpPr>
+          <p:cNvPr id="23" name="Shape 20"/>
+          <p:cNvSpPr/>
+          <p:nvPr/>
+        </p:nvSpPr>
+        <p:spPr>
+          <a:xfrm>
+            <a:off x="4617720" y="5468112"/>
+            <a:ext cx="6903720" cy="566928"/>
+          </a:xfrm>
+          <a:prstGeom prst="roundRect">
+            <a:avLst>
+              <a:gd name="adj" fmla="val 9677"/>
+            </a:avLst>
+          </a:prstGeom>
+          <a:solidFill>
+            <a:srgbClr val="FBF1F3"/>
+          </a:solidFill>
+          <a:ln w="12700">
+            <a:solidFill>
+              <a:srgbClr val="E3CBD1"/>
+            </a:solidFill>
+            <a:prstDash val="solid"/>
+          </a:ln>
+          <a:effectLst>
+            <a:outerShdw sx="100000" sy="100000" kx="0" ky="0" algn="bl" rotWithShape="0" blurRad="101600" dist="12700" dir="5400000">
+              <a:srgbClr val="AAB4BE">
+                <a:alpha val="18000"/>
+              </a:srgbClr>
+            </a:outerShdw>
+          </a:effectLst>
+        </p:spPr>
+      </p:sp>
+      <p:sp>
+        <p:nvSpPr>
+          <p:cNvPr id="24" name="Text 21"/>
+          <p:cNvSpPr txBox="1"/>
+          <p:nvPr/>
+        </p:nvSpPr>
+        <p:spPr>
+          <a:xfrm>
+            <a:off x="4892040" y="5596128"/>
+            <a:ext cx="6400800" cy="310896"/>
+          </a:xfrm>
+          <a:prstGeom prst="rect">
+            <a:avLst/>
+          </a:prstGeom>
+          <a:noFill/>
+          <a:ln/>
+        </p:spPr>
+        <p:txBody>
+          <a:bodyPr wrap="square" lIns="0" tIns="0" rIns="0" bIns="0" rtlCol="0" anchor="ctr"/>
+          <a:lstStyle/>
+          <a:p>
+            <a:pPr indent="0" marL="0">
+              <a:buNone/>
+            </a:pPr>
+            <a:r>
+              <a:rPr lang="en-US" sz="1250" b="1" dirty="0">
+                <a:solidFill>
+                  <a:srgbClr val="6E2639"/>
+                </a:solidFill>
+                <a:latin typeface="Meiryo" pitchFamily="34" charset="0"/>
+                <a:ea typeface="Meiryo" pitchFamily="34" charset="-122"/>
+                <a:cs typeface="Meiryo" pitchFamily="34" charset="-120"/>
+              </a:rPr>
+              <a:t>銀行はのれんを自己資本から控除して見ます。表面38.6%でも実質11.8%です。</a:t>
+            </a:r>
+            <a:endParaRPr lang="en-US" sz="1250" dirty="0"/>
+          </a:p>
+        </p:txBody>
+      </p:sp>
+      <p:sp>
+        <p:nvSpPr>
+          <p:cNvPr id="25" name="Text 22"/>
+          <p:cNvSpPr txBox="1"/>
+          <p:nvPr/>
+        </p:nvSpPr>
+        <p:spPr>
+          <a:xfrm>
+            <a:off x="640080" y="6144768"/>
+            <a:ext cx="10881360" cy="274320"/>
+          </a:xfrm>
+          <a:prstGeom prst="rect">
+            <a:avLst/>
+          </a:prstGeom>
+          <a:noFill/>
+          <a:ln/>
+        </p:spPr>
+        <p:txBody>
+          <a:bodyPr wrap="square" lIns="0" tIns="0" rIns="0" bIns="0" rtlCol="0" anchor="ctr"/>
+          <a:lstStyle/>
+          <a:p>
+            <a:pPr indent="0" marL="0">
+              <a:buNone/>
+            </a:pPr>
+            <a:r>
+              <a:rPr lang="en-US" sz="900" dirty="0">
+                <a:solidFill>
+                  <a:srgbClr val="7C8A99"/>
+                </a:solidFill>
+                <a:latin typeface="Meiryo" pitchFamily="34" charset="0"/>
+                <a:ea typeface="Meiryo" pitchFamily="34" charset="-122"/>
+                <a:cs typeface="Meiryo" pitchFamily="34" charset="-120"/>
+              </a:rPr>
+              <a:t>スペースマーケット社の数値は同社決算短信の公表値です（検索結果経由で取得、PDF原本は未確認）。有利子負債の内訳は未入手のため、合算の有利子負債は算出していません。</a:t>
+            </a:r>
+            <a:endParaRPr lang="en-US" sz="900" dirty="0"/>
+          </a:p>
+        </p:txBody>
+      </p:sp>
+    </p:spTree>
+  </p:cSld>
+  <p:clrMapOvr>
+    <a:masterClrMapping/>
+  </p:clrMapOvr>
+</p:sld>
+</file>
+
+<file path=ppt/slides/slide7.xml><?xml version="1.0" encoding="utf-8"?>
+<p:sld xmlns:a="http://schemas.openxmlformats.org/drawingml/2006/main" xmlns:r="http://schemas.openxmlformats.org/officeDocument/2006/relationships" xmlns:p="http://schemas.openxmlformats.org/presentationml/2006/main">
+  <p:cSld name="Slide 7">
     <p:bg>
       <p:bgPr>
         <a:solidFill>
@@ -11149,7 +15411,7 @@
                 <a:ea typeface="Meiryo" pitchFamily="34" charset="-122"/>
                 <a:cs typeface="Meiryo" pitchFamily="34" charset="-120"/>
               </a:rPr>
-              <a:t>比較 ③</a:t>
+              <a:t>比較 ④</a:t>
             </a:r>
             <a:endParaRPr lang="en-US" sz="1100" dirty="0"/>
           </a:p>
@@ -11868,9 +16130,9 @@
 </p:sld>
 </file>
 
-<file path=ppt/slides/slide7.xml><?xml version="1.0" encoding="utf-8"?>
+<file path=ppt/slides/slide8.xml><?xml version="1.0" encoding="utf-8"?>
 <p:sld xmlns:a="http://schemas.openxmlformats.org/drawingml/2006/main" xmlns:r="http://schemas.openxmlformats.org/officeDocument/2006/relationships" xmlns:p="http://schemas.openxmlformats.org/presentationml/2006/main">
-  <p:cSld name="Slide 7">
+  <p:cSld name="Slide 8">
     <p:bg>
       <p:bgPr>
         <a:solidFill>
@@ -12970,9 +17232,9 @@
 </p:sld>
 </file>
 
-<file path=ppt/slides/slide8.xml><?xml version="1.0" encoding="utf-8"?>
+<file path=ppt/slides/slide9.xml><?xml version="1.0" encoding="utf-8"?>
 <p:sld xmlns:a="http://schemas.openxmlformats.org/drawingml/2006/main" xmlns:r="http://schemas.openxmlformats.org/officeDocument/2006/relationships" xmlns:p="http://schemas.openxmlformats.org/presentationml/2006/main">
-  <p:cSld name="Slide 8">
+  <p:cSld name="Slide 9">
     <p:bg>
       <p:bgPr>
         <a:solidFill>
@@ -13213,7 +17475,7 @@
                 <a:ea typeface="Meiryo" pitchFamily="34" charset="-122"/>
                 <a:cs typeface="Meiryo" pitchFamily="34" charset="-120"/>
               </a:rPr>
-              <a:t>日本基準では定額償却が必要です。20年償却でも年1.10億、10年なら年2.21億。合算営業利益（約2.6億）の大半が消え、配当原資にも影響します。</a:t>
+              <a:t>日本基準では定額償却が必要です。20年で年1.10億、10年なら年2.21億。合算営業利益4.90億（SM2.90億＋あどばる2.00億）に対し23〜45%を占め、配当原資にも影響します。</a:t>
             </a:r>
             <a:endParaRPr lang="en-US" sz="1050" dirty="0"/>
           </a:p>
@@ -13696,1229 +17958,6 @@
               <a:t>④は見落としやすい点です。中野が持分を買い増すほど流通株式比率は下がり、上場維持基準に近づきます。支配権の確保と上場維持は、この一点で相反します。</a:t>
             </a:r>
             <a:endParaRPr lang="en-US" sz="1250" dirty="0"/>
-          </a:p>
-        </p:txBody>
-      </p:sp>
-    </p:spTree>
-  </p:cSld>
-  <p:clrMapOvr>
-    <a:masterClrMapping/>
-  </p:clrMapOvr>
-</p:sld>
-</file>
-
-<file path=ppt/slides/slide9.xml><?xml version="1.0" encoding="utf-8"?>
-<p:sld xmlns:a="http://schemas.openxmlformats.org/drawingml/2006/main" xmlns:r="http://schemas.openxmlformats.org/officeDocument/2006/relationships" xmlns:p="http://schemas.openxmlformats.org/presentationml/2006/main">
-  <p:cSld name="Slide 9">
-    <p:bg>
-      <p:bgPr>
-        <a:solidFill>
-          <a:srgbClr val="F5F7F9"/>
-        </a:solidFill>
-      </p:bgPr>
-    </p:bg>
-    <p:spTree>
-      <p:nvGrpSpPr>
-        <p:cNvPr id="1" name=""/>
-        <p:cNvGrpSpPr/>
-        <p:nvPr/>
-      </p:nvGrpSpPr>
-      <p:grpSpPr>
-        <a:xfrm>
-          <a:off x="0" y="0"/>
-          <a:ext cx="0" cy="0"/>
-          <a:chOff x="0" y="0"/>
-          <a:chExt cx="0" cy="0"/>
-        </a:xfrm>
-      </p:grpSpPr>
-      <p:sp>
-        <p:nvSpPr>
-          <p:cNvPr id="2" name="Text 0"/>
-          <p:cNvSpPr txBox="1"/>
-          <p:nvPr/>
-        </p:nvSpPr>
-        <p:spPr>
-          <a:xfrm>
-            <a:off x="640080" y="384048"/>
-            <a:ext cx="10881360" cy="256032"/>
-          </a:xfrm>
-          <a:prstGeom prst="rect">
-            <a:avLst/>
-          </a:prstGeom>
-          <a:noFill/>
-          <a:ln/>
-        </p:spPr>
-        <p:txBody>
-          <a:bodyPr wrap="square" lIns="0" tIns="0" rIns="0" bIns="0" rtlCol="0" anchor="ctr"/>
-          <a:lstStyle/>
-          <a:p>
-            <a:pPr indent="0" marL="0">
-              <a:buNone/>
-            </a:pPr>
-            <a:r>
-              <a:rPr lang="en-US" sz="1100" b="1" spc="200" kern="0" dirty="0">
-                <a:solidFill>
-                  <a:srgbClr val="6E2639"/>
-                </a:solidFill>
-                <a:latin typeface="Meiryo" pitchFamily="34" charset="0"/>
-                <a:ea typeface="Meiryo" pitchFamily="34" charset="-122"/>
-                <a:cs typeface="Meiryo" pitchFamily="34" charset="-120"/>
-              </a:rPr>
-              <a:t>論点</a:t>
-            </a:r>
-            <a:endParaRPr lang="en-US" sz="1100" dirty="0"/>
-          </a:p>
-        </p:txBody>
-      </p:sp>
-      <p:sp>
-        <p:nvSpPr>
-          <p:cNvPr id="3" name="Text 1"/>
-          <p:cNvSpPr txBox="1"/>
-          <p:nvPr/>
-        </p:nvSpPr>
-        <p:spPr>
-          <a:xfrm>
-            <a:off x="640080" y="676656"/>
-            <a:ext cx="10881360" cy="658368"/>
-          </a:xfrm>
-          <a:prstGeom prst="rect">
-            <a:avLst/>
-          </a:prstGeom>
-          <a:noFill/>
-          <a:ln/>
-        </p:spPr>
-        <p:txBody>
-          <a:bodyPr wrap="square" lIns="0" tIns="0" rIns="0" bIns="0" rtlCol="0" anchor="ctr"/>
-          <a:lstStyle/>
-          <a:p>
-            <a:pPr indent="0" marL="0">
-              <a:buNone/>
-            </a:pPr>
-            <a:r>
-              <a:rPr lang="en-US" sz="2800" b="1" dirty="0">
-                <a:solidFill>
-                  <a:srgbClr val="1E2A38"/>
-                </a:solidFill>
-                <a:latin typeface="Meiryo" pitchFamily="34" charset="0"/>
-                <a:ea typeface="Meiryo" pitchFamily="34" charset="-122"/>
-                <a:cs typeface="Meiryo" pitchFamily="34" charset="-120"/>
-              </a:rPr>
-              <a:t>評価額と、支払通貨としての株価</a:t>
-            </a:r>
-            <a:endParaRPr lang="en-US" sz="2800" dirty="0"/>
-          </a:p>
-        </p:txBody>
-      </p:sp>
-      <p:sp>
-        <p:nvSpPr>
-          <p:cNvPr id="4" name="Shape 2"/>
-          <p:cNvSpPr/>
-          <p:nvPr/>
-        </p:nvSpPr>
-        <p:spPr>
-          <a:xfrm>
-            <a:off x="640080" y="1554480"/>
-            <a:ext cx="5349240" cy="2487168"/>
-          </a:xfrm>
-          <a:prstGeom prst="roundRect">
-            <a:avLst>
-              <a:gd name="adj" fmla="val 2206"/>
-            </a:avLst>
-          </a:prstGeom>
-          <a:solidFill>
-            <a:srgbClr val="FFFFFF"/>
-          </a:solidFill>
-          <a:ln w="12700">
-            <a:solidFill>
-              <a:srgbClr val="D9E0E7"/>
-            </a:solidFill>
-            <a:prstDash val="solid"/>
-          </a:ln>
-          <a:effectLst>
-            <a:outerShdw sx="100000" sy="100000" kx="0" ky="0" algn="bl" rotWithShape="0" blurRad="101600" dist="12700" dir="5400000">
-              <a:srgbClr val="AAB4BE">
-                <a:alpha val="18000"/>
-              </a:srgbClr>
-            </a:outerShdw>
-          </a:effectLst>
-        </p:spPr>
-      </p:sp>
-      <p:sp>
-        <p:nvSpPr>
-          <p:cNvPr id="5" name="Text 3"/>
-          <p:cNvSpPr txBox="1"/>
-          <p:nvPr/>
-        </p:nvSpPr>
-        <p:spPr>
-          <a:xfrm>
-            <a:off x="914400" y="1755648"/>
-            <a:ext cx="4754880" cy="274320"/>
-          </a:xfrm>
-          <a:prstGeom prst="rect">
-            <a:avLst/>
-          </a:prstGeom>
-          <a:noFill/>
-          <a:ln/>
-        </p:spPr>
-        <p:txBody>
-          <a:bodyPr wrap="square" lIns="0" tIns="0" rIns="0" bIns="0" rtlCol="0" anchor="ctr"/>
-          <a:lstStyle/>
-          <a:p>
-            <a:pPr indent="0" marL="0">
-              <a:buNone/>
-            </a:pPr>
-            <a:r>
-              <a:rPr lang="en-US" sz="1350" b="1" dirty="0">
-                <a:solidFill>
-                  <a:srgbClr val="1E2A38"/>
-                </a:solidFill>
-                <a:latin typeface="Meiryo" pitchFamily="34" charset="0"/>
-                <a:ea typeface="Meiryo" pitchFamily="34" charset="-122"/>
-                <a:cs typeface="Meiryo" pitchFamily="34" charset="-120"/>
-              </a:rPr>
-              <a:t>あどばるの評価額</a:t>
-            </a:r>
-            <a:endParaRPr lang="en-US" sz="1350" dirty="0"/>
-          </a:p>
-        </p:txBody>
-      </p:sp>
-      <p:sp>
-        <p:nvSpPr>
-          <p:cNvPr id="6" name="Text 4"/>
-          <p:cNvSpPr txBox="1"/>
-          <p:nvPr/>
-        </p:nvSpPr>
-        <p:spPr>
-          <a:xfrm>
-            <a:off x="914400" y="2212848"/>
-            <a:ext cx="3291840" cy="274320"/>
-          </a:xfrm>
-          <a:prstGeom prst="rect">
-            <a:avLst/>
-          </a:prstGeom>
-          <a:noFill/>
-          <a:ln/>
-        </p:spPr>
-        <p:txBody>
-          <a:bodyPr wrap="square" lIns="0" tIns="0" rIns="0" bIns="0" rtlCol="0" anchor="ctr"/>
-          <a:lstStyle/>
-          <a:p>
-            <a:pPr indent="0" marL="0">
-              <a:buNone/>
-            </a:pPr>
-            <a:r>
-              <a:rPr lang="en-US" sz="1150" dirty="0">
-                <a:solidFill>
-                  <a:srgbClr val="3D4E60"/>
-                </a:solidFill>
-                <a:latin typeface="Meiryo" pitchFamily="34" charset="0"/>
-                <a:ea typeface="Meiryo" pitchFamily="34" charset="-122"/>
-                <a:cs typeface="Meiryo" pitchFamily="34" charset="-120"/>
-              </a:rPr>
-              <a:t>スペースマーケット社LOI</a:t>
-            </a:r>
-            <a:endParaRPr lang="en-US" sz="1150" dirty="0"/>
-          </a:p>
-        </p:txBody>
-      </p:sp>
-      <p:sp>
-        <p:nvSpPr>
-          <p:cNvPr id="7" name="Text 5"/>
-          <p:cNvSpPr txBox="1"/>
-          <p:nvPr/>
-        </p:nvSpPr>
-        <p:spPr>
-          <a:xfrm>
-            <a:off x="4206240" y="2176272"/>
-            <a:ext cx="1463040" cy="329184"/>
-          </a:xfrm>
-          <a:prstGeom prst="rect">
-            <a:avLst/>
-          </a:prstGeom>
-          <a:noFill/>
-          <a:ln/>
-        </p:spPr>
-        <p:txBody>
-          <a:bodyPr wrap="square" lIns="0" tIns="0" rIns="0" bIns="0" rtlCol="0" anchor="ctr"/>
-          <a:lstStyle/>
-          <a:p>
-            <a:pPr algn="r" indent="0" marL="0">
-              <a:buNone/>
-            </a:pPr>
-            <a:r>
-              <a:rPr lang="en-US" sz="1600" b="1" dirty="0">
-                <a:solidFill>
-                  <a:srgbClr val="8A2E26"/>
-                </a:solidFill>
-                <a:latin typeface="Meiryo" pitchFamily="34" charset="0"/>
-                <a:ea typeface="Meiryo" pitchFamily="34" charset="-122"/>
-                <a:cs typeface="Meiryo" pitchFamily="34" charset="-120"/>
-              </a:rPr>
-              <a:t>18.0億円</a:t>
-            </a:r>
-            <a:endParaRPr lang="en-US" sz="1600" dirty="0"/>
-          </a:p>
-        </p:txBody>
-      </p:sp>
-      <p:sp>
-        <p:nvSpPr>
-          <p:cNvPr id="8" name="Text 6"/>
-          <p:cNvSpPr txBox="1"/>
-          <p:nvPr/>
-        </p:nvSpPr>
-        <p:spPr>
-          <a:xfrm>
-            <a:off x="914400" y="2715768"/>
-            <a:ext cx="3291840" cy="274320"/>
-          </a:xfrm>
-          <a:prstGeom prst="rect">
-            <a:avLst/>
-          </a:prstGeom>
-          <a:noFill/>
-          <a:ln/>
-        </p:spPr>
-        <p:txBody>
-          <a:bodyPr wrap="square" lIns="0" tIns="0" rIns="0" bIns="0" rtlCol="0" anchor="ctr"/>
-          <a:lstStyle/>
-          <a:p>
-            <a:pPr indent="0" marL="0">
-              <a:buNone/>
-            </a:pPr>
-            <a:r>
-              <a:rPr lang="en-US" sz="1150" dirty="0">
-                <a:solidFill>
-                  <a:srgbClr val="3D4E60"/>
-                </a:solidFill>
-                <a:latin typeface="Meiryo" pitchFamily="34" charset="0"/>
-                <a:ea typeface="Meiryo" pitchFamily="34" charset="-122"/>
-                <a:cs typeface="Meiryo" pitchFamily="34" charset="-120"/>
-              </a:rPr>
-              <a:t>MBOの前提評価（Pre）</a:t>
-            </a:r>
-            <a:endParaRPr lang="en-US" sz="1150" dirty="0"/>
-          </a:p>
-        </p:txBody>
-      </p:sp>
-      <p:sp>
-        <p:nvSpPr>
-          <p:cNvPr id="9" name="Text 7"/>
-          <p:cNvSpPr txBox="1"/>
-          <p:nvPr/>
-        </p:nvSpPr>
-        <p:spPr>
-          <a:xfrm>
-            <a:off x="4206240" y="2679192"/>
-            <a:ext cx="1463040" cy="329184"/>
-          </a:xfrm>
-          <a:prstGeom prst="rect">
-            <a:avLst/>
-          </a:prstGeom>
-          <a:noFill/>
-          <a:ln/>
-        </p:spPr>
-        <p:txBody>
-          <a:bodyPr wrap="square" lIns="0" tIns="0" rIns="0" bIns="0" rtlCol="0" anchor="ctr"/>
-          <a:lstStyle/>
-          <a:p>
-            <a:pPr algn="r" indent="0" marL="0">
-              <a:buNone/>
-            </a:pPr>
-            <a:r>
-              <a:rPr lang="en-US" sz="1600" b="1" dirty="0">
-                <a:solidFill>
-                  <a:srgbClr val="1E2A38"/>
-                </a:solidFill>
-                <a:latin typeface="Meiryo" pitchFamily="34" charset="0"/>
-                <a:ea typeface="Meiryo" pitchFamily="34" charset="-122"/>
-                <a:cs typeface="Meiryo" pitchFamily="34" charset="-120"/>
-              </a:rPr>
-              <a:t>20.0億円</a:t>
-            </a:r>
-            <a:endParaRPr lang="en-US" sz="1600" dirty="0"/>
-          </a:p>
-        </p:txBody>
-      </p:sp>
-      <p:sp>
-        <p:nvSpPr>
-          <p:cNvPr id="10" name="Text 8"/>
-          <p:cNvSpPr txBox="1"/>
-          <p:nvPr/>
-        </p:nvSpPr>
-        <p:spPr>
-          <a:xfrm>
-            <a:off x="914400" y="3218688"/>
-            <a:ext cx="3291840" cy="274320"/>
-          </a:xfrm>
-          <a:prstGeom prst="rect">
-            <a:avLst/>
-          </a:prstGeom>
-          <a:noFill/>
-          <a:ln/>
-        </p:spPr>
-        <p:txBody>
-          <a:bodyPr wrap="square" lIns="0" tIns="0" rIns="0" bIns="0" rtlCol="0" anchor="ctr"/>
-          <a:lstStyle/>
-          <a:p>
-            <a:pPr indent="0" marL="0">
-              <a:buNone/>
-            </a:pPr>
-            <a:r>
-              <a:rPr lang="en-US" sz="1150" dirty="0">
-                <a:solidFill>
-                  <a:srgbClr val="3D4E60"/>
-                </a:solidFill>
-                <a:latin typeface="Meiryo" pitchFamily="34" charset="0"/>
-                <a:ea typeface="Meiryo" pitchFamily="34" charset="-122"/>
-                <a:cs typeface="Meiryo" pitchFamily="34" charset="-120"/>
-              </a:rPr>
-              <a:t>MBO取引後の株主価値</a:t>
-            </a:r>
-            <a:endParaRPr lang="en-US" sz="1150" dirty="0"/>
-          </a:p>
-        </p:txBody>
-      </p:sp>
-      <p:sp>
-        <p:nvSpPr>
-          <p:cNvPr id="11" name="Text 9"/>
-          <p:cNvSpPr txBox="1"/>
-          <p:nvPr/>
-        </p:nvSpPr>
-        <p:spPr>
-          <a:xfrm>
-            <a:off x="4206240" y="3182112"/>
-            <a:ext cx="1463040" cy="329184"/>
-          </a:xfrm>
-          <a:prstGeom prst="rect">
-            <a:avLst/>
-          </a:prstGeom>
-          <a:noFill/>
-          <a:ln/>
-        </p:spPr>
-        <p:txBody>
-          <a:bodyPr wrap="square" lIns="0" tIns="0" rIns="0" bIns="0" rtlCol="0" anchor="ctr"/>
-          <a:lstStyle/>
-          <a:p>
-            <a:pPr algn="r" indent="0" marL="0">
-              <a:buNone/>
-            </a:pPr>
-            <a:r>
-              <a:rPr lang="en-US" sz="1600" b="1" dirty="0">
-                <a:solidFill>
-                  <a:srgbClr val="2C6A4E"/>
-                </a:solidFill>
-                <a:latin typeface="Meiryo" pitchFamily="34" charset="0"/>
-                <a:ea typeface="Meiryo" pitchFamily="34" charset="-122"/>
-                <a:cs typeface="Meiryo" pitchFamily="34" charset="-120"/>
-              </a:rPr>
-              <a:t>26.85億円</a:t>
-            </a:r>
-            <a:endParaRPr lang="en-US" sz="1600" dirty="0"/>
-          </a:p>
-        </p:txBody>
-      </p:sp>
-      <p:sp>
-        <p:nvSpPr>
-          <p:cNvPr id="12" name="Text 10"/>
-          <p:cNvSpPr txBox="1"/>
-          <p:nvPr/>
-        </p:nvSpPr>
-        <p:spPr>
-          <a:xfrm>
-            <a:off x="914400" y="3621024"/>
-            <a:ext cx="4800600" cy="411480"/>
-          </a:xfrm>
-          <a:prstGeom prst="rect">
-            <a:avLst/>
-          </a:prstGeom>
-          <a:noFill/>
-          <a:ln/>
-        </p:spPr>
-        <p:txBody>
-          <a:bodyPr wrap="square" lIns="0" tIns="0" rIns="0" bIns="0" rtlCol="0" anchor="ctr"/>
-          <a:lstStyle/>
-          <a:p>
-            <a:pPr indent="0" marL="0">
-              <a:buNone/>
-            </a:pPr>
-            <a:r>
-              <a:rPr lang="en-US" sz="1050" dirty="0">
-                <a:solidFill>
-                  <a:srgbClr val="3D4E60"/>
-                </a:solidFill>
-                <a:latin typeface="Meiryo" pitchFamily="34" charset="0"/>
-                <a:ea typeface="Meiryo" pitchFamily="34" charset="-122"/>
-                <a:cs typeface="Meiryo" pitchFamily="34" charset="-120"/>
-              </a:rPr>
-              <a:t>LOIの18億円は、MBOの前提である20億円を下回ります。まず評価額そのものが交渉の対象です。</a:t>
-            </a:r>
-            <a:endParaRPr lang="en-US" sz="1050" dirty="0"/>
-          </a:p>
-        </p:txBody>
-      </p:sp>
-      <p:sp>
-        <p:nvSpPr>
-          <p:cNvPr id="13" name="Shape 11"/>
-          <p:cNvSpPr/>
-          <p:nvPr/>
-        </p:nvSpPr>
-        <p:spPr>
-          <a:xfrm>
-            <a:off x="6172200" y="1554480"/>
-            <a:ext cx="5349240" cy="2487168"/>
-          </a:xfrm>
-          <a:prstGeom prst="roundRect">
-            <a:avLst>
-              <a:gd name="adj" fmla="val 2206"/>
-            </a:avLst>
-          </a:prstGeom>
-          <a:solidFill>
-            <a:srgbClr val="FFFFFF"/>
-          </a:solidFill>
-          <a:ln w="12700">
-            <a:solidFill>
-              <a:srgbClr val="D9E0E7"/>
-            </a:solidFill>
-            <a:prstDash val="solid"/>
-          </a:ln>
-          <a:effectLst>
-            <a:outerShdw sx="100000" sy="100000" kx="0" ky="0" algn="bl" rotWithShape="0" blurRad="101600" dist="12700" dir="5400000">
-              <a:srgbClr val="AAB4BE">
-                <a:alpha val="18000"/>
-              </a:srgbClr>
-            </a:outerShdw>
-          </a:effectLst>
-        </p:spPr>
-      </p:sp>
-      <p:sp>
-        <p:nvSpPr>
-          <p:cNvPr id="14" name="Text 12"/>
-          <p:cNvSpPr txBox="1"/>
-          <p:nvPr/>
-        </p:nvSpPr>
-        <p:spPr>
-          <a:xfrm>
-            <a:off x="6446520" y="1755648"/>
-            <a:ext cx="4754880" cy="274320"/>
-          </a:xfrm>
-          <a:prstGeom prst="rect">
-            <a:avLst/>
-          </a:prstGeom>
-          <a:noFill/>
-          <a:ln/>
-        </p:spPr>
-        <p:txBody>
-          <a:bodyPr wrap="square" lIns="0" tIns="0" rIns="0" bIns="0" rtlCol="0" anchor="ctr"/>
-          <a:lstStyle/>
-          <a:p>
-            <a:pPr indent="0" marL="0">
-              <a:buNone/>
-            </a:pPr>
-            <a:r>
-              <a:rPr lang="en-US" sz="1350" b="1" dirty="0">
-                <a:solidFill>
-                  <a:srgbClr val="1E2A38"/>
-                </a:solidFill>
-                <a:latin typeface="Meiryo" pitchFamily="34" charset="0"/>
-                <a:ea typeface="Meiryo" pitchFamily="34" charset="-122"/>
-                <a:cs typeface="Meiryo" pitchFamily="34" charset="-120"/>
-              </a:rPr>
-              <a:t>受け取る通貨（SM株価）の状況</a:t>
-            </a:r>
-            <a:endParaRPr lang="en-US" sz="1350" dirty="0"/>
-          </a:p>
-        </p:txBody>
-      </p:sp>
-      <p:sp>
-        <p:nvSpPr>
-          <p:cNvPr id="15" name="Text 13"/>
-          <p:cNvSpPr txBox="1"/>
-          <p:nvPr/>
-        </p:nvSpPr>
-        <p:spPr>
-          <a:xfrm>
-            <a:off x="6446520" y="2212848"/>
-            <a:ext cx="3291840" cy="274320"/>
-          </a:xfrm>
-          <a:prstGeom prst="rect">
-            <a:avLst/>
-          </a:prstGeom>
-          <a:noFill/>
-          <a:ln/>
-        </p:spPr>
-        <p:txBody>
-          <a:bodyPr wrap="square" lIns="0" tIns="0" rIns="0" bIns="0" rtlCol="0" anchor="ctr"/>
-          <a:lstStyle/>
-          <a:p>
-            <a:pPr indent="0" marL="0">
-              <a:buNone/>
-            </a:pPr>
-            <a:r>
-              <a:rPr lang="en-US" sz="1150" dirty="0">
-                <a:solidFill>
-                  <a:srgbClr val="3D4E60"/>
-                </a:solidFill>
-                <a:latin typeface="Meiryo" pitchFamily="34" charset="0"/>
-                <a:ea typeface="Meiryo" pitchFamily="34" charset="-122"/>
-                <a:cs typeface="Meiryo" pitchFamily="34" charset="-120"/>
-              </a:rPr>
-              <a:t>年初来高値（1月20日）</a:t>
-            </a:r>
-            <a:endParaRPr lang="en-US" sz="1150" dirty="0"/>
-          </a:p>
-        </p:txBody>
-      </p:sp>
-      <p:sp>
-        <p:nvSpPr>
-          <p:cNvPr id="16" name="Text 14"/>
-          <p:cNvSpPr txBox="1"/>
-          <p:nvPr/>
-        </p:nvSpPr>
-        <p:spPr>
-          <a:xfrm>
-            <a:off x="9738360" y="2176272"/>
-            <a:ext cx="1463040" cy="329184"/>
-          </a:xfrm>
-          <a:prstGeom prst="rect">
-            <a:avLst/>
-          </a:prstGeom>
-          <a:noFill/>
-          <a:ln/>
-        </p:spPr>
-        <p:txBody>
-          <a:bodyPr wrap="square" lIns="0" tIns="0" rIns="0" bIns="0" rtlCol="0" anchor="ctr"/>
-          <a:lstStyle/>
-          <a:p>
-            <a:pPr algn="r" indent="0" marL="0">
-              <a:buNone/>
-            </a:pPr>
-            <a:r>
-              <a:rPr lang="en-US" sz="1600" b="1" dirty="0">
-                <a:solidFill>
-                  <a:srgbClr val="7C8A99"/>
-                </a:solidFill>
-                <a:latin typeface="Meiryo" pitchFamily="34" charset="0"/>
-                <a:ea typeface="Meiryo" pitchFamily="34" charset="-122"/>
-                <a:cs typeface="Meiryo" pitchFamily="34" charset="-120"/>
-              </a:rPr>
-              <a:t>328円</a:t>
-            </a:r>
-            <a:endParaRPr lang="en-US" sz="1600" dirty="0"/>
-          </a:p>
-        </p:txBody>
-      </p:sp>
-      <p:sp>
-        <p:nvSpPr>
-          <p:cNvPr id="17" name="Text 15"/>
-          <p:cNvSpPr txBox="1"/>
-          <p:nvPr/>
-        </p:nvSpPr>
-        <p:spPr>
-          <a:xfrm>
-            <a:off x="6446520" y="2715768"/>
-            <a:ext cx="3291840" cy="274320"/>
-          </a:xfrm>
-          <a:prstGeom prst="rect">
-            <a:avLst/>
-          </a:prstGeom>
-          <a:noFill/>
-          <a:ln/>
-        </p:spPr>
-        <p:txBody>
-          <a:bodyPr wrap="square" lIns="0" tIns="0" rIns="0" bIns="0" rtlCol="0" anchor="ctr"/>
-          <a:lstStyle/>
-          <a:p>
-            <a:pPr indent="0" marL="0">
-              <a:buNone/>
-            </a:pPr>
-            <a:r>
-              <a:rPr lang="en-US" sz="1150" dirty="0">
-                <a:solidFill>
-                  <a:srgbClr val="3D4E60"/>
-                </a:solidFill>
-                <a:latin typeface="Meiryo" pitchFamily="34" charset="0"/>
-                <a:ea typeface="Meiryo" pitchFamily="34" charset="-122"/>
-                <a:cs typeface="Meiryo" pitchFamily="34" charset="-120"/>
-              </a:rPr>
-              <a:t>6ヶ月平均（推定）</a:t>
-            </a:r>
-            <a:endParaRPr lang="en-US" sz="1150" dirty="0"/>
-          </a:p>
-        </p:txBody>
-      </p:sp>
-      <p:sp>
-        <p:nvSpPr>
-          <p:cNvPr id="18" name="Text 16"/>
-          <p:cNvSpPr txBox="1"/>
-          <p:nvPr/>
-        </p:nvSpPr>
-        <p:spPr>
-          <a:xfrm>
-            <a:off x="9738360" y="2679192"/>
-            <a:ext cx="1463040" cy="329184"/>
-          </a:xfrm>
-          <a:prstGeom prst="rect">
-            <a:avLst/>
-          </a:prstGeom>
-          <a:noFill/>
-          <a:ln/>
-        </p:spPr>
-        <p:txBody>
-          <a:bodyPr wrap="square" lIns="0" tIns="0" rIns="0" bIns="0" rtlCol="0" anchor="ctr"/>
-          <a:lstStyle/>
-          <a:p>
-            <a:pPr algn="r" indent="0" marL="0">
-              <a:buNone/>
-            </a:pPr>
-            <a:r>
-              <a:rPr lang="en-US" sz="1600" b="1" dirty="0">
-                <a:solidFill>
-                  <a:srgbClr val="3D4E60"/>
-                </a:solidFill>
-                <a:latin typeface="Meiryo" pitchFamily="34" charset="0"/>
-                <a:ea typeface="Meiryo" pitchFamily="34" charset="-122"/>
-                <a:cs typeface="Meiryo" pitchFamily="34" charset="-120"/>
-              </a:rPr>
-              <a:t>約240円</a:t>
-            </a:r>
-            <a:endParaRPr lang="en-US" sz="1600" dirty="0"/>
-          </a:p>
-        </p:txBody>
-      </p:sp>
-      <p:sp>
-        <p:nvSpPr>
-          <p:cNvPr id="19" name="Text 17"/>
-          <p:cNvSpPr txBox="1"/>
-          <p:nvPr/>
-        </p:nvSpPr>
-        <p:spPr>
-          <a:xfrm>
-            <a:off x="6446520" y="3218688"/>
-            <a:ext cx="3291840" cy="274320"/>
-          </a:xfrm>
-          <a:prstGeom prst="rect">
-            <a:avLst/>
-          </a:prstGeom>
-          <a:noFill/>
-          <a:ln/>
-        </p:spPr>
-        <p:txBody>
-          <a:bodyPr wrap="square" lIns="0" tIns="0" rIns="0" bIns="0" rtlCol="0" anchor="ctr"/>
-          <a:lstStyle/>
-          <a:p>
-            <a:pPr indent="0" marL="0">
-              <a:buNone/>
-            </a:pPr>
-            <a:r>
-              <a:rPr lang="en-US" sz="1150" dirty="0">
-                <a:solidFill>
-                  <a:srgbClr val="3D4E60"/>
-                </a:solidFill>
-                <a:latin typeface="Meiryo" pitchFamily="34" charset="0"/>
-                <a:ea typeface="Meiryo" pitchFamily="34" charset="-122"/>
-                <a:cs typeface="Meiryo" pitchFamily="34" charset="-120"/>
-              </a:rPr>
-              <a:t>3ヶ月平均（推定）</a:t>
-            </a:r>
-            <a:endParaRPr lang="en-US" sz="1150" dirty="0"/>
-          </a:p>
-        </p:txBody>
-      </p:sp>
-      <p:sp>
-        <p:nvSpPr>
-          <p:cNvPr id="20" name="Text 18"/>
-          <p:cNvSpPr txBox="1"/>
-          <p:nvPr/>
-        </p:nvSpPr>
-        <p:spPr>
-          <a:xfrm>
-            <a:off x="9738360" y="3182112"/>
-            <a:ext cx="1463040" cy="329184"/>
-          </a:xfrm>
-          <a:prstGeom prst="rect">
-            <a:avLst/>
-          </a:prstGeom>
-          <a:noFill/>
-          <a:ln/>
-        </p:spPr>
-        <p:txBody>
-          <a:bodyPr wrap="square" lIns="0" tIns="0" rIns="0" bIns="0" rtlCol="0" anchor="ctr"/>
-          <a:lstStyle/>
-          <a:p>
-            <a:pPr algn="r" indent="0" marL="0">
-              <a:buNone/>
-            </a:pPr>
-            <a:r>
-              <a:rPr lang="en-US" sz="1600" b="1" dirty="0">
-                <a:solidFill>
-                  <a:srgbClr val="6E2639"/>
-                </a:solidFill>
-                <a:latin typeface="Meiryo" pitchFamily="34" charset="0"/>
-                <a:ea typeface="Meiryo" pitchFamily="34" charset="-122"/>
-                <a:cs typeface="Meiryo" pitchFamily="34" charset="-120"/>
-              </a:rPr>
-              <a:t>約229円</a:t>
-            </a:r>
-            <a:endParaRPr lang="en-US" sz="1600" dirty="0"/>
-          </a:p>
-        </p:txBody>
-      </p:sp>
-      <p:sp>
-        <p:nvSpPr>
-          <p:cNvPr id="21" name="Text 19"/>
-          <p:cNvSpPr txBox="1"/>
-          <p:nvPr/>
-        </p:nvSpPr>
-        <p:spPr>
-          <a:xfrm>
-            <a:off x="6446520" y="3621024"/>
-            <a:ext cx="4800600" cy="411480"/>
-          </a:xfrm>
-          <a:prstGeom prst="rect">
-            <a:avLst/>
-          </a:prstGeom>
-          <a:noFill/>
-          <a:ln/>
-        </p:spPr>
-        <p:txBody>
-          <a:bodyPr wrap="square" lIns="0" tIns="0" rIns="0" bIns="0" rtlCol="0" anchor="ctr"/>
-          <a:lstStyle/>
-          <a:p>
-            <a:pPr indent="0" marL="0">
-              <a:buNone/>
-            </a:pPr>
-            <a:r>
-              <a:rPr lang="en-US" sz="1050" dirty="0">
-                <a:solidFill>
-                  <a:srgbClr val="3D4E60"/>
-                </a:solidFill>
-                <a:latin typeface="Meiryo" pitchFamily="34" charset="0"/>
-                <a:ea typeface="Meiryo" pitchFamily="34" charset="-122"/>
-                <a:cs typeface="Meiryo" pitchFamily="34" charset="-120"/>
-              </a:rPr>
-              <a:t>対価は現金ではなく、この株式です。年初来で3割下落しており、買い増しの原資を借りる際の担保価値にも直結します。</a:t>
-            </a:r>
-            <a:endParaRPr lang="en-US" sz="1050" dirty="0"/>
-          </a:p>
-        </p:txBody>
-      </p:sp>
-      <p:sp>
-        <p:nvSpPr>
-          <p:cNvPr id="22" name="Shape 20"/>
-          <p:cNvSpPr/>
-          <p:nvPr/>
-        </p:nvSpPr>
-        <p:spPr>
-          <a:xfrm>
-            <a:off x="640080" y="4187952"/>
-            <a:ext cx="10881360" cy="1783080"/>
-          </a:xfrm>
-          <a:prstGeom prst="roundRect">
-            <a:avLst>
-              <a:gd name="adj" fmla="val 3077"/>
-            </a:avLst>
-          </a:prstGeom>
-          <a:solidFill>
-            <a:srgbClr val="F7F3EC"/>
-          </a:solidFill>
-          <a:ln w="12700">
-            <a:solidFill>
-              <a:srgbClr val="E0D3BE"/>
-            </a:solidFill>
-            <a:prstDash val="solid"/>
-          </a:ln>
-          <a:effectLst>
-            <a:outerShdw sx="100000" sy="100000" kx="0" ky="0" algn="bl" rotWithShape="0" blurRad="101600" dist="12700" dir="5400000">
-              <a:srgbClr val="AAB4BE">
-                <a:alpha val="18000"/>
-              </a:srgbClr>
-            </a:outerShdw>
-          </a:effectLst>
-        </p:spPr>
-      </p:sp>
-      <p:sp>
-        <p:nvSpPr>
-          <p:cNvPr id="23" name="Text 21"/>
-          <p:cNvSpPr txBox="1"/>
-          <p:nvPr/>
-        </p:nvSpPr>
-        <p:spPr>
-          <a:xfrm>
-            <a:off x="914400" y="4352544"/>
-            <a:ext cx="5486400" cy="292608"/>
-          </a:xfrm>
-          <a:prstGeom prst="rect">
-            <a:avLst/>
-          </a:prstGeom>
-          <a:noFill/>
-          <a:ln/>
-        </p:spPr>
-        <p:txBody>
-          <a:bodyPr wrap="square" lIns="0" tIns="0" rIns="0" bIns="0" rtlCol="0" anchor="ctr"/>
-          <a:lstStyle/>
-          <a:p>
-            <a:pPr indent="0" marL="0">
-              <a:buNone/>
-            </a:pPr>
-            <a:r>
-              <a:rPr lang="en-US" sz="1350" b="1" dirty="0">
-                <a:solidFill>
-                  <a:srgbClr val="8F5510"/>
-                </a:solidFill>
-                <a:latin typeface="Meiryo" pitchFamily="34" charset="0"/>
-                <a:ea typeface="Meiryo" pitchFamily="34" charset="-122"/>
-                <a:cs typeface="Meiryo" pitchFamily="34" charset="-120"/>
-              </a:rPr>
-              <a:t>交渉上、押さえておきたい点</a:t>
-            </a:r>
-            <a:endParaRPr lang="en-US" sz="1350" dirty="0"/>
-          </a:p>
-        </p:txBody>
-      </p:sp>
-      <p:sp>
-        <p:nvSpPr>
-          <p:cNvPr id="24" name="Shape 22"/>
-          <p:cNvSpPr/>
-          <p:nvPr/>
-        </p:nvSpPr>
-        <p:spPr>
-          <a:xfrm>
-            <a:off x="914400" y="4773168"/>
-            <a:ext cx="146304" cy="146304"/>
-          </a:xfrm>
-          <a:prstGeom prst="roundRect">
-            <a:avLst>
-              <a:gd name="adj" fmla="val 50000"/>
-            </a:avLst>
-          </a:prstGeom>
-          <a:solidFill>
-            <a:srgbClr val="8F5510"/>
-          </a:solidFill>
-          <a:ln/>
-        </p:spPr>
-      </p:sp>
-      <p:sp>
-        <p:nvSpPr>
-          <p:cNvPr id="25" name="Text 23"/>
-          <p:cNvSpPr txBox="1"/>
-          <p:nvPr/>
-        </p:nvSpPr>
-        <p:spPr>
-          <a:xfrm>
-            <a:off x="1188720" y="4690872"/>
-            <a:ext cx="3108960" cy="274320"/>
-          </a:xfrm>
-          <a:prstGeom prst="rect">
-            <a:avLst/>
-          </a:prstGeom>
-          <a:noFill/>
-          <a:ln/>
-        </p:spPr>
-        <p:txBody>
-          <a:bodyPr wrap="square" lIns="0" tIns="0" rIns="0" bIns="0" rtlCol="0" anchor="ctr"/>
-          <a:lstStyle/>
-          <a:p>
-            <a:pPr indent="0" marL="0">
-              <a:buNone/>
-            </a:pPr>
-            <a:r>
-              <a:rPr lang="en-US" sz="1150" b="1" dirty="0">
-                <a:solidFill>
-                  <a:srgbClr val="1E2A38"/>
-                </a:solidFill>
-                <a:latin typeface="Meiryo" pitchFamily="34" charset="0"/>
-                <a:ea typeface="Meiryo" pitchFamily="34" charset="-122"/>
-                <a:cs typeface="Meiryo" pitchFamily="34" charset="-120"/>
-              </a:rPr>
-              <a:t>基準株価は3ヶ月平均を</a:t>
-            </a:r>
-            <a:endParaRPr lang="en-US" sz="1150" dirty="0"/>
-          </a:p>
-        </p:txBody>
-      </p:sp>
-      <p:sp>
-        <p:nvSpPr>
-          <p:cNvPr id="26" name="Text 24"/>
-          <p:cNvSpPr txBox="1"/>
-          <p:nvPr/>
-        </p:nvSpPr>
-        <p:spPr>
-          <a:xfrm>
-            <a:off x="1188720" y="5001768"/>
-            <a:ext cx="3108960" cy="914400"/>
-          </a:xfrm>
-          <a:prstGeom prst="rect">
-            <a:avLst/>
-          </a:prstGeom>
-          <a:noFill/>
-          <a:ln/>
-        </p:spPr>
-        <p:txBody>
-          <a:bodyPr wrap="square" lIns="0" tIns="0" rIns="0" bIns="0" rtlCol="0" anchor="ctr"/>
-          <a:lstStyle/>
-          <a:p>
-            <a:pPr indent="0" marL="0">
-              <a:lnSpc>
-                <a:spcPct val="115000"/>
-              </a:lnSpc>
-              <a:buNone/>
-            </a:pPr>
-            <a:r>
-              <a:rPr lang="en-US" sz="950" dirty="0">
-                <a:solidFill>
-                  <a:srgbClr val="3D4E60"/>
-                </a:solidFill>
-                <a:latin typeface="Meiryo" pitchFamily="34" charset="0"/>
-                <a:ea typeface="Meiryo" pitchFamily="34" charset="-122"/>
-                <a:cs typeface="Meiryo" pitchFamily="34" charset="-120"/>
-              </a:rPr>
-              <a:t>3ヶ月平均229円は6ヶ月平均240円より低く、同じ評価額でも交付される株数が増えます。当社に有利な側です。</a:t>
-            </a:r>
-            <a:endParaRPr lang="en-US" sz="950" dirty="0"/>
-          </a:p>
-        </p:txBody>
-      </p:sp>
-      <p:sp>
-        <p:nvSpPr>
-          <p:cNvPr id="27" name="Shape 25"/>
-          <p:cNvSpPr/>
-          <p:nvPr/>
-        </p:nvSpPr>
-        <p:spPr>
-          <a:xfrm>
-            <a:off x="4498848" y="4773168"/>
-            <a:ext cx="146304" cy="146304"/>
-          </a:xfrm>
-          <a:prstGeom prst="roundRect">
-            <a:avLst>
-              <a:gd name="adj" fmla="val 50000"/>
-            </a:avLst>
-          </a:prstGeom>
-          <a:solidFill>
-            <a:srgbClr val="8F5510"/>
-          </a:solidFill>
-          <a:ln/>
-        </p:spPr>
-      </p:sp>
-      <p:sp>
-        <p:nvSpPr>
-          <p:cNvPr id="28" name="Text 26"/>
-          <p:cNvSpPr txBox="1"/>
-          <p:nvPr/>
-        </p:nvSpPr>
-        <p:spPr>
-          <a:xfrm>
-            <a:off x="4773168" y="4690872"/>
-            <a:ext cx="3108960" cy="274320"/>
-          </a:xfrm>
-          <a:prstGeom prst="rect">
-            <a:avLst/>
-          </a:prstGeom>
-          <a:noFill/>
-          <a:ln/>
-        </p:spPr>
-        <p:txBody>
-          <a:bodyPr wrap="square" lIns="0" tIns="0" rIns="0" bIns="0" rtlCol="0" anchor="ctr"/>
-          <a:lstStyle/>
-          <a:p>
-            <a:pPr indent="0" marL="0">
-              <a:buNone/>
-            </a:pPr>
-            <a:r>
-              <a:rPr lang="en-US" sz="1150" b="1" dirty="0">
-                <a:solidFill>
-                  <a:srgbClr val="1E2A38"/>
-                </a:solidFill>
-                <a:latin typeface="Meiryo" pitchFamily="34" charset="0"/>
-                <a:ea typeface="Meiryo" pitchFamily="34" charset="-122"/>
-                <a:cs typeface="Meiryo" pitchFamily="34" charset="-120"/>
-              </a:rPr>
-              <a:t>評価額は20億円を下限に</a:t>
-            </a:r>
-            <a:endParaRPr lang="en-US" sz="1150" dirty="0"/>
-          </a:p>
-        </p:txBody>
-      </p:sp>
-      <p:sp>
-        <p:nvSpPr>
-          <p:cNvPr id="29" name="Text 27"/>
-          <p:cNvSpPr txBox="1"/>
-          <p:nvPr/>
-        </p:nvSpPr>
-        <p:spPr>
-          <a:xfrm>
-            <a:off x="4773168" y="5001768"/>
-            <a:ext cx="3108960" cy="914400"/>
-          </a:xfrm>
-          <a:prstGeom prst="rect">
-            <a:avLst/>
-          </a:prstGeom>
-          <a:noFill/>
-          <a:ln/>
-        </p:spPr>
-        <p:txBody>
-          <a:bodyPr wrap="square" lIns="0" tIns="0" rIns="0" bIns="0" rtlCol="0" anchor="ctr"/>
-          <a:lstStyle/>
-          <a:p>
-            <a:pPr indent="0" marL="0">
-              <a:lnSpc>
-                <a:spcPct val="115000"/>
-              </a:lnSpc>
-              <a:buNone/>
-            </a:pPr>
-            <a:r>
-              <a:rPr lang="en-US" sz="950" dirty="0">
-                <a:solidFill>
-                  <a:srgbClr val="3D4E60"/>
-                </a:solidFill>
-                <a:latin typeface="Meiryo" pitchFamily="34" charset="0"/>
-                <a:ea typeface="Meiryo" pitchFamily="34" charset="-122"/>
-                <a:cs typeface="Meiryo" pitchFamily="34" charset="-120"/>
-              </a:rPr>
-              <a:t>MBOで既存株主に20億円評価で退出いただく前提と整合しません。18億円では社内説明が立ちません。</a:t>
-            </a:r>
-            <a:endParaRPr lang="en-US" sz="950" dirty="0"/>
-          </a:p>
-        </p:txBody>
-      </p:sp>
-      <p:sp>
-        <p:nvSpPr>
-          <p:cNvPr id="30" name="Shape 28"/>
-          <p:cNvSpPr/>
-          <p:nvPr/>
-        </p:nvSpPr>
-        <p:spPr>
-          <a:xfrm>
-            <a:off x="8083296" y="4773168"/>
-            <a:ext cx="146304" cy="146304"/>
-          </a:xfrm>
-          <a:prstGeom prst="roundRect">
-            <a:avLst>
-              <a:gd name="adj" fmla="val 50000"/>
-            </a:avLst>
-          </a:prstGeom>
-          <a:solidFill>
-            <a:srgbClr val="8F5510"/>
-          </a:solidFill>
-          <a:ln/>
-        </p:spPr>
-      </p:sp>
-      <p:sp>
-        <p:nvSpPr>
-          <p:cNvPr id="31" name="Text 29"/>
-          <p:cNvSpPr txBox="1"/>
-          <p:nvPr/>
-        </p:nvSpPr>
-        <p:spPr>
-          <a:xfrm>
-            <a:off x="8357616" y="4690872"/>
-            <a:ext cx="3108960" cy="274320"/>
-          </a:xfrm>
-          <a:prstGeom prst="rect">
-            <a:avLst/>
-          </a:prstGeom>
-          <a:noFill/>
-          <a:ln/>
-        </p:spPr>
-        <p:txBody>
-          <a:bodyPr wrap="square" lIns="0" tIns="0" rIns="0" bIns="0" rtlCol="0" anchor="ctr"/>
-          <a:lstStyle/>
-          <a:p>
-            <a:pPr indent="0" marL="0">
-              <a:buNone/>
-            </a:pPr>
-            <a:r>
-              <a:rPr lang="en-US" sz="1150" b="1" dirty="0">
-                <a:solidFill>
-                  <a:srgbClr val="1E2A38"/>
-                </a:solidFill>
-                <a:latin typeface="Meiryo" pitchFamily="34" charset="0"/>
-                <a:ea typeface="Meiryo" pitchFamily="34" charset="-122"/>
-                <a:cs typeface="Meiryo" pitchFamily="34" charset="-120"/>
-              </a:rPr>
-              <a:t>重松氏の譲渡は書面で</a:t>
-            </a:r>
-            <a:endParaRPr lang="en-US" sz="1150" dirty="0"/>
-          </a:p>
-        </p:txBody>
-      </p:sp>
-      <p:sp>
-        <p:nvSpPr>
-          <p:cNvPr id="32" name="Text 30"/>
-          <p:cNvSpPr txBox="1"/>
-          <p:nvPr/>
-        </p:nvSpPr>
-        <p:spPr>
-          <a:xfrm>
-            <a:off x="8357616" y="5001768"/>
-            <a:ext cx="3108960" cy="914400"/>
-          </a:xfrm>
-          <a:prstGeom prst="rect">
-            <a:avLst/>
-          </a:prstGeom>
-          <a:noFill/>
-          <a:ln/>
-        </p:spPr>
-        <p:txBody>
-          <a:bodyPr wrap="square" lIns="0" tIns="0" rIns="0" bIns="0" rtlCol="0" anchor="ctr"/>
-          <a:lstStyle/>
-          <a:p>
-            <a:pPr indent="0" marL="0">
-              <a:lnSpc>
-                <a:spcPct val="115000"/>
-              </a:lnSpc>
-              <a:buNone/>
-            </a:pPr>
-            <a:r>
-              <a:rPr lang="en-US" sz="950" dirty="0">
-                <a:solidFill>
-                  <a:srgbClr val="3D4E60"/>
-                </a:solidFill>
-                <a:latin typeface="Meiryo" pitchFamily="34" charset="0"/>
-                <a:ea typeface="Meiryo" pitchFamily="34" charset="-122"/>
-                <a:cs typeface="Meiryo" pitchFamily="34" charset="-120"/>
-              </a:rPr>
-              <a:t>会長就任と持分譲渡の意向は、時期・価格・数量を含めて覚書にしておく必要があります。口頭の前提のままでは資金計画が組めません。</a:t>
-            </a:r>
-            <a:endParaRPr lang="en-US" sz="950" dirty="0"/>
-          </a:p>
-        </p:txBody>
-      </p:sp>
-      <p:sp>
-        <p:nvSpPr>
-          <p:cNvPr id="33" name="Text 31"/>
-          <p:cNvSpPr txBox="1"/>
-          <p:nvPr/>
-        </p:nvSpPr>
-        <p:spPr>
-          <a:xfrm>
-            <a:off x="640080" y="6108192"/>
-            <a:ext cx="10881360" cy="274320"/>
-          </a:xfrm>
-          <a:prstGeom prst="rect">
-            <a:avLst/>
-          </a:prstGeom>
-          <a:noFill/>
-          <a:ln/>
-        </p:spPr>
-        <p:txBody>
-          <a:bodyPr wrap="square" lIns="0" tIns="0" rIns="0" bIns="0" rtlCol="0" anchor="ctr"/>
-          <a:lstStyle/>
-          <a:p>
-            <a:pPr indent="0" marL="0">
-              <a:buNone/>
-            </a:pPr>
-            <a:r>
-              <a:rPr lang="en-US" sz="900" dirty="0">
-                <a:solidFill>
-                  <a:srgbClr val="7C8A99"/>
-                </a:solidFill>
-                <a:latin typeface="Meiryo" pitchFamily="34" charset="0"/>
-                <a:ea typeface="Meiryo" pitchFamily="34" charset="-122"/>
-                <a:cs typeface="Meiryo" pitchFamily="34" charset="-120"/>
-              </a:rPr>
-              <a:t>3ヶ月・6ヶ月平均株価は公開情報からの推定値です（3ヶ月レンジ225〜235円、6ヶ月レンジ235〜250円）。確定値は証券会社経由でご確認ください。</a:t>
-            </a:r>
-            <a:endParaRPr lang="en-US" sz="900" dirty="0"/>
           </a:p>
         </p:txBody>
       </p:sp>
